--- a/docs/Spiel_Quantenzufall_Präsentation_neu.pptx
+++ b/docs/Spiel_Quantenzufall_Präsentation_neu.pptx
@@ -5,7 +5,7 @@
     <p:sldMasterId id="2147483713" r:id="rId1"/>
   </p:sldMasterIdLst>
   <p:notesMasterIdLst>
-    <p:notesMasterId r:id="rId19"/>
+    <p:notesMasterId r:id="rId20"/>
   </p:notesMasterIdLst>
   <p:sldIdLst>
     <p:sldId id="256" r:id="rId2"/>
@@ -25,6 +25,7 @@
     <p:sldId id="284" r:id="rId16"/>
     <p:sldId id="285" r:id="rId17"/>
     <p:sldId id="265" r:id="rId18"/>
+    <p:sldId id="286" r:id="rId19"/>
   </p:sldIdLst>
   <p:sldSz cx="12192000" cy="6858000"/>
   <p:notesSz cx="6858000" cy="9144000"/>
@@ -224,7 +225,7 @@
           <a:p>
             <a:fld id="{1CF6A834-6FAB-4BA6-A272-563BDCE7B8EB}" type="datetimeFigureOut">
               <a:rPr lang="de-DE" smtClean="0"/>
-              <a:t>17.04.2026</a:t>
+              <a:t>21.04.2026</a:t>
             </a:fld>
             <a:endParaRPr lang="de-DE"/>
           </a:p>
@@ -625,7 +626,7 @@
           <a:noFill/>
           <a:extLst>
             <a:ext uri="{909E8E84-426E-40dd-AFC4-6F175D3DCCD1}">
-              <a14:hiddenFill xmlns="" xmlns:a14="http://schemas.microsoft.com/office/drawing/2010/main">
+              <a14:hiddenFill xmlns:a14="http://schemas.microsoft.com/office/drawing/2010/main" xmlns="">
                 <a:solidFill>
                   <a:srgbClr val="FFFFFF"/>
                 </a:solidFill>
@@ -685,7 +686,7 @@
             </a:ln>
             <a:extLst>
               <a:ext uri="{91240B29-F687-4f45-9708-019B960494DF}">
-                <a14:hiddenLine xmlns="" xmlns:a14="http://schemas.microsoft.com/office/drawing/2010/main" w="9525">
+                <a14:hiddenLine xmlns:a14="http://schemas.microsoft.com/office/drawing/2010/main" xmlns="" w="9525">
                   <a:solidFill>
                     <a:srgbClr val="000000"/>
                   </a:solidFill>
@@ -782,7 +783,7 @@
             </a:ln>
             <a:extLst>
               <a:ext uri="{91240B29-F687-4f45-9708-019B960494DF}">
-                <a14:hiddenLine xmlns="" xmlns:a14="http://schemas.microsoft.com/office/drawing/2010/main" w="9525">
+                <a14:hiddenLine xmlns:a14="http://schemas.microsoft.com/office/drawing/2010/main" xmlns="" w="9525">
                   <a:solidFill>
                     <a:srgbClr val="000000"/>
                   </a:solidFill>
@@ -879,7 +880,7 @@
             </a:ln>
             <a:extLst>
               <a:ext uri="{91240B29-F687-4f45-9708-019B960494DF}">
-                <a14:hiddenLine xmlns="" xmlns:a14="http://schemas.microsoft.com/office/drawing/2010/main" w="9525">
+                <a14:hiddenLine xmlns:a14="http://schemas.microsoft.com/office/drawing/2010/main" xmlns="" w="9525">
                   <a:solidFill>
                     <a:srgbClr val="000000"/>
                   </a:solidFill>
@@ -920,7 +921,7 @@
             </a:ln>
             <a:extLst>
               <a:ext uri="{91240B29-F687-4f45-9708-019B960494DF}">
-                <a14:hiddenLine xmlns="" xmlns:a14="http://schemas.microsoft.com/office/drawing/2010/main" w="9525">
+                <a14:hiddenLine xmlns:a14="http://schemas.microsoft.com/office/drawing/2010/main" xmlns="" w="9525">
                   <a:solidFill>
                     <a:srgbClr val="000000"/>
                   </a:solidFill>
@@ -1017,7 +1018,7 @@
             </a:ln>
             <a:extLst>
               <a:ext uri="{91240B29-F687-4f45-9708-019B960494DF}">
-                <a14:hiddenLine xmlns="" xmlns:a14="http://schemas.microsoft.com/office/drawing/2010/main" w="9525">
+                <a14:hiddenLine xmlns:a14="http://schemas.microsoft.com/office/drawing/2010/main" xmlns="" w="9525">
                   <a:solidFill>
                     <a:srgbClr val="000000"/>
                   </a:solidFill>
@@ -1086,7 +1087,7 @@
             </a:ln>
             <a:extLst>
               <a:ext uri="{91240B29-F687-4f45-9708-019B960494DF}">
-                <a14:hiddenLine xmlns="" xmlns:a14="http://schemas.microsoft.com/office/drawing/2010/main" w="9525">
+                <a14:hiddenLine xmlns:a14="http://schemas.microsoft.com/office/drawing/2010/main" xmlns="" w="9525">
                   <a:solidFill>
                     <a:srgbClr val="000000"/>
                   </a:solidFill>
@@ -1155,7 +1156,7 @@
             </a:ln>
             <a:extLst>
               <a:ext uri="{91240B29-F687-4f45-9708-019B960494DF}">
-                <a14:hiddenLine xmlns="" xmlns:a14="http://schemas.microsoft.com/office/drawing/2010/main" w="9525">
+                <a14:hiddenLine xmlns:a14="http://schemas.microsoft.com/office/drawing/2010/main" xmlns="" w="9525">
                   <a:solidFill>
                     <a:srgbClr val="000000"/>
                   </a:solidFill>
@@ -1252,7 +1253,7 @@
             </a:ln>
             <a:extLst>
               <a:ext uri="{91240B29-F687-4f45-9708-019B960494DF}">
-                <a14:hiddenLine xmlns="" xmlns:a14="http://schemas.microsoft.com/office/drawing/2010/main" w="9525">
+                <a14:hiddenLine xmlns:a14="http://schemas.microsoft.com/office/drawing/2010/main" xmlns="" w="9525">
                   <a:solidFill>
                     <a:srgbClr val="000000"/>
                   </a:solidFill>
@@ -1321,7 +1322,7 @@
             </a:ln>
             <a:extLst>
               <a:ext uri="{91240B29-F687-4f45-9708-019B960494DF}">
-                <a14:hiddenLine xmlns="" xmlns:a14="http://schemas.microsoft.com/office/drawing/2010/main" w="9525">
+                <a14:hiddenLine xmlns:a14="http://schemas.microsoft.com/office/drawing/2010/main" xmlns="" w="9525">
                   <a:solidFill>
                     <a:srgbClr val="000000"/>
                   </a:solidFill>
@@ -1390,7 +1391,7 @@
             </a:ln>
             <a:extLst>
               <a:ext uri="{91240B29-F687-4f45-9708-019B960494DF}">
-                <a14:hiddenLine xmlns="" xmlns:a14="http://schemas.microsoft.com/office/drawing/2010/main" w="9525">
+                <a14:hiddenLine xmlns:a14="http://schemas.microsoft.com/office/drawing/2010/main" xmlns="" w="9525">
                   <a:solidFill>
                     <a:srgbClr val="000000"/>
                   </a:solidFill>
@@ -1487,7 +1488,7 @@
             </a:ln>
             <a:extLst>
               <a:ext uri="{91240B29-F687-4f45-9708-019B960494DF}">
-                <a14:hiddenLine xmlns="" xmlns:a14="http://schemas.microsoft.com/office/drawing/2010/main" w="9525">
+                <a14:hiddenLine xmlns:a14="http://schemas.microsoft.com/office/drawing/2010/main" xmlns="" w="9525">
                   <a:solidFill>
                     <a:srgbClr val="000000"/>
                   </a:solidFill>
@@ -1584,7 +1585,7 @@
             </a:ln>
             <a:extLst>
               <a:ext uri="{91240B29-F687-4f45-9708-019B960494DF}">
-                <a14:hiddenLine xmlns="" xmlns:a14="http://schemas.microsoft.com/office/drawing/2010/main" w="9525">
+                <a14:hiddenLine xmlns:a14="http://schemas.microsoft.com/office/drawing/2010/main" xmlns="" w="9525">
                   <a:solidFill>
                     <a:srgbClr val="000000"/>
                   </a:solidFill>
@@ -1653,7 +1654,7 @@
             </a:ln>
             <a:extLst>
               <a:ext uri="{91240B29-F687-4f45-9708-019B960494DF}">
-                <a14:hiddenLine xmlns="" xmlns:a14="http://schemas.microsoft.com/office/drawing/2010/main" w="9525">
+                <a14:hiddenLine xmlns:a14="http://schemas.microsoft.com/office/drawing/2010/main" xmlns="" w="9525">
                   <a:solidFill>
                     <a:srgbClr val="000000"/>
                   </a:solidFill>
@@ -1770,7 +1771,7 @@
             </a:ln>
             <a:extLst>
               <a:ext uri="{91240B29-F687-4f45-9708-019B960494DF}">
-                <a14:hiddenLine xmlns="" xmlns:a14="http://schemas.microsoft.com/office/drawing/2010/main" w="9525">
+                <a14:hiddenLine xmlns:a14="http://schemas.microsoft.com/office/drawing/2010/main" xmlns="" w="9525">
                   <a:solidFill>
                     <a:srgbClr val="000000"/>
                   </a:solidFill>
@@ -1839,7 +1840,7 @@
             </a:ln>
             <a:extLst>
               <a:ext uri="{91240B29-F687-4f45-9708-019B960494DF}">
-                <a14:hiddenLine xmlns="" xmlns:a14="http://schemas.microsoft.com/office/drawing/2010/main" w="9525">
+                <a14:hiddenLine xmlns:a14="http://schemas.microsoft.com/office/drawing/2010/main" xmlns="" w="9525">
                   <a:solidFill>
                     <a:srgbClr val="000000"/>
                   </a:solidFill>
@@ -1936,7 +1937,7 @@
             </a:ln>
             <a:extLst>
               <a:ext uri="{91240B29-F687-4f45-9708-019B960494DF}">
-                <a14:hiddenLine xmlns="" xmlns:a14="http://schemas.microsoft.com/office/drawing/2010/main" w="9525">
+                <a14:hiddenLine xmlns:a14="http://schemas.microsoft.com/office/drawing/2010/main" xmlns="" w="9525">
                   <a:solidFill>
                     <a:srgbClr val="000000"/>
                   </a:solidFill>
@@ -2033,7 +2034,7 @@
             </a:ln>
             <a:extLst>
               <a:ext uri="{91240B29-F687-4f45-9708-019B960494DF}">
-                <a14:hiddenLine xmlns="" xmlns:a14="http://schemas.microsoft.com/office/drawing/2010/main" w="9525">
+                <a14:hiddenLine xmlns:a14="http://schemas.microsoft.com/office/drawing/2010/main" xmlns="" w="9525">
                   <a:solidFill>
                     <a:srgbClr val="000000"/>
                   </a:solidFill>
@@ -2102,7 +2103,7 @@
             </a:ln>
             <a:extLst>
               <a:ext uri="{91240B29-F687-4f45-9708-019B960494DF}">
-                <a14:hiddenLine xmlns="" xmlns:a14="http://schemas.microsoft.com/office/drawing/2010/main" w="9525">
+                <a14:hiddenLine xmlns:a14="http://schemas.microsoft.com/office/drawing/2010/main" xmlns="" w="9525">
                   <a:solidFill>
                     <a:srgbClr val="000000"/>
                   </a:solidFill>
@@ -2199,7 +2200,7 @@
             </a:ln>
             <a:extLst>
               <a:ext uri="{91240B29-F687-4f45-9708-019B960494DF}">
-                <a14:hiddenLine xmlns="" xmlns:a14="http://schemas.microsoft.com/office/drawing/2010/main" w="9525">
+                <a14:hiddenLine xmlns:a14="http://schemas.microsoft.com/office/drawing/2010/main" xmlns="" w="9525">
                   <a:solidFill>
                     <a:srgbClr val="000000"/>
                   </a:solidFill>
@@ -2296,7 +2297,7 @@
             </a:ln>
             <a:extLst>
               <a:ext uri="{91240B29-F687-4f45-9708-019B960494DF}">
-                <a14:hiddenLine xmlns="" xmlns:a14="http://schemas.microsoft.com/office/drawing/2010/main" w="9525">
+                <a14:hiddenLine xmlns:a14="http://schemas.microsoft.com/office/drawing/2010/main" xmlns="" w="9525">
                   <a:solidFill>
                     <a:srgbClr val="000000"/>
                   </a:solidFill>
@@ -2359,7 +2360,7 @@
             </a:ln>
             <a:extLst>
               <a:ext uri="{91240B29-F687-4f45-9708-019B960494DF}">
-                <a14:hiddenLine xmlns="" xmlns:a14="http://schemas.microsoft.com/office/drawing/2010/main" w="9525">
+                <a14:hiddenLine xmlns:a14="http://schemas.microsoft.com/office/drawing/2010/main" xmlns="" w="9525">
                   <a:solidFill>
                     <a:srgbClr val="000000"/>
                   </a:solidFill>
@@ -2456,7 +2457,7 @@
             </a:ln>
             <a:extLst>
               <a:ext uri="{91240B29-F687-4f45-9708-019B960494DF}">
-                <a14:hiddenLine xmlns="" xmlns:a14="http://schemas.microsoft.com/office/drawing/2010/main" w="9525">
+                <a14:hiddenLine xmlns:a14="http://schemas.microsoft.com/office/drawing/2010/main" xmlns="" w="9525">
                   <a:solidFill>
                     <a:srgbClr val="000000"/>
                   </a:solidFill>
@@ -2519,7 +2520,7 @@
             </a:ln>
             <a:extLst>
               <a:ext uri="{91240B29-F687-4f45-9708-019B960494DF}">
-                <a14:hiddenLine xmlns="" xmlns:a14="http://schemas.microsoft.com/office/drawing/2010/main" w="9525">
+                <a14:hiddenLine xmlns:a14="http://schemas.microsoft.com/office/drawing/2010/main" xmlns="" w="9525">
                   <a:solidFill>
                     <a:srgbClr val="000000"/>
                   </a:solidFill>
@@ -2616,7 +2617,7 @@
             </a:ln>
             <a:extLst>
               <a:ext uri="{91240B29-F687-4f45-9708-019B960494DF}">
-                <a14:hiddenLine xmlns="" xmlns:a14="http://schemas.microsoft.com/office/drawing/2010/main" w="9525">
+                <a14:hiddenLine xmlns:a14="http://schemas.microsoft.com/office/drawing/2010/main" xmlns="" w="9525">
                   <a:solidFill>
                     <a:srgbClr val="000000"/>
                   </a:solidFill>
@@ -2691,7 +2692,7 @@
             </a:ln>
             <a:extLst>
               <a:ext uri="{91240B29-F687-4f45-9708-019B960494DF}">
-                <a14:hiddenLine xmlns="" xmlns:a14="http://schemas.microsoft.com/office/drawing/2010/main" w="9525">
+                <a14:hiddenLine xmlns:a14="http://schemas.microsoft.com/office/drawing/2010/main" xmlns="" w="9525">
                   <a:solidFill>
                     <a:srgbClr val="000000"/>
                   </a:solidFill>
@@ -2788,7 +2789,7 @@
             </a:ln>
             <a:extLst>
               <a:ext uri="{91240B29-F687-4f45-9708-019B960494DF}">
-                <a14:hiddenLine xmlns="" xmlns:a14="http://schemas.microsoft.com/office/drawing/2010/main" w="9525">
+                <a14:hiddenLine xmlns:a14="http://schemas.microsoft.com/office/drawing/2010/main" xmlns="" w="9525">
                   <a:solidFill>
                     <a:srgbClr val="000000"/>
                   </a:solidFill>
@@ -2863,7 +2864,7 @@
             </a:ln>
             <a:extLst>
               <a:ext uri="{91240B29-F687-4f45-9708-019B960494DF}">
-                <a14:hiddenLine xmlns="" xmlns:a14="http://schemas.microsoft.com/office/drawing/2010/main" w="9525">
+                <a14:hiddenLine xmlns:a14="http://schemas.microsoft.com/office/drawing/2010/main" xmlns="" w="9525">
                   <a:solidFill>
                     <a:srgbClr val="000000"/>
                   </a:solidFill>
@@ -2960,7 +2961,7 @@
             </a:ln>
             <a:extLst>
               <a:ext uri="{91240B29-F687-4f45-9708-019B960494DF}">
-                <a14:hiddenLine xmlns="" xmlns:a14="http://schemas.microsoft.com/office/drawing/2010/main" w="9525">
+                <a14:hiddenLine xmlns:a14="http://schemas.microsoft.com/office/drawing/2010/main" xmlns="" w="9525">
                   <a:solidFill>
                     <a:srgbClr val="000000"/>
                   </a:solidFill>
@@ -3001,7 +3002,7 @@
             </a:ln>
             <a:extLst>
               <a:ext uri="{91240B29-F687-4f45-9708-019B960494DF}">
-                <a14:hiddenLine xmlns="" xmlns:a14="http://schemas.microsoft.com/office/drawing/2010/main" w="9525">
+                <a14:hiddenLine xmlns:a14="http://schemas.microsoft.com/office/drawing/2010/main" xmlns="" w="9525">
                   <a:solidFill>
                     <a:srgbClr val="000000"/>
                   </a:solidFill>
@@ -3098,7 +3099,7 @@
             </a:ln>
             <a:extLst>
               <a:ext uri="{91240B29-F687-4f45-9708-019B960494DF}">
-                <a14:hiddenLine xmlns="" xmlns:a14="http://schemas.microsoft.com/office/drawing/2010/main" w="9525">
+                <a14:hiddenLine xmlns:a14="http://schemas.microsoft.com/office/drawing/2010/main" xmlns="" w="9525">
                   <a:solidFill>
                     <a:srgbClr val="000000"/>
                   </a:solidFill>
@@ -3167,7 +3168,7 @@
             </a:ln>
             <a:extLst>
               <a:ext uri="{91240B29-F687-4f45-9708-019B960494DF}">
-                <a14:hiddenLine xmlns="" xmlns:a14="http://schemas.microsoft.com/office/drawing/2010/main" w="9525">
+                <a14:hiddenLine xmlns:a14="http://schemas.microsoft.com/office/drawing/2010/main" xmlns="" w="9525">
                   <a:solidFill>
                     <a:srgbClr val="000000"/>
                   </a:solidFill>
@@ -3236,7 +3237,7 @@
             </a:ln>
             <a:extLst>
               <a:ext uri="{91240B29-F687-4f45-9708-019B960494DF}">
-                <a14:hiddenLine xmlns="" xmlns:a14="http://schemas.microsoft.com/office/drawing/2010/main" w="9525">
+                <a14:hiddenLine xmlns:a14="http://schemas.microsoft.com/office/drawing/2010/main" xmlns="" w="9525">
                   <a:solidFill>
                     <a:srgbClr val="000000"/>
                   </a:solidFill>
@@ -3333,7 +3334,7 @@
             </a:ln>
             <a:extLst>
               <a:ext uri="{91240B29-F687-4f45-9708-019B960494DF}">
-                <a14:hiddenLine xmlns="" xmlns:a14="http://schemas.microsoft.com/office/drawing/2010/main" w="9525">
+                <a14:hiddenLine xmlns:a14="http://schemas.microsoft.com/office/drawing/2010/main" xmlns="" w="9525">
                   <a:solidFill>
                     <a:srgbClr val="000000"/>
                   </a:solidFill>
@@ -3408,7 +3409,7 @@
             </a:ln>
             <a:extLst>
               <a:ext uri="{91240B29-F687-4f45-9708-019B960494DF}">
-                <a14:hiddenLine xmlns="" xmlns:a14="http://schemas.microsoft.com/office/drawing/2010/main" w="9525">
+                <a14:hiddenLine xmlns:a14="http://schemas.microsoft.com/office/drawing/2010/main" xmlns="" w="9525">
                   <a:solidFill>
                     <a:srgbClr val="000000"/>
                   </a:solidFill>
@@ -3477,7 +3478,7 @@
             </a:ln>
             <a:extLst>
               <a:ext uri="{91240B29-F687-4f45-9708-019B960494DF}">
-                <a14:hiddenLine xmlns="" xmlns:a14="http://schemas.microsoft.com/office/drawing/2010/main" w="9525">
+                <a14:hiddenLine xmlns:a14="http://schemas.microsoft.com/office/drawing/2010/main" xmlns="" w="9525">
                   <a:solidFill>
                     <a:srgbClr val="000000"/>
                   </a:solidFill>
@@ -3574,7 +3575,7 @@
             </a:ln>
             <a:extLst>
               <a:ext uri="{91240B29-F687-4f45-9708-019B960494DF}">
-                <a14:hiddenLine xmlns="" xmlns:a14="http://schemas.microsoft.com/office/drawing/2010/main" w="9525">
+                <a14:hiddenLine xmlns:a14="http://schemas.microsoft.com/office/drawing/2010/main" xmlns="" w="9525">
                   <a:solidFill>
                     <a:srgbClr val="000000"/>
                   </a:solidFill>
@@ -3643,7 +3644,7 @@
             </a:ln>
             <a:extLst>
               <a:ext uri="{91240B29-F687-4f45-9708-019B960494DF}">
-                <a14:hiddenLine xmlns="" xmlns:a14="http://schemas.microsoft.com/office/drawing/2010/main" w="9525">
+                <a14:hiddenLine xmlns:a14="http://schemas.microsoft.com/office/drawing/2010/main" xmlns="" w="9525">
                   <a:solidFill>
                     <a:srgbClr val="000000"/>
                   </a:solidFill>
@@ -3740,7 +3741,7 @@
             </a:ln>
             <a:extLst>
               <a:ext uri="{91240B29-F687-4f45-9708-019B960494DF}">
-                <a14:hiddenLine xmlns="" xmlns:a14="http://schemas.microsoft.com/office/drawing/2010/main" w="9525">
+                <a14:hiddenLine xmlns:a14="http://schemas.microsoft.com/office/drawing/2010/main" xmlns="" w="9525">
                   <a:solidFill>
                     <a:srgbClr val="000000"/>
                   </a:solidFill>
@@ -3809,7 +3810,7 @@
             </a:ln>
             <a:extLst>
               <a:ext uri="{91240B29-F687-4f45-9708-019B960494DF}">
-                <a14:hiddenLine xmlns="" xmlns:a14="http://schemas.microsoft.com/office/drawing/2010/main" w="9525">
+                <a14:hiddenLine xmlns:a14="http://schemas.microsoft.com/office/drawing/2010/main" xmlns="" w="9525">
                   <a:solidFill>
                     <a:srgbClr val="000000"/>
                   </a:solidFill>
@@ -3906,7 +3907,7 @@
             </a:ln>
             <a:extLst>
               <a:ext uri="{91240B29-F687-4f45-9708-019B960494DF}">
-                <a14:hiddenLine xmlns="" xmlns:a14="http://schemas.microsoft.com/office/drawing/2010/main" w="9525">
+                <a14:hiddenLine xmlns:a14="http://schemas.microsoft.com/office/drawing/2010/main" xmlns="" w="9525">
                   <a:solidFill>
                     <a:srgbClr val="000000"/>
                   </a:solidFill>
@@ -3947,7 +3948,7 @@
             </a:ln>
             <a:extLst>
               <a:ext uri="{91240B29-F687-4f45-9708-019B960494DF}">
-                <a14:hiddenLine xmlns="" xmlns:a14="http://schemas.microsoft.com/office/drawing/2010/main" w="9525">
+                <a14:hiddenLine xmlns:a14="http://schemas.microsoft.com/office/drawing/2010/main" xmlns="" w="9525">
                   <a:solidFill>
                     <a:srgbClr val="000000"/>
                   </a:solidFill>
@@ -4019,7 +4020,7 @@
             </a:ln>
             <a:extLst>
               <a:ext uri="{91240B29-F687-4f45-9708-019B960494DF}">
-                <a14:hiddenLine xmlns="" xmlns:a14="http://schemas.microsoft.com/office/drawing/2010/main" w="9525">
+                <a14:hiddenLine xmlns:a14="http://schemas.microsoft.com/office/drawing/2010/main" xmlns="" w="9525">
                   <a:solidFill>
                     <a:srgbClr val="000000"/>
                   </a:solidFill>
@@ -4116,7 +4117,7 @@
             </a:ln>
             <a:extLst>
               <a:ext uri="{91240B29-F687-4f45-9708-019B960494DF}">
-                <a14:hiddenLine xmlns="" xmlns:a14="http://schemas.microsoft.com/office/drawing/2010/main" w="9525">
+                <a14:hiddenLine xmlns:a14="http://schemas.microsoft.com/office/drawing/2010/main" xmlns="" w="9525">
                   <a:solidFill>
                     <a:srgbClr val="000000"/>
                   </a:solidFill>
@@ -4185,7 +4186,7 @@
             </a:ln>
             <a:extLst>
               <a:ext uri="{91240B29-F687-4f45-9708-019B960494DF}">
-                <a14:hiddenLine xmlns="" xmlns:a14="http://schemas.microsoft.com/office/drawing/2010/main" w="9525">
+                <a14:hiddenLine xmlns:a14="http://schemas.microsoft.com/office/drawing/2010/main" xmlns="" w="9525">
                   <a:solidFill>
                     <a:srgbClr val="000000"/>
                   </a:solidFill>
@@ -4282,7 +4283,7 @@
             </a:ln>
             <a:extLst>
               <a:ext uri="{91240B29-F687-4f45-9708-019B960494DF}">
-                <a14:hiddenLine xmlns="" xmlns:a14="http://schemas.microsoft.com/office/drawing/2010/main" w="9525">
+                <a14:hiddenLine xmlns:a14="http://schemas.microsoft.com/office/drawing/2010/main" xmlns="" w="9525">
                   <a:solidFill>
                     <a:srgbClr val="000000"/>
                   </a:solidFill>
@@ -4379,7 +4380,7 @@
             </a:ln>
             <a:extLst>
               <a:ext uri="{91240B29-F687-4f45-9708-019B960494DF}">
-                <a14:hiddenLine xmlns="" xmlns:a14="http://schemas.microsoft.com/office/drawing/2010/main" w="9525">
+                <a14:hiddenLine xmlns:a14="http://schemas.microsoft.com/office/drawing/2010/main" xmlns="" w="9525">
                   <a:solidFill>
                     <a:srgbClr val="000000"/>
                   </a:solidFill>
@@ -4451,7 +4452,7 @@
             </a:ln>
             <a:extLst>
               <a:ext uri="{91240B29-F687-4f45-9708-019B960494DF}">
-                <a14:hiddenLine xmlns="" xmlns:a14="http://schemas.microsoft.com/office/drawing/2010/main" w="9525">
+                <a14:hiddenLine xmlns:a14="http://schemas.microsoft.com/office/drawing/2010/main" xmlns="" w="9525">
                   <a:solidFill>
                     <a:srgbClr val="000000"/>
                   </a:solidFill>
@@ -4520,7 +4521,7 @@
             </a:ln>
             <a:extLst>
               <a:ext uri="{91240B29-F687-4f45-9708-019B960494DF}">
-                <a14:hiddenLine xmlns="" xmlns:a14="http://schemas.microsoft.com/office/drawing/2010/main" w="9525">
+                <a14:hiddenLine xmlns:a14="http://schemas.microsoft.com/office/drawing/2010/main" xmlns="" w="9525">
                   <a:solidFill>
                     <a:srgbClr val="000000"/>
                   </a:solidFill>
@@ -4617,7 +4618,7 @@
             </a:ln>
             <a:extLst>
               <a:ext uri="{91240B29-F687-4f45-9708-019B960494DF}">
-                <a14:hiddenLine xmlns="" xmlns:a14="http://schemas.microsoft.com/office/drawing/2010/main" w="9525">
+                <a14:hiddenLine xmlns:a14="http://schemas.microsoft.com/office/drawing/2010/main" xmlns="" w="9525">
                   <a:solidFill>
                     <a:srgbClr val="000000"/>
                   </a:solidFill>
@@ -4714,7 +4715,7 @@
             </a:ln>
             <a:extLst>
               <a:ext uri="{91240B29-F687-4f45-9708-019B960494DF}">
-                <a14:hiddenLine xmlns="" xmlns:a14="http://schemas.microsoft.com/office/drawing/2010/main" w="9525">
+                <a14:hiddenLine xmlns:a14="http://schemas.microsoft.com/office/drawing/2010/main" xmlns="" w="9525">
                   <a:solidFill>
                     <a:srgbClr val="000000"/>
                   </a:solidFill>
@@ -4783,7 +4784,7 @@
             </a:ln>
             <a:extLst>
               <a:ext uri="{91240B29-F687-4f45-9708-019B960494DF}">
-                <a14:hiddenLine xmlns="" xmlns:a14="http://schemas.microsoft.com/office/drawing/2010/main" w="9525">
+                <a14:hiddenLine xmlns:a14="http://schemas.microsoft.com/office/drawing/2010/main" xmlns="" w="9525">
                   <a:solidFill>
                     <a:srgbClr val="000000"/>
                   </a:solidFill>
@@ -4910,7 +4911,7 @@
             </a:ln>
             <a:extLst>
               <a:ext uri="{91240B29-F687-4f45-9708-019B960494DF}">
-                <a14:hiddenLine xmlns="" xmlns:a14="http://schemas.microsoft.com/office/drawing/2010/main" w="9525">
+                <a14:hiddenLine xmlns:a14="http://schemas.microsoft.com/office/drawing/2010/main" xmlns="" w="9525">
                   <a:solidFill>
                     <a:srgbClr val="000000"/>
                   </a:solidFill>
@@ -4985,7 +4986,7 @@
             </a:ln>
             <a:extLst>
               <a:ext uri="{91240B29-F687-4f45-9708-019B960494DF}">
-                <a14:hiddenLine xmlns="" xmlns:a14="http://schemas.microsoft.com/office/drawing/2010/main" w="9525">
+                <a14:hiddenLine xmlns:a14="http://schemas.microsoft.com/office/drawing/2010/main" xmlns="" w="9525">
                   <a:solidFill>
                     <a:srgbClr val="000000"/>
                   </a:solidFill>
@@ -5082,7 +5083,7 @@
             </a:ln>
             <a:extLst>
               <a:ext uri="{91240B29-F687-4f45-9708-019B960494DF}">
-                <a14:hiddenLine xmlns="" xmlns:a14="http://schemas.microsoft.com/office/drawing/2010/main" w="9525">
+                <a14:hiddenLine xmlns:a14="http://schemas.microsoft.com/office/drawing/2010/main" xmlns="" w="9525">
                   <a:solidFill>
                     <a:srgbClr val="000000"/>
                   </a:solidFill>
@@ -5230,7 +5231,7 @@
             <a:fld id="{B6D41BCC-AD73-4203-A5A6-E62EB28B0FE6}" type="datetimeFigureOut">
               <a:rPr lang="en-US" smtClean="0"/>
               <a:pPr/>
-              <a:t>4/16/2026</a:t>
+              <a:t>4/21/2026</a:t>
             </a:fld>
             <a:endParaRPr lang="en-US"/>
           </a:p>
@@ -5499,7 +5500,7 @@
             <a:fld id="{B6D41BCC-AD73-4203-A5A6-E62EB28B0FE6}" type="datetimeFigureOut">
               <a:rPr lang="en-US" smtClean="0"/>
               <a:pPr/>
-              <a:t>4/16/2026</a:t>
+              <a:t>4/21/2026</a:t>
             </a:fld>
             <a:endParaRPr lang="en-US"/>
           </a:p>
@@ -5697,7 +5698,7 @@
             <a:fld id="{B6D41BCC-AD73-4203-A5A6-E62EB28B0FE6}" type="datetimeFigureOut">
               <a:rPr lang="en-US" smtClean="0"/>
               <a:pPr/>
-              <a:t>4/16/2026</a:t>
+              <a:t>4/21/2026</a:t>
             </a:fld>
             <a:endParaRPr lang="en-US"/>
           </a:p>
@@ -5962,7 +5963,7 @@
             <a:fld id="{B6D41BCC-AD73-4203-A5A6-E62EB28B0FE6}" type="datetimeFigureOut">
               <a:rPr lang="en-US" smtClean="0"/>
               <a:pPr/>
-              <a:t>4/16/2026</a:t>
+              <a:t>4/21/2026</a:t>
             </a:fld>
             <a:endParaRPr lang="en-US"/>
           </a:p>
@@ -6398,7 +6399,7 @@
             <a:fld id="{B6D41BCC-AD73-4203-A5A6-E62EB28B0FE6}" type="datetimeFigureOut">
               <a:rPr lang="en-US" smtClean="0"/>
               <a:pPr/>
-              <a:t>4/16/2026</a:t>
+              <a:t>4/21/2026</a:t>
             </a:fld>
             <a:endParaRPr lang="en-US"/>
           </a:p>
@@ -6946,7 +6947,7 @@
             <a:fld id="{B6D41BCC-AD73-4203-A5A6-E62EB28B0FE6}" type="datetimeFigureOut">
               <a:rPr lang="en-US" smtClean="0"/>
               <a:pPr/>
-              <a:t>4/16/2026</a:t>
+              <a:t>4/21/2026</a:t>
             </a:fld>
             <a:endParaRPr lang="en-US"/>
           </a:p>
@@ -7668,7 +7669,7 @@
             <a:fld id="{B6D41BCC-AD73-4203-A5A6-E62EB28B0FE6}" type="datetimeFigureOut">
               <a:rPr lang="en-US" smtClean="0"/>
               <a:pPr/>
-              <a:t>4/16/2026</a:t>
+              <a:t>4/21/2026</a:t>
             </a:fld>
             <a:endParaRPr lang="en-US"/>
           </a:p>
@@ -7840,7 +7841,7 @@
             <a:fld id="{B6D41BCC-AD73-4203-A5A6-E62EB28B0FE6}" type="datetimeFigureOut">
               <a:rPr lang="en-US" smtClean="0"/>
               <a:pPr/>
-              <a:t>4/16/2026</a:t>
+              <a:t>4/21/2026</a:t>
             </a:fld>
             <a:endParaRPr lang="en-US"/>
           </a:p>
@@ -8022,7 +8023,7 @@
             <a:fld id="{B6D41BCC-AD73-4203-A5A6-E62EB28B0FE6}" type="datetimeFigureOut">
               <a:rPr lang="en-US" smtClean="0"/>
               <a:pPr/>
-              <a:t>4/16/2026</a:t>
+              <a:t>4/21/2026</a:t>
             </a:fld>
             <a:endParaRPr lang="en-US"/>
           </a:p>
@@ -8194,7 +8195,7 @@
             <a:fld id="{B6D41BCC-AD73-4203-A5A6-E62EB28B0FE6}" type="datetimeFigureOut">
               <a:rPr lang="en-US" smtClean="0"/>
               <a:pPr/>
-              <a:t>4/16/2026</a:t>
+              <a:t>4/21/2026</a:t>
             </a:fld>
             <a:endParaRPr lang="en-US"/>
           </a:p>
@@ -8446,7 +8447,7 @@
             <a:fld id="{B6D41BCC-AD73-4203-A5A6-E62EB28B0FE6}" type="datetimeFigureOut">
               <a:rPr lang="en-US" smtClean="0"/>
               <a:pPr/>
-              <a:t>4/16/2026</a:t>
+              <a:t>4/21/2026</a:t>
             </a:fld>
             <a:endParaRPr lang="en-US"/>
           </a:p>
@@ -8680,7 +8681,7 @@
             <a:fld id="{B6D41BCC-AD73-4203-A5A6-E62EB28B0FE6}" type="datetimeFigureOut">
               <a:rPr lang="en-US" smtClean="0"/>
               <a:pPr/>
-              <a:t>4/16/2026</a:t>
+              <a:t>4/21/2026</a:t>
             </a:fld>
             <a:endParaRPr lang="en-US"/>
           </a:p>
@@ -9063,7 +9064,7 @@
             <a:fld id="{B6D41BCC-AD73-4203-A5A6-E62EB28B0FE6}" type="datetimeFigureOut">
               <a:rPr lang="en-US" smtClean="0"/>
               <a:pPr/>
-              <a:t>4/16/2026</a:t>
+              <a:t>4/21/2026</a:t>
             </a:fld>
             <a:endParaRPr lang="en-US"/>
           </a:p>
@@ -9183,7 +9184,7 @@
             <a:fld id="{B6D41BCC-AD73-4203-A5A6-E62EB28B0FE6}" type="datetimeFigureOut">
               <a:rPr lang="en-US" smtClean="0"/>
               <a:pPr/>
-              <a:t>4/16/2026</a:t>
+              <a:t>4/21/2026</a:t>
             </a:fld>
             <a:endParaRPr lang="en-US"/>
           </a:p>
@@ -9280,7 +9281,7 @@
             <a:fld id="{B6D41BCC-AD73-4203-A5A6-E62EB28B0FE6}" type="datetimeFigureOut">
               <a:rPr lang="en-US" smtClean="0"/>
               <a:pPr/>
-              <a:t>4/16/2026</a:t>
+              <a:t>4/21/2026</a:t>
             </a:fld>
             <a:endParaRPr lang="en-US"/>
           </a:p>
@@ -9531,7 +9532,7 @@
             <a:fld id="{B6D41BCC-AD73-4203-A5A6-E62EB28B0FE6}" type="datetimeFigureOut">
               <a:rPr lang="en-US" smtClean="0"/>
               <a:pPr/>
-              <a:t>4/16/2026</a:t>
+              <a:t>4/21/2026</a:t>
             </a:fld>
             <a:endParaRPr lang="en-US"/>
           </a:p>
@@ -9813,7 +9814,7 @@
             <a:fld id="{B6D41BCC-AD73-4203-A5A6-E62EB28B0FE6}" type="datetimeFigureOut">
               <a:rPr lang="en-US" smtClean="0"/>
               <a:pPr/>
-              <a:t>4/16/2026</a:t>
+              <a:t>4/21/2026</a:t>
             </a:fld>
             <a:endParaRPr lang="en-US"/>
           </a:p>
@@ -9930,7 +9931,7 @@
           <a:noFill/>
           <a:extLst>
             <a:ext uri="{909E8E84-426E-40dd-AFC4-6F175D3DCCD1}">
-              <a14:hiddenFill xmlns="" xmlns:a14="http://schemas.microsoft.com/office/drawing/2010/main">
+              <a14:hiddenFill xmlns:a14="http://schemas.microsoft.com/office/drawing/2010/main" xmlns="">
                 <a:solidFill>
                   <a:srgbClr val="FFFFFF"/>
                 </a:solidFill>
@@ -10004,7 +10005,7 @@
               </a:ln>
               <a:extLst>
                 <a:ext uri="{91240B29-F687-4f45-9708-019B960494DF}">
-                  <a14:hiddenLine xmlns="" xmlns:a14="http://schemas.microsoft.com/office/drawing/2010/main" w="9525">
+                  <a14:hiddenLine xmlns:a14="http://schemas.microsoft.com/office/drawing/2010/main" xmlns="" w="9525">
                     <a:solidFill>
                       <a:srgbClr val="000000"/>
                     </a:solidFill>
@@ -10101,7 +10102,7 @@
               </a:ln>
               <a:extLst>
                 <a:ext uri="{91240B29-F687-4f45-9708-019B960494DF}">
-                  <a14:hiddenLine xmlns="" xmlns:a14="http://schemas.microsoft.com/office/drawing/2010/main" w="9525">
+                  <a14:hiddenLine xmlns:a14="http://schemas.microsoft.com/office/drawing/2010/main" xmlns="" w="9525">
                     <a:solidFill>
                       <a:srgbClr val="000000"/>
                     </a:solidFill>
@@ -10198,7 +10199,7 @@
               </a:ln>
               <a:extLst>
                 <a:ext uri="{91240B29-F687-4f45-9708-019B960494DF}">
-                  <a14:hiddenLine xmlns="" xmlns:a14="http://schemas.microsoft.com/office/drawing/2010/main" w="9525">
+                  <a14:hiddenLine xmlns:a14="http://schemas.microsoft.com/office/drawing/2010/main" xmlns="" w="9525">
                     <a:solidFill>
                       <a:srgbClr val="000000"/>
                     </a:solidFill>
@@ -10267,7 +10268,7 @@
               </a:ln>
               <a:extLst>
                 <a:ext uri="{91240B29-F687-4f45-9708-019B960494DF}">
-                  <a14:hiddenLine xmlns="" xmlns:a14="http://schemas.microsoft.com/office/drawing/2010/main" w="9525">
+                  <a14:hiddenLine xmlns:a14="http://schemas.microsoft.com/office/drawing/2010/main" xmlns="" w="9525">
                     <a:solidFill>
                       <a:srgbClr val="000000"/>
                     </a:solidFill>
@@ -10364,7 +10365,7 @@
               </a:ln>
               <a:extLst>
                 <a:ext uri="{91240B29-F687-4f45-9708-019B960494DF}">
-                  <a14:hiddenLine xmlns="" xmlns:a14="http://schemas.microsoft.com/office/drawing/2010/main" w="9525">
+                  <a14:hiddenLine xmlns:a14="http://schemas.microsoft.com/office/drawing/2010/main" xmlns="" w="9525">
                     <a:solidFill>
                       <a:srgbClr val="000000"/>
                     </a:solidFill>
@@ -10433,7 +10434,7 @@
               </a:ln>
               <a:extLst>
                 <a:ext uri="{91240B29-F687-4f45-9708-019B960494DF}">
-                  <a14:hiddenLine xmlns="" xmlns:a14="http://schemas.microsoft.com/office/drawing/2010/main" w="9525">
+                  <a14:hiddenLine xmlns:a14="http://schemas.microsoft.com/office/drawing/2010/main" xmlns="" w="9525">
                     <a:solidFill>
                       <a:srgbClr val="000000"/>
                     </a:solidFill>
@@ -10502,7 +10503,7 @@
               </a:ln>
               <a:extLst>
                 <a:ext uri="{91240B29-F687-4f45-9708-019B960494DF}">
-                  <a14:hiddenLine xmlns="" xmlns:a14="http://schemas.microsoft.com/office/drawing/2010/main" w="9525">
+                  <a14:hiddenLine xmlns:a14="http://schemas.microsoft.com/office/drawing/2010/main" xmlns="" w="9525">
                     <a:solidFill>
                       <a:srgbClr val="000000"/>
                     </a:solidFill>
@@ -10599,7 +10600,7 @@
               </a:ln>
               <a:extLst>
                 <a:ext uri="{91240B29-F687-4f45-9708-019B960494DF}">
-                  <a14:hiddenLine xmlns="" xmlns:a14="http://schemas.microsoft.com/office/drawing/2010/main" w="9525">
+                  <a14:hiddenLine xmlns:a14="http://schemas.microsoft.com/office/drawing/2010/main" xmlns="" w="9525">
                     <a:solidFill>
                       <a:srgbClr val="000000"/>
                     </a:solidFill>
@@ -10696,7 +10697,7 @@
               </a:ln>
               <a:extLst>
                 <a:ext uri="{91240B29-F687-4f45-9708-019B960494DF}">
-                  <a14:hiddenLine xmlns="" xmlns:a14="http://schemas.microsoft.com/office/drawing/2010/main" w="9525">
+                  <a14:hiddenLine xmlns:a14="http://schemas.microsoft.com/office/drawing/2010/main" xmlns="" w="9525">
                     <a:solidFill>
                       <a:srgbClr val="000000"/>
                     </a:solidFill>
@@ -10765,7 +10766,7 @@
               </a:ln>
               <a:extLst>
                 <a:ext uri="{91240B29-F687-4f45-9708-019B960494DF}">
-                  <a14:hiddenLine xmlns="" xmlns:a14="http://schemas.microsoft.com/office/drawing/2010/main" w="9525">
+                  <a14:hiddenLine xmlns:a14="http://schemas.microsoft.com/office/drawing/2010/main" xmlns="" w="9525">
                     <a:solidFill>
                       <a:srgbClr val="000000"/>
                     </a:solidFill>
@@ -10882,7 +10883,7 @@
               </a:ln>
               <a:extLst>
                 <a:ext uri="{91240B29-F687-4f45-9708-019B960494DF}">
-                  <a14:hiddenLine xmlns="" xmlns:a14="http://schemas.microsoft.com/office/drawing/2010/main" w="9525">
+                  <a14:hiddenLine xmlns:a14="http://schemas.microsoft.com/office/drawing/2010/main" xmlns="" w="9525">
                     <a:solidFill>
                       <a:srgbClr val="000000"/>
                     </a:solidFill>
@@ -10980,7 +10981,7 @@
               </a:ln>
               <a:extLst>
                 <a:ext uri="{91240B29-F687-4f45-9708-019B960494DF}">
-                  <a14:hiddenLine xmlns="" xmlns:a14="http://schemas.microsoft.com/office/drawing/2010/main" w="9525">
+                  <a14:hiddenLine xmlns:a14="http://schemas.microsoft.com/office/drawing/2010/main" xmlns="" w="9525">
                     <a:solidFill>
                       <a:srgbClr val="000000"/>
                     </a:solidFill>
@@ -11049,7 +11050,7 @@
               </a:ln>
               <a:extLst>
                 <a:ext uri="{91240B29-F687-4f45-9708-019B960494DF}">
-                  <a14:hiddenLine xmlns="" xmlns:a14="http://schemas.microsoft.com/office/drawing/2010/main" w="9525">
+                  <a14:hiddenLine xmlns:a14="http://schemas.microsoft.com/office/drawing/2010/main" xmlns="" w="9525">
                     <a:solidFill>
                       <a:srgbClr val="000000"/>
                     </a:solidFill>
@@ -11118,7 +11119,7 @@
               </a:ln>
               <a:extLst>
                 <a:ext uri="{91240B29-F687-4f45-9708-019B960494DF}">
-                  <a14:hiddenLine xmlns="" xmlns:a14="http://schemas.microsoft.com/office/drawing/2010/main" w="9525">
+                  <a14:hiddenLine xmlns:a14="http://schemas.microsoft.com/office/drawing/2010/main" xmlns="" w="9525">
                     <a:solidFill>
                       <a:srgbClr val="000000"/>
                     </a:solidFill>
@@ -11215,7 +11216,7 @@
               </a:ln>
               <a:extLst>
                 <a:ext uri="{91240B29-F687-4f45-9708-019B960494DF}">
-                  <a14:hiddenLine xmlns="" xmlns:a14="http://schemas.microsoft.com/office/drawing/2010/main" w="9525">
+                  <a14:hiddenLine xmlns:a14="http://schemas.microsoft.com/office/drawing/2010/main" xmlns="" w="9525">
                     <a:solidFill>
                       <a:srgbClr val="000000"/>
                     </a:solidFill>
@@ -11256,7 +11257,7 @@
               </a:ln>
               <a:extLst>
                 <a:ext uri="{91240B29-F687-4f45-9708-019B960494DF}">
-                  <a14:hiddenLine xmlns="" xmlns:a14="http://schemas.microsoft.com/office/drawing/2010/main" w="9525">
+                  <a14:hiddenLine xmlns:a14="http://schemas.microsoft.com/office/drawing/2010/main" xmlns="" w="9525">
                     <a:solidFill>
                       <a:srgbClr val="000000"/>
                     </a:solidFill>
@@ -11328,7 +11329,7 @@
               </a:ln>
               <a:extLst>
                 <a:ext uri="{91240B29-F687-4f45-9708-019B960494DF}">
-                  <a14:hiddenLine xmlns="" xmlns:a14="http://schemas.microsoft.com/office/drawing/2010/main" w="9525">
+                  <a14:hiddenLine xmlns:a14="http://schemas.microsoft.com/office/drawing/2010/main" xmlns="" w="9525">
                     <a:solidFill>
                       <a:srgbClr val="000000"/>
                     </a:solidFill>
@@ -11425,7 +11426,7 @@
               </a:ln>
               <a:extLst>
                 <a:ext uri="{91240B29-F687-4f45-9708-019B960494DF}">
-                  <a14:hiddenLine xmlns="" xmlns:a14="http://schemas.microsoft.com/office/drawing/2010/main" w="9525">
+                  <a14:hiddenLine xmlns:a14="http://schemas.microsoft.com/office/drawing/2010/main" xmlns="" w="9525">
                     <a:solidFill>
                       <a:srgbClr val="000000"/>
                     </a:solidFill>
@@ -11494,7 +11495,7 @@
               </a:ln>
               <a:extLst>
                 <a:ext uri="{91240B29-F687-4f45-9708-019B960494DF}">
-                  <a14:hiddenLine xmlns="" xmlns:a14="http://schemas.microsoft.com/office/drawing/2010/main" w="9525">
+                  <a14:hiddenLine xmlns:a14="http://schemas.microsoft.com/office/drawing/2010/main" xmlns="" w="9525">
                     <a:solidFill>
                       <a:srgbClr val="000000"/>
                     </a:solidFill>
@@ -11591,7 +11592,7 @@
               </a:ln>
               <a:extLst>
                 <a:ext uri="{91240B29-F687-4f45-9708-019B960494DF}">
-                  <a14:hiddenLine xmlns="" xmlns:a14="http://schemas.microsoft.com/office/drawing/2010/main" w="9525">
+                  <a14:hiddenLine xmlns:a14="http://schemas.microsoft.com/office/drawing/2010/main" xmlns="" w="9525">
                     <a:solidFill>
                       <a:srgbClr val="000000"/>
                     </a:solidFill>
@@ -11663,7 +11664,7 @@
               </a:ln>
               <a:extLst>
                 <a:ext uri="{91240B29-F687-4f45-9708-019B960494DF}">
-                  <a14:hiddenLine xmlns="" xmlns:a14="http://schemas.microsoft.com/office/drawing/2010/main" w="9525">
+                  <a14:hiddenLine xmlns:a14="http://schemas.microsoft.com/office/drawing/2010/main" xmlns="" w="9525">
                     <a:solidFill>
                       <a:srgbClr val="000000"/>
                     </a:solidFill>
@@ -11732,7 +11733,7 @@
               </a:ln>
               <a:extLst>
                 <a:ext uri="{91240B29-F687-4f45-9708-019B960494DF}">
-                  <a14:hiddenLine xmlns="" xmlns:a14="http://schemas.microsoft.com/office/drawing/2010/main" w="9525">
+                  <a14:hiddenLine xmlns:a14="http://schemas.microsoft.com/office/drawing/2010/main" xmlns="" w="9525">
                     <a:solidFill>
                       <a:srgbClr val="000000"/>
                     </a:solidFill>
@@ -11829,7 +11830,7 @@
               </a:ln>
               <a:extLst>
                 <a:ext uri="{91240B29-F687-4f45-9708-019B960494DF}">
-                  <a14:hiddenLine xmlns="" xmlns:a14="http://schemas.microsoft.com/office/drawing/2010/main" w="9525">
+                  <a14:hiddenLine xmlns:a14="http://schemas.microsoft.com/office/drawing/2010/main" xmlns="" w="9525">
                     <a:solidFill>
                       <a:srgbClr val="000000"/>
                     </a:solidFill>
@@ -11926,7 +11927,7 @@
               </a:ln>
               <a:extLst>
                 <a:ext uri="{91240B29-F687-4f45-9708-019B960494DF}">
-                  <a14:hiddenLine xmlns="" xmlns:a14="http://schemas.microsoft.com/office/drawing/2010/main" w="9525">
+                  <a14:hiddenLine xmlns:a14="http://schemas.microsoft.com/office/drawing/2010/main" xmlns="" w="9525">
                     <a:solidFill>
                       <a:srgbClr val="000000"/>
                     </a:solidFill>
@@ -11998,7 +11999,7 @@
               </a:ln>
               <a:extLst>
                 <a:ext uri="{91240B29-F687-4f45-9708-019B960494DF}">
-                  <a14:hiddenLine xmlns="" xmlns:a14="http://schemas.microsoft.com/office/drawing/2010/main" w="9525">
+                  <a14:hiddenLine xmlns:a14="http://schemas.microsoft.com/office/drawing/2010/main" xmlns="" w="9525">
                     <a:solidFill>
                       <a:srgbClr val="000000"/>
                     </a:solidFill>
@@ -12125,7 +12126,7 @@
               </a:ln>
               <a:extLst>
                 <a:ext uri="{91240B29-F687-4f45-9708-019B960494DF}">
-                  <a14:hiddenLine xmlns="" xmlns:a14="http://schemas.microsoft.com/office/drawing/2010/main" w="9525">
+                  <a14:hiddenLine xmlns:a14="http://schemas.microsoft.com/office/drawing/2010/main" xmlns="" w="9525">
                     <a:solidFill>
                       <a:srgbClr val="000000"/>
                     </a:solidFill>
@@ -12230,7 +12231,7 @@
               </a:ln>
               <a:extLst>
                 <a:ext uri="{91240B29-F687-4f45-9708-019B960494DF}">
-                  <a14:hiddenLine xmlns="" xmlns:a14="http://schemas.microsoft.com/office/drawing/2010/main" w="9525">
+                  <a14:hiddenLine xmlns:a14="http://schemas.microsoft.com/office/drawing/2010/main" xmlns="" w="9525">
                     <a:solidFill>
                       <a:srgbClr val="000000"/>
                     </a:solidFill>
@@ -12352,7 +12353,7 @@
               </a:ln>
               <a:extLst>
                 <a:ext uri="{91240B29-F687-4f45-9708-019B960494DF}">
-                  <a14:hiddenLine xmlns="" xmlns:a14="http://schemas.microsoft.com/office/drawing/2010/main" w="9525">
+                  <a14:hiddenLine xmlns:a14="http://schemas.microsoft.com/office/drawing/2010/main" xmlns="" w="9525">
                     <a:solidFill>
                       <a:srgbClr val="000000"/>
                     </a:solidFill>
@@ -12449,7 +12450,7 @@
               </a:ln>
               <a:extLst>
                 <a:ext uri="{91240B29-F687-4f45-9708-019B960494DF}">
-                  <a14:hiddenLine xmlns="" xmlns:a14="http://schemas.microsoft.com/office/drawing/2010/main" w="9525">
+                  <a14:hiddenLine xmlns:a14="http://schemas.microsoft.com/office/drawing/2010/main" xmlns="" w="9525">
                     <a:solidFill>
                       <a:srgbClr val="000000"/>
                     </a:solidFill>
@@ -12521,7 +12522,7 @@
               </a:ln>
               <a:extLst>
                 <a:ext uri="{91240B29-F687-4f45-9708-019B960494DF}">
-                  <a14:hiddenLine xmlns="" xmlns:a14="http://schemas.microsoft.com/office/drawing/2010/main" w="9525">
+                  <a14:hiddenLine xmlns:a14="http://schemas.microsoft.com/office/drawing/2010/main" xmlns="" w="9525">
                     <a:solidFill>
                       <a:srgbClr val="000000"/>
                     </a:solidFill>
@@ -12618,7 +12619,7 @@
               </a:ln>
               <a:extLst>
                 <a:ext uri="{91240B29-F687-4f45-9708-019B960494DF}">
-                  <a14:hiddenLine xmlns="" xmlns:a14="http://schemas.microsoft.com/office/drawing/2010/main" w="9525">
+                  <a14:hiddenLine xmlns:a14="http://schemas.microsoft.com/office/drawing/2010/main" xmlns="" w="9525">
                     <a:solidFill>
                       <a:srgbClr val="000000"/>
                     </a:solidFill>
@@ -12693,7 +12694,7 @@
               </a:ln>
               <a:extLst>
                 <a:ext uri="{91240B29-F687-4f45-9708-019B960494DF}">
-                  <a14:hiddenLine xmlns="" xmlns:a14="http://schemas.microsoft.com/office/drawing/2010/main" w="9525">
+                  <a14:hiddenLine xmlns:a14="http://schemas.microsoft.com/office/drawing/2010/main" xmlns="" w="9525">
                     <a:solidFill>
                       <a:srgbClr val="000000"/>
                     </a:solidFill>
@@ -12790,7 +12791,7 @@
               </a:ln>
               <a:extLst>
                 <a:ext uri="{91240B29-F687-4f45-9708-019B960494DF}">
-                  <a14:hiddenLine xmlns="" xmlns:a14="http://schemas.microsoft.com/office/drawing/2010/main" w="9525">
+                  <a14:hiddenLine xmlns:a14="http://schemas.microsoft.com/office/drawing/2010/main" xmlns="" w="9525">
                     <a:solidFill>
                       <a:srgbClr val="000000"/>
                     </a:solidFill>
@@ -12865,7 +12866,7 @@
               </a:ln>
               <a:extLst>
                 <a:ext uri="{91240B29-F687-4f45-9708-019B960494DF}">
-                  <a14:hiddenLine xmlns="" xmlns:a14="http://schemas.microsoft.com/office/drawing/2010/main" w="9525">
+                  <a14:hiddenLine xmlns:a14="http://schemas.microsoft.com/office/drawing/2010/main" xmlns="" w="9525">
                     <a:solidFill>
                       <a:srgbClr val="000000"/>
                     </a:solidFill>
@@ -12962,7 +12963,7 @@
               </a:ln>
               <a:extLst>
                 <a:ext uri="{91240B29-F687-4f45-9708-019B960494DF}">
-                  <a14:hiddenLine xmlns="" xmlns:a14="http://schemas.microsoft.com/office/drawing/2010/main" w="9525">
+                  <a14:hiddenLine xmlns:a14="http://schemas.microsoft.com/office/drawing/2010/main" xmlns="" w="9525">
                     <a:solidFill>
                       <a:srgbClr val="000000"/>
                     </a:solidFill>
@@ -13003,7 +13004,7 @@
               </a:ln>
               <a:extLst>
                 <a:ext uri="{91240B29-F687-4f45-9708-019B960494DF}">
-                  <a14:hiddenLine xmlns="" xmlns:a14="http://schemas.microsoft.com/office/drawing/2010/main" w="9525">
+                  <a14:hiddenLine xmlns:a14="http://schemas.microsoft.com/office/drawing/2010/main" xmlns="" w="9525">
                     <a:solidFill>
                       <a:srgbClr val="000000"/>
                     </a:solidFill>
@@ -13151,7 +13152,7 @@
             <a:fld id="{B6D41BCC-AD73-4203-A5A6-E62EB28B0FE6}" type="datetimeFigureOut">
               <a:rPr lang="en-US" smtClean="0"/>
               <a:pPr/>
-              <a:t>4/16/2026</a:t>
+              <a:t>4/21/2026</a:t>
             </a:fld>
             <a:endParaRPr lang="en-US"/>
           </a:p>
@@ -15282,7 +15283,7 @@
           </a:prstGeom>
           <a:extLst>
             <a:ext uri="{909E8E84-426E-40dd-AFC4-6F175D3DCCD1}">
-              <a14:hiddenFill xmlns:a14="http://schemas.microsoft.com/office/drawing/2010/main" xmlns:p14="http://schemas.microsoft.com/office/powerpoint/2010/main" xmlns:a16="http://schemas.microsoft.com/office/drawing/2014/main" xmlns="">
+              <a14:hiddenFill xmlns="" xmlns:a16="http://schemas.microsoft.com/office/drawing/2014/main" xmlns:p14="http://schemas.microsoft.com/office/powerpoint/2010/main" xmlns:a14="http://schemas.microsoft.com/office/drawing/2010/main">
                 <a:solidFill>
                   <a:srgbClr val="FFFFFF"/>
                 </a:solidFill>
@@ -15406,7 +15407,7 @@
           <a:noFill/>
           <a:extLst>
             <a:ext uri="{909E8E84-426E-40dd-AFC4-6F175D3DCCD1}">
-              <a14:hiddenFill xmlns:a14="http://schemas.microsoft.com/office/drawing/2010/main" xmlns:p14="http://schemas.microsoft.com/office/powerpoint/2010/main" xmlns:a16="http://schemas.microsoft.com/office/drawing/2014/main" xmlns="">
+              <a14:hiddenFill xmlns="" xmlns:a16="http://schemas.microsoft.com/office/drawing/2014/main" xmlns:p14="http://schemas.microsoft.com/office/powerpoint/2010/main" xmlns:a14="http://schemas.microsoft.com/office/drawing/2010/main">
                 <a:solidFill>
                   <a:srgbClr val="FFFFFF"/>
                 </a:solidFill>
@@ -15949,7 +15950,7 @@
             </a:ln>
             <a:extLst>
               <a:ext uri="{91240B29-F687-4f45-9708-019B960494DF}">
-                <a14:hiddenLine xmlns:a14="http://schemas.microsoft.com/office/drawing/2010/main" xmlns:p14="http://schemas.microsoft.com/office/powerpoint/2010/main" xmlns:a16="http://schemas.microsoft.com/office/drawing/2014/main" xmlns="" w="9525">
+                <a14:hiddenLine xmlns="" xmlns:a16="http://schemas.microsoft.com/office/drawing/2014/main" xmlns:p14="http://schemas.microsoft.com/office/powerpoint/2010/main" xmlns:a14="http://schemas.microsoft.com/office/drawing/2010/main" w="9525">
                   <a:solidFill>
                     <a:srgbClr val="000000"/>
                   </a:solidFill>
@@ -16061,7 +16062,7 @@
             </a:ln>
             <a:extLst>
               <a:ext uri="{91240B29-F687-4f45-9708-019B960494DF}">
-                <a14:hiddenLine xmlns:a14="http://schemas.microsoft.com/office/drawing/2010/main" xmlns:p14="http://schemas.microsoft.com/office/powerpoint/2010/main" xmlns:a16="http://schemas.microsoft.com/office/drawing/2014/main" xmlns="" w="9525">
+                <a14:hiddenLine xmlns="" xmlns:a16="http://schemas.microsoft.com/office/drawing/2014/main" xmlns:p14="http://schemas.microsoft.com/office/powerpoint/2010/main" xmlns:a14="http://schemas.microsoft.com/office/drawing/2010/main" w="9525">
                   <a:solidFill>
                     <a:srgbClr val="000000"/>
                   </a:solidFill>
@@ -16173,7 +16174,7 @@
             </a:ln>
             <a:extLst>
               <a:ext uri="{91240B29-F687-4f45-9708-019B960494DF}">
-                <a14:hiddenLine xmlns:a14="http://schemas.microsoft.com/office/drawing/2010/main" xmlns:p14="http://schemas.microsoft.com/office/powerpoint/2010/main" xmlns:a16="http://schemas.microsoft.com/office/drawing/2014/main" xmlns="" w="9525">
+                <a14:hiddenLine xmlns="" xmlns:a16="http://schemas.microsoft.com/office/drawing/2014/main" xmlns:p14="http://schemas.microsoft.com/office/powerpoint/2010/main" xmlns:a14="http://schemas.microsoft.com/office/drawing/2010/main" w="9525">
                   <a:solidFill>
                     <a:srgbClr val="000000"/>
                   </a:solidFill>
@@ -16257,7 +16258,7 @@
             </a:ln>
             <a:extLst>
               <a:ext uri="{91240B29-F687-4f45-9708-019B960494DF}">
-                <a14:hiddenLine xmlns:a14="http://schemas.microsoft.com/office/drawing/2010/main" xmlns:p14="http://schemas.microsoft.com/office/powerpoint/2010/main" xmlns:a16="http://schemas.microsoft.com/office/drawing/2014/main" xmlns="" w="9525">
+                <a14:hiddenLine xmlns="" xmlns:a16="http://schemas.microsoft.com/office/drawing/2014/main" xmlns:p14="http://schemas.microsoft.com/office/powerpoint/2010/main" xmlns:a14="http://schemas.microsoft.com/office/drawing/2010/main" w="9525">
                   <a:solidFill>
                     <a:srgbClr val="000000"/>
                   </a:solidFill>
@@ -16369,7 +16370,7 @@
             </a:ln>
             <a:extLst>
               <a:ext uri="{91240B29-F687-4f45-9708-019B960494DF}">
-                <a14:hiddenLine xmlns:a14="http://schemas.microsoft.com/office/drawing/2010/main" xmlns:p14="http://schemas.microsoft.com/office/powerpoint/2010/main" xmlns:a16="http://schemas.microsoft.com/office/drawing/2014/main" xmlns="" w="9525">
+                <a14:hiddenLine xmlns="" xmlns:a16="http://schemas.microsoft.com/office/drawing/2014/main" xmlns:p14="http://schemas.microsoft.com/office/powerpoint/2010/main" xmlns:a14="http://schemas.microsoft.com/office/drawing/2010/main" w="9525">
                   <a:solidFill>
                     <a:srgbClr val="000000"/>
                   </a:solidFill>
@@ -16453,7 +16454,7 @@
             </a:ln>
             <a:extLst>
               <a:ext uri="{91240B29-F687-4f45-9708-019B960494DF}">
-                <a14:hiddenLine xmlns:a14="http://schemas.microsoft.com/office/drawing/2010/main" xmlns:p14="http://schemas.microsoft.com/office/powerpoint/2010/main" xmlns:a16="http://schemas.microsoft.com/office/drawing/2014/main" xmlns="" w="9525">
+                <a14:hiddenLine xmlns="" xmlns:a16="http://schemas.microsoft.com/office/drawing/2014/main" xmlns:p14="http://schemas.microsoft.com/office/powerpoint/2010/main" xmlns:a14="http://schemas.microsoft.com/office/drawing/2010/main" w="9525">
                   <a:solidFill>
                     <a:srgbClr val="000000"/>
                   </a:solidFill>
@@ -16537,7 +16538,7 @@
             </a:ln>
             <a:extLst>
               <a:ext uri="{91240B29-F687-4f45-9708-019B960494DF}">
-                <a14:hiddenLine xmlns:a14="http://schemas.microsoft.com/office/drawing/2010/main" xmlns:p14="http://schemas.microsoft.com/office/powerpoint/2010/main" xmlns:a16="http://schemas.microsoft.com/office/drawing/2014/main" xmlns="" w="9525">
+                <a14:hiddenLine xmlns="" xmlns:a16="http://schemas.microsoft.com/office/drawing/2014/main" xmlns:p14="http://schemas.microsoft.com/office/powerpoint/2010/main" xmlns:a14="http://schemas.microsoft.com/office/drawing/2010/main" w="9525">
                   <a:solidFill>
                     <a:srgbClr val="000000"/>
                   </a:solidFill>
@@ -16649,7 +16650,7 @@
             </a:ln>
             <a:extLst>
               <a:ext uri="{91240B29-F687-4f45-9708-019B960494DF}">
-                <a14:hiddenLine xmlns:a14="http://schemas.microsoft.com/office/drawing/2010/main" xmlns:p14="http://schemas.microsoft.com/office/powerpoint/2010/main" xmlns:a16="http://schemas.microsoft.com/office/drawing/2014/main" xmlns="" w="9525">
+                <a14:hiddenLine xmlns="" xmlns:a16="http://schemas.microsoft.com/office/drawing/2014/main" xmlns:p14="http://schemas.microsoft.com/office/powerpoint/2010/main" xmlns:a14="http://schemas.microsoft.com/office/drawing/2010/main" w="9525">
                   <a:solidFill>
                     <a:srgbClr val="000000"/>
                   </a:solidFill>
@@ -16761,7 +16762,7 @@
             </a:ln>
             <a:extLst>
               <a:ext uri="{91240B29-F687-4f45-9708-019B960494DF}">
-                <a14:hiddenLine xmlns:a14="http://schemas.microsoft.com/office/drawing/2010/main" xmlns:p14="http://schemas.microsoft.com/office/powerpoint/2010/main" xmlns:a16="http://schemas.microsoft.com/office/drawing/2014/main" xmlns="" w="9525">
+                <a14:hiddenLine xmlns="" xmlns:a16="http://schemas.microsoft.com/office/drawing/2014/main" xmlns:p14="http://schemas.microsoft.com/office/powerpoint/2010/main" xmlns:a14="http://schemas.microsoft.com/office/drawing/2010/main" w="9525">
                   <a:solidFill>
                     <a:srgbClr val="000000"/>
                   </a:solidFill>
@@ -16845,7 +16846,7 @@
             </a:ln>
             <a:extLst>
               <a:ext uri="{91240B29-F687-4f45-9708-019B960494DF}">
-                <a14:hiddenLine xmlns:a14="http://schemas.microsoft.com/office/drawing/2010/main" xmlns:p14="http://schemas.microsoft.com/office/powerpoint/2010/main" xmlns:a16="http://schemas.microsoft.com/office/drawing/2014/main" xmlns="" w="9525">
+                <a14:hiddenLine xmlns="" xmlns:a16="http://schemas.microsoft.com/office/drawing/2014/main" xmlns:p14="http://schemas.microsoft.com/office/powerpoint/2010/main" xmlns:a14="http://schemas.microsoft.com/office/drawing/2010/main" w="9525">
                   <a:solidFill>
                     <a:srgbClr val="000000"/>
                   </a:solidFill>
@@ -16977,7 +16978,7 @@
             </a:ln>
             <a:extLst>
               <a:ext uri="{91240B29-F687-4f45-9708-019B960494DF}">
-                <a14:hiddenLine xmlns:a14="http://schemas.microsoft.com/office/drawing/2010/main" xmlns:p14="http://schemas.microsoft.com/office/powerpoint/2010/main" xmlns:a16="http://schemas.microsoft.com/office/drawing/2014/main" xmlns="" w="9525">
+                <a14:hiddenLine xmlns="" xmlns:a16="http://schemas.microsoft.com/office/drawing/2014/main" xmlns:p14="http://schemas.microsoft.com/office/powerpoint/2010/main" xmlns:a14="http://schemas.microsoft.com/office/drawing/2010/main" w="9525">
                   <a:solidFill>
                     <a:srgbClr val="000000"/>
                   </a:solidFill>
@@ -17105,7 +17106,7 @@
             </a:ln>
             <a:extLst>
               <a:ext uri="{91240B29-F687-4f45-9708-019B960494DF}">
-                <a14:hiddenLine xmlns:a14="http://schemas.microsoft.com/office/drawing/2010/main" xmlns:p14="http://schemas.microsoft.com/office/powerpoint/2010/main" xmlns:a16="http://schemas.microsoft.com/office/drawing/2014/main" xmlns="" w="9525">
+                <a14:hiddenLine xmlns="" xmlns:a16="http://schemas.microsoft.com/office/drawing/2014/main" xmlns:p14="http://schemas.microsoft.com/office/powerpoint/2010/main" xmlns:a14="http://schemas.microsoft.com/office/drawing/2010/main" w="9525">
                   <a:solidFill>
                     <a:srgbClr val="000000"/>
                   </a:solidFill>
@@ -17189,7 +17190,7 @@
             </a:ln>
             <a:extLst>
               <a:ext uri="{91240B29-F687-4f45-9708-019B960494DF}">
-                <a14:hiddenLine xmlns:a14="http://schemas.microsoft.com/office/drawing/2010/main" xmlns:p14="http://schemas.microsoft.com/office/powerpoint/2010/main" xmlns:a16="http://schemas.microsoft.com/office/drawing/2014/main" xmlns="" w="9525">
+                <a14:hiddenLine xmlns="" xmlns:a16="http://schemas.microsoft.com/office/drawing/2014/main" xmlns:p14="http://schemas.microsoft.com/office/powerpoint/2010/main" xmlns:a14="http://schemas.microsoft.com/office/drawing/2010/main" w="9525">
                   <a:solidFill>
                     <a:srgbClr val="000000"/>
                   </a:solidFill>
@@ -17273,7 +17274,7 @@
             </a:ln>
             <a:extLst>
               <a:ext uri="{91240B29-F687-4f45-9708-019B960494DF}">
-                <a14:hiddenLine xmlns:a14="http://schemas.microsoft.com/office/drawing/2010/main" xmlns:p14="http://schemas.microsoft.com/office/powerpoint/2010/main" xmlns:a16="http://schemas.microsoft.com/office/drawing/2014/main" xmlns="" w="9525">
+                <a14:hiddenLine xmlns="" xmlns:a16="http://schemas.microsoft.com/office/drawing/2014/main" xmlns:p14="http://schemas.microsoft.com/office/powerpoint/2010/main" xmlns:a14="http://schemas.microsoft.com/office/drawing/2010/main" w="9525">
                   <a:solidFill>
                     <a:srgbClr val="000000"/>
                   </a:solidFill>
@@ -17385,7 +17386,7 @@
             </a:ln>
             <a:extLst>
               <a:ext uri="{91240B29-F687-4f45-9708-019B960494DF}">
-                <a14:hiddenLine xmlns:a14="http://schemas.microsoft.com/office/drawing/2010/main" xmlns:p14="http://schemas.microsoft.com/office/powerpoint/2010/main" xmlns:a16="http://schemas.microsoft.com/office/drawing/2014/main" xmlns="" w="9525">
+                <a14:hiddenLine xmlns="" xmlns:a16="http://schemas.microsoft.com/office/drawing/2014/main" xmlns:p14="http://schemas.microsoft.com/office/powerpoint/2010/main" xmlns:a14="http://schemas.microsoft.com/office/drawing/2010/main" w="9525">
                   <a:solidFill>
                     <a:srgbClr val="000000"/>
                   </a:solidFill>
@@ -17441,7 +17442,7 @@
             </a:ln>
             <a:extLst>
               <a:ext uri="{91240B29-F687-4f45-9708-019B960494DF}">
-                <a14:hiddenLine xmlns:a14="http://schemas.microsoft.com/office/drawing/2010/main" xmlns:p14="http://schemas.microsoft.com/office/powerpoint/2010/main" xmlns:a16="http://schemas.microsoft.com/office/drawing/2014/main" xmlns="" w="9525">
+                <a14:hiddenLine xmlns="" xmlns:a16="http://schemas.microsoft.com/office/drawing/2014/main" xmlns:p14="http://schemas.microsoft.com/office/powerpoint/2010/main" xmlns:a14="http://schemas.microsoft.com/office/drawing/2010/main" w="9525">
                   <a:solidFill>
                     <a:srgbClr val="000000"/>
                   </a:solidFill>
@@ -17528,7 +17529,7 @@
             </a:ln>
             <a:extLst>
               <a:ext uri="{91240B29-F687-4f45-9708-019B960494DF}">
-                <a14:hiddenLine xmlns:a14="http://schemas.microsoft.com/office/drawing/2010/main" xmlns:p14="http://schemas.microsoft.com/office/powerpoint/2010/main" xmlns:a16="http://schemas.microsoft.com/office/drawing/2014/main" xmlns="" w="9525">
+                <a14:hiddenLine xmlns="" xmlns:a16="http://schemas.microsoft.com/office/drawing/2014/main" xmlns:p14="http://schemas.microsoft.com/office/powerpoint/2010/main" xmlns:a14="http://schemas.microsoft.com/office/drawing/2010/main" w="9525">
                   <a:solidFill>
                     <a:srgbClr val="000000"/>
                   </a:solidFill>
@@ -17640,7 +17641,7 @@
             </a:ln>
             <a:extLst>
               <a:ext uri="{91240B29-F687-4f45-9708-019B960494DF}">
-                <a14:hiddenLine xmlns:a14="http://schemas.microsoft.com/office/drawing/2010/main" xmlns:p14="http://schemas.microsoft.com/office/powerpoint/2010/main" xmlns:a16="http://schemas.microsoft.com/office/drawing/2014/main" xmlns="" w="9525">
+                <a14:hiddenLine xmlns="" xmlns:a16="http://schemas.microsoft.com/office/drawing/2014/main" xmlns:p14="http://schemas.microsoft.com/office/powerpoint/2010/main" xmlns:a14="http://schemas.microsoft.com/office/drawing/2010/main" w="9525">
                   <a:solidFill>
                     <a:srgbClr val="000000"/>
                   </a:solidFill>
@@ -17724,7 +17725,7 @@
             </a:ln>
             <a:extLst>
               <a:ext uri="{91240B29-F687-4f45-9708-019B960494DF}">
-                <a14:hiddenLine xmlns:a14="http://schemas.microsoft.com/office/drawing/2010/main" xmlns:p14="http://schemas.microsoft.com/office/powerpoint/2010/main" xmlns:a16="http://schemas.microsoft.com/office/drawing/2014/main" xmlns="" w="9525">
+                <a14:hiddenLine xmlns="" xmlns:a16="http://schemas.microsoft.com/office/drawing/2014/main" xmlns:p14="http://schemas.microsoft.com/office/powerpoint/2010/main" xmlns:a14="http://schemas.microsoft.com/office/drawing/2010/main" w="9525">
                   <a:solidFill>
                     <a:srgbClr val="000000"/>
                   </a:solidFill>
@@ -17836,7 +17837,7 @@
             </a:ln>
             <a:extLst>
               <a:ext uri="{91240B29-F687-4f45-9708-019B960494DF}">
-                <a14:hiddenLine xmlns:a14="http://schemas.microsoft.com/office/drawing/2010/main" xmlns:p14="http://schemas.microsoft.com/office/powerpoint/2010/main" xmlns:a16="http://schemas.microsoft.com/office/drawing/2014/main" xmlns="" w="9525">
+                <a14:hiddenLine xmlns="" xmlns:a16="http://schemas.microsoft.com/office/drawing/2014/main" xmlns:p14="http://schemas.microsoft.com/office/powerpoint/2010/main" xmlns:a14="http://schemas.microsoft.com/office/drawing/2010/main" w="9525">
                   <a:solidFill>
                     <a:srgbClr val="000000"/>
                   </a:solidFill>
@@ -17923,7 +17924,7 @@
             </a:ln>
             <a:extLst>
               <a:ext uri="{91240B29-F687-4f45-9708-019B960494DF}">
-                <a14:hiddenLine xmlns:a14="http://schemas.microsoft.com/office/drawing/2010/main" xmlns:p14="http://schemas.microsoft.com/office/powerpoint/2010/main" xmlns:a16="http://schemas.microsoft.com/office/drawing/2014/main" xmlns="" w="9525">
+                <a14:hiddenLine xmlns="" xmlns:a16="http://schemas.microsoft.com/office/drawing/2014/main" xmlns:p14="http://schemas.microsoft.com/office/powerpoint/2010/main" xmlns:a14="http://schemas.microsoft.com/office/drawing/2010/main" w="9525">
                   <a:solidFill>
                     <a:srgbClr val="000000"/>
                   </a:solidFill>
@@ -18007,7 +18008,7 @@
             </a:ln>
             <a:extLst>
               <a:ext uri="{91240B29-F687-4f45-9708-019B960494DF}">
-                <a14:hiddenLine xmlns:a14="http://schemas.microsoft.com/office/drawing/2010/main" xmlns:p14="http://schemas.microsoft.com/office/powerpoint/2010/main" xmlns:a16="http://schemas.microsoft.com/office/drawing/2014/main" xmlns="" w="9525">
+                <a14:hiddenLine xmlns="" xmlns:a16="http://schemas.microsoft.com/office/drawing/2014/main" xmlns:p14="http://schemas.microsoft.com/office/powerpoint/2010/main" xmlns:a14="http://schemas.microsoft.com/office/drawing/2010/main" w="9525">
                   <a:solidFill>
                     <a:srgbClr val="000000"/>
                   </a:solidFill>
@@ -18119,7 +18120,7 @@
             </a:ln>
             <a:extLst>
               <a:ext uri="{91240B29-F687-4f45-9708-019B960494DF}">
-                <a14:hiddenLine xmlns:a14="http://schemas.microsoft.com/office/drawing/2010/main" xmlns:p14="http://schemas.microsoft.com/office/powerpoint/2010/main" xmlns:a16="http://schemas.microsoft.com/office/drawing/2014/main" xmlns="" w="9525">
+                <a14:hiddenLine xmlns="" xmlns:a16="http://schemas.microsoft.com/office/drawing/2014/main" xmlns:p14="http://schemas.microsoft.com/office/powerpoint/2010/main" xmlns:a14="http://schemas.microsoft.com/office/drawing/2010/main" w="9525">
                   <a:solidFill>
                     <a:srgbClr val="000000"/>
                   </a:solidFill>
@@ -18231,7 +18232,7 @@
             </a:ln>
             <a:extLst>
               <a:ext uri="{91240B29-F687-4f45-9708-019B960494DF}">
-                <a14:hiddenLine xmlns:a14="http://schemas.microsoft.com/office/drawing/2010/main" xmlns:p14="http://schemas.microsoft.com/office/powerpoint/2010/main" xmlns:a16="http://schemas.microsoft.com/office/drawing/2014/main" xmlns="" w="9525">
+                <a14:hiddenLine xmlns="" xmlns:a16="http://schemas.microsoft.com/office/drawing/2014/main" xmlns:p14="http://schemas.microsoft.com/office/powerpoint/2010/main" xmlns:a14="http://schemas.microsoft.com/office/drawing/2010/main" w="9525">
                   <a:solidFill>
                     <a:srgbClr val="000000"/>
                   </a:solidFill>
@@ -18318,7 +18319,7 @@
             </a:ln>
             <a:extLst>
               <a:ext uri="{91240B29-F687-4f45-9708-019B960494DF}">
-                <a14:hiddenLine xmlns:a14="http://schemas.microsoft.com/office/drawing/2010/main" xmlns:p14="http://schemas.microsoft.com/office/powerpoint/2010/main" xmlns:a16="http://schemas.microsoft.com/office/drawing/2014/main" xmlns="" w="9525">
+                <a14:hiddenLine xmlns="" xmlns:a16="http://schemas.microsoft.com/office/drawing/2014/main" xmlns:p14="http://schemas.microsoft.com/office/powerpoint/2010/main" xmlns:a14="http://schemas.microsoft.com/office/drawing/2010/main" w="9525">
                   <a:solidFill>
                     <a:srgbClr val="000000"/>
                   </a:solidFill>
@@ -18460,7 +18461,7 @@
             </a:ln>
             <a:extLst>
               <a:ext uri="{91240B29-F687-4f45-9708-019B960494DF}">
-                <a14:hiddenLine xmlns:a14="http://schemas.microsoft.com/office/drawing/2010/main" xmlns:p14="http://schemas.microsoft.com/office/powerpoint/2010/main" xmlns:a16="http://schemas.microsoft.com/office/drawing/2014/main" xmlns="" w="9525">
+                <a14:hiddenLine xmlns="" xmlns:a16="http://schemas.microsoft.com/office/drawing/2014/main" xmlns:p14="http://schemas.microsoft.com/office/powerpoint/2010/main" xmlns:a14="http://schemas.microsoft.com/office/drawing/2010/main" w="9525">
                   <a:solidFill>
                     <a:srgbClr val="000000"/>
                   </a:solidFill>
@@ -18654,7 +18655,7 @@
           </a:prstGeom>
           <a:extLst>
             <a:ext uri="{909E8E84-426E-40dd-AFC4-6F175D3DCCD1}">
-              <a14:hiddenFill xmlns:a14="http://schemas.microsoft.com/office/drawing/2010/main" xmlns:p14="http://schemas.microsoft.com/office/powerpoint/2010/main" xmlns:a16="http://schemas.microsoft.com/office/drawing/2014/main" xmlns="">
+              <a14:hiddenFill xmlns="" xmlns:a16="http://schemas.microsoft.com/office/drawing/2014/main" xmlns:p14="http://schemas.microsoft.com/office/powerpoint/2010/main" xmlns:a14="http://schemas.microsoft.com/office/drawing/2010/main">
                 <a:solidFill>
                   <a:srgbClr val="FFFFFF"/>
                 </a:solidFill>
@@ -18778,7 +18779,7 @@
           <a:noFill/>
           <a:extLst>
             <a:ext uri="{909E8E84-426E-40dd-AFC4-6F175D3DCCD1}">
-              <a14:hiddenFill xmlns:a14="http://schemas.microsoft.com/office/drawing/2010/main" xmlns:p14="http://schemas.microsoft.com/office/powerpoint/2010/main" xmlns:a16="http://schemas.microsoft.com/office/drawing/2014/main" xmlns="">
+              <a14:hiddenFill xmlns="" xmlns:a16="http://schemas.microsoft.com/office/drawing/2014/main" xmlns:p14="http://schemas.microsoft.com/office/powerpoint/2010/main" xmlns:a14="http://schemas.microsoft.com/office/drawing/2010/main">
                 <a:solidFill>
                   <a:srgbClr val="FFFFFF"/>
                 </a:solidFill>
@@ -19105,7 +19106,7 @@
             </a:ln>
             <a:extLst>
               <a:ext uri="{91240B29-F687-4f45-9708-019B960494DF}">
-                <a14:hiddenLine xmlns:a14="http://schemas.microsoft.com/office/drawing/2010/main" xmlns:p14="http://schemas.microsoft.com/office/powerpoint/2010/main" xmlns:a16="http://schemas.microsoft.com/office/drawing/2014/main" xmlns="" w="9525">
+                <a14:hiddenLine xmlns="" xmlns:a16="http://schemas.microsoft.com/office/drawing/2014/main" xmlns:p14="http://schemas.microsoft.com/office/powerpoint/2010/main" xmlns:a14="http://schemas.microsoft.com/office/drawing/2010/main" w="9525">
                   <a:solidFill>
                     <a:srgbClr val="000000"/>
                   </a:solidFill>
@@ -19217,7 +19218,7 @@
             </a:ln>
             <a:extLst>
               <a:ext uri="{91240B29-F687-4f45-9708-019B960494DF}">
-                <a14:hiddenLine xmlns:a14="http://schemas.microsoft.com/office/drawing/2010/main" xmlns:p14="http://schemas.microsoft.com/office/powerpoint/2010/main" xmlns:a16="http://schemas.microsoft.com/office/drawing/2014/main" xmlns="" w="9525">
+                <a14:hiddenLine xmlns="" xmlns:a16="http://schemas.microsoft.com/office/drawing/2014/main" xmlns:p14="http://schemas.microsoft.com/office/powerpoint/2010/main" xmlns:a14="http://schemas.microsoft.com/office/drawing/2010/main" w="9525">
                   <a:solidFill>
                     <a:srgbClr val="000000"/>
                   </a:solidFill>
@@ -19329,7 +19330,7 @@
             </a:ln>
             <a:extLst>
               <a:ext uri="{91240B29-F687-4f45-9708-019B960494DF}">
-                <a14:hiddenLine xmlns:a14="http://schemas.microsoft.com/office/drawing/2010/main" xmlns:p14="http://schemas.microsoft.com/office/powerpoint/2010/main" xmlns:a16="http://schemas.microsoft.com/office/drawing/2014/main" xmlns="" w="9525">
+                <a14:hiddenLine xmlns="" xmlns:a16="http://schemas.microsoft.com/office/drawing/2014/main" xmlns:p14="http://schemas.microsoft.com/office/powerpoint/2010/main" xmlns:a14="http://schemas.microsoft.com/office/drawing/2010/main" w="9525">
                   <a:solidFill>
                     <a:srgbClr val="000000"/>
                   </a:solidFill>
@@ -19413,7 +19414,7 @@
             </a:ln>
             <a:extLst>
               <a:ext uri="{91240B29-F687-4f45-9708-019B960494DF}">
-                <a14:hiddenLine xmlns:a14="http://schemas.microsoft.com/office/drawing/2010/main" xmlns:p14="http://schemas.microsoft.com/office/powerpoint/2010/main" xmlns:a16="http://schemas.microsoft.com/office/drawing/2014/main" xmlns="" w="9525">
+                <a14:hiddenLine xmlns="" xmlns:a16="http://schemas.microsoft.com/office/drawing/2014/main" xmlns:p14="http://schemas.microsoft.com/office/powerpoint/2010/main" xmlns:a14="http://schemas.microsoft.com/office/drawing/2010/main" w="9525">
                   <a:solidFill>
                     <a:srgbClr val="000000"/>
                   </a:solidFill>
@@ -19525,7 +19526,7 @@
             </a:ln>
             <a:extLst>
               <a:ext uri="{91240B29-F687-4f45-9708-019B960494DF}">
-                <a14:hiddenLine xmlns:a14="http://schemas.microsoft.com/office/drawing/2010/main" xmlns:p14="http://schemas.microsoft.com/office/powerpoint/2010/main" xmlns:a16="http://schemas.microsoft.com/office/drawing/2014/main" xmlns="" w="9525">
+                <a14:hiddenLine xmlns="" xmlns:a16="http://schemas.microsoft.com/office/drawing/2014/main" xmlns:p14="http://schemas.microsoft.com/office/powerpoint/2010/main" xmlns:a14="http://schemas.microsoft.com/office/drawing/2010/main" w="9525">
                   <a:solidFill>
                     <a:srgbClr val="000000"/>
                   </a:solidFill>
@@ -19609,7 +19610,7 @@
             </a:ln>
             <a:extLst>
               <a:ext uri="{91240B29-F687-4f45-9708-019B960494DF}">
-                <a14:hiddenLine xmlns:a14="http://schemas.microsoft.com/office/drawing/2010/main" xmlns:p14="http://schemas.microsoft.com/office/powerpoint/2010/main" xmlns:a16="http://schemas.microsoft.com/office/drawing/2014/main" xmlns="" w="9525">
+                <a14:hiddenLine xmlns="" xmlns:a16="http://schemas.microsoft.com/office/drawing/2014/main" xmlns:p14="http://schemas.microsoft.com/office/powerpoint/2010/main" xmlns:a14="http://schemas.microsoft.com/office/drawing/2010/main" w="9525">
                   <a:solidFill>
                     <a:srgbClr val="000000"/>
                   </a:solidFill>
@@ -19693,7 +19694,7 @@
             </a:ln>
             <a:extLst>
               <a:ext uri="{91240B29-F687-4f45-9708-019B960494DF}">
-                <a14:hiddenLine xmlns:a14="http://schemas.microsoft.com/office/drawing/2010/main" xmlns:p14="http://schemas.microsoft.com/office/powerpoint/2010/main" xmlns:a16="http://schemas.microsoft.com/office/drawing/2014/main" xmlns="" w="9525">
+                <a14:hiddenLine xmlns="" xmlns:a16="http://schemas.microsoft.com/office/drawing/2014/main" xmlns:p14="http://schemas.microsoft.com/office/powerpoint/2010/main" xmlns:a14="http://schemas.microsoft.com/office/drawing/2010/main" w="9525">
                   <a:solidFill>
                     <a:srgbClr val="000000"/>
                   </a:solidFill>
@@ -19805,7 +19806,7 @@
             </a:ln>
             <a:extLst>
               <a:ext uri="{91240B29-F687-4f45-9708-019B960494DF}">
-                <a14:hiddenLine xmlns:a14="http://schemas.microsoft.com/office/drawing/2010/main" xmlns:p14="http://schemas.microsoft.com/office/powerpoint/2010/main" xmlns:a16="http://schemas.microsoft.com/office/drawing/2014/main" xmlns="" w="9525">
+                <a14:hiddenLine xmlns="" xmlns:a16="http://schemas.microsoft.com/office/drawing/2014/main" xmlns:p14="http://schemas.microsoft.com/office/powerpoint/2010/main" xmlns:a14="http://schemas.microsoft.com/office/drawing/2010/main" w="9525">
                   <a:solidFill>
                     <a:srgbClr val="000000"/>
                   </a:solidFill>
@@ -19917,7 +19918,7 @@
             </a:ln>
             <a:extLst>
               <a:ext uri="{91240B29-F687-4f45-9708-019B960494DF}">
-                <a14:hiddenLine xmlns:a14="http://schemas.microsoft.com/office/drawing/2010/main" xmlns:p14="http://schemas.microsoft.com/office/powerpoint/2010/main" xmlns:a16="http://schemas.microsoft.com/office/drawing/2014/main" xmlns="" w="9525">
+                <a14:hiddenLine xmlns="" xmlns:a16="http://schemas.microsoft.com/office/drawing/2014/main" xmlns:p14="http://schemas.microsoft.com/office/powerpoint/2010/main" xmlns:a14="http://schemas.microsoft.com/office/drawing/2010/main" w="9525">
                   <a:solidFill>
                     <a:srgbClr val="000000"/>
                   </a:solidFill>
@@ -20001,7 +20002,7 @@
             </a:ln>
             <a:extLst>
               <a:ext uri="{91240B29-F687-4f45-9708-019B960494DF}">
-                <a14:hiddenLine xmlns:a14="http://schemas.microsoft.com/office/drawing/2010/main" xmlns:p14="http://schemas.microsoft.com/office/powerpoint/2010/main" xmlns:a16="http://schemas.microsoft.com/office/drawing/2014/main" xmlns="" w="9525">
+                <a14:hiddenLine xmlns="" xmlns:a16="http://schemas.microsoft.com/office/drawing/2014/main" xmlns:p14="http://schemas.microsoft.com/office/powerpoint/2010/main" xmlns:a14="http://schemas.microsoft.com/office/drawing/2010/main" w="9525">
                   <a:solidFill>
                     <a:srgbClr val="000000"/>
                   </a:solidFill>
@@ -20133,7 +20134,7 @@
             </a:ln>
             <a:extLst>
               <a:ext uri="{91240B29-F687-4f45-9708-019B960494DF}">
-                <a14:hiddenLine xmlns:a14="http://schemas.microsoft.com/office/drawing/2010/main" xmlns:p14="http://schemas.microsoft.com/office/powerpoint/2010/main" xmlns:a16="http://schemas.microsoft.com/office/drawing/2014/main" xmlns="" w="9525">
+                <a14:hiddenLine xmlns="" xmlns:a16="http://schemas.microsoft.com/office/drawing/2014/main" xmlns:p14="http://schemas.microsoft.com/office/powerpoint/2010/main" xmlns:a14="http://schemas.microsoft.com/office/drawing/2010/main" w="9525">
                   <a:solidFill>
                     <a:srgbClr val="000000"/>
                   </a:solidFill>
@@ -20261,7 +20262,7 @@
             </a:ln>
             <a:extLst>
               <a:ext uri="{91240B29-F687-4f45-9708-019B960494DF}">
-                <a14:hiddenLine xmlns:a14="http://schemas.microsoft.com/office/drawing/2010/main" xmlns:p14="http://schemas.microsoft.com/office/powerpoint/2010/main" xmlns:a16="http://schemas.microsoft.com/office/drawing/2014/main" xmlns="" w="9525">
+                <a14:hiddenLine xmlns="" xmlns:a16="http://schemas.microsoft.com/office/drawing/2014/main" xmlns:p14="http://schemas.microsoft.com/office/powerpoint/2010/main" xmlns:a14="http://schemas.microsoft.com/office/drawing/2010/main" w="9525">
                   <a:solidFill>
                     <a:srgbClr val="000000"/>
                   </a:solidFill>
@@ -20345,7 +20346,7 @@
             </a:ln>
             <a:extLst>
               <a:ext uri="{91240B29-F687-4f45-9708-019B960494DF}">
-                <a14:hiddenLine xmlns:a14="http://schemas.microsoft.com/office/drawing/2010/main" xmlns:p14="http://schemas.microsoft.com/office/powerpoint/2010/main" xmlns:a16="http://schemas.microsoft.com/office/drawing/2014/main" xmlns="" w="9525">
+                <a14:hiddenLine xmlns="" xmlns:a16="http://schemas.microsoft.com/office/drawing/2014/main" xmlns:p14="http://schemas.microsoft.com/office/powerpoint/2010/main" xmlns:a14="http://schemas.microsoft.com/office/drawing/2010/main" w="9525">
                   <a:solidFill>
                     <a:srgbClr val="000000"/>
                   </a:solidFill>
@@ -20429,7 +20430,7 @@
             </a:ln>
             <a:extLst>
               <a:ext uri="{91240B29-F687-4f45-9708-019B960494DF}">
-                <a14:hiddenLine xmlns:a14="http://schemas.microsoft.com/office/drawing/2010/main" xmlns:p14="http://schemas.microsoft.com/office/powerpoint/2010/main" xmlns:a16="http://schemas.microsoft.com/office/drawing/2014/main" xmlns="" w="9525">
+                <a14:hiddenLine xmlns="" xmlns:a16="http://schemas.microsoft.com/office/drawing/2014/main" xmlns:p14="http://schemas.microsoft.com/office/powerpoint/2010/main" xmlns:a14="http://schemas.microsoft.com/office/drawing/2010/main" w="9525">
                   <a:solidFill>
                     <a:srgbClr val="000000"/>
                   </a:solidFill>
@@ -20541,7 +20542,7 @@
             </a:ln>
             <a:extLst>
               <a:ext uri="{91240B29-F687-4f45-9708-019B960494DF}">
-                <a14:hiddenLine xmlns:a14="http://schemas.microsoft.com/office/drawing/2010/main" xmlns:p14="http://schemas.microsoft.com/office/powerpoint/2010/main" xmlns:a16="http://schemas.microsoft.com/office/drawing/2014/main" xmlns="" w="9525">
+                <a14:hiddenLine xmlns="" xmlns:a16="http://schemas.microsoft.com/office/drawing/2014/main" xmlns:p14="http://schemas.microsoft.com/office/powerpoint/2010/main" xmlns:a14="http://schemas.microsoft.com/office/drawing/2010/main" w="9525">
                   <a:solidFill>
                     <a:srgbClr val="000000"/>
                   </a:solidFill>
@@ -20597,7 +20598,7 @@
             </a:ln>
             <a:extLst>
               <a:ext uri="{91240B29-F687-4f45-9708-019B960494DF}">
-                <a14:hiddenLine xmlns:a14="http://schemas.microsoft.com/office/drawing/2010/main" xmlns:p14="http://schemas.microsoft.com/office/powerpoint/2010/main" xmlns:a16="http://schemas.microsoft.com/office/drawing/2014/main" xmlns="" w="9525">
+                <a14:hiddenLine xmlns="" xmlns:a16="http://schemas.microsoft.com/office/drawing/2014/main" xmlns:p14="http://schemas.microsoft.com/office/powerpoint/2010/main" xmlns:a14="http://schemas.microsoft.com/office/drawing/2010/main" w="9525">
                   <a:solidFill>
                     <a:srgbClr val="000000"/>
                   </a:solidFill>
@@ -20684,7 +20685,7 @@
             </a:ln>
             <a:extLst>
               <a:ext uri="{91240B29-F687-4f45-9708-019B960494DF}">
-                <a14:hiddenLine xmlns:a14="http://schemas.microsoft.com/office/drawing/2010/main" xmlns:p14="http://schemas.microsoft.com/office/powerpoint/2010/main" xmlns:a16="http://schemas.microsoft.com/office/drawing/2014/main" xmlns="" w="9525">
+                <a14:hiddenLine xmlns="" xmlns:a16="http://schemas.microsoft.com/office/drawing/2014/main" xmlns:p14="http://schemas.microsoft.com/office/powerpoint/2010/main" xmlns:a14="http://schemas.microsoft.com/office/drawing/2010/main" w="9525">
                   <a:solidFill>
                     <a:srgbClr val="000000"/>
                   </a:solidFill>
@@ -20796,7 +20797,7 @@
             </a:ln>
             <a:extLst>
               <a:ext uri="{91240B29-F687-4f45-9708-019B960494DF}">
-                <a14:hiddenLine xmlns:a14="http://schemas.microsoft.com/office/drawing/2010/main" xmlns:p14="http://schemas.microsoft.com/office/powerpoint/2010/main" xmlns:a16="http://schemas.microsoft.com/office/drawing/2014/main" xmlns="" w="9525">
+                <a14:hiddenLine xmlns="" xmlns:a16="http://schemas.microsoft.com/office/drawing/2014/main" xmlns:p14="http://schemas.microsoft.com/office/powerpoint/2010/main" xmlns:a14="http://schemas.microsoft.com/office/drawing/2010/main" w="9525">
                   <a:solidFill>
                     <a:srgbClr val="000000"/>
                   </a:solidFill>
@@ -20880,7 +20881,7 @@
             </a:ln>
             <a:extLst>
               <a:ext uri="{91240B29-F687-4f45-9708-019B960494DF}">
-                <a14:hiddenLine xmlns:a14="http://schemas.microsoft.com/office/drawing/2010/main" xmlns:p14="http://schemas.microsoft.com/office/powerpoint/2010/main" xmlns:a16="http://schemas.microsoft.com/office/drawing/2014/main" xmlns="" w="9525">
+                <a14:hiddenLine xmlns="" xmlns:a16="http://schemas.microsoft.com/office/drawing/2014/main" xmlns:p14="http://schemas.microsoft.com/office/powerpoint/2010/main" xmlns:a14="http://schemas.microsoft.com/office/drawing/2010/main" w="9525">
                   <a:solidFill>
                     <a:srgbClr val="000000"/>
                   </a:solidFill>
@@ -20992,7 +20993,7 @@
             </a:ln>
             <a:extLst>
               <a:ext uri="{91240B29-F687-4f45-9708-019B960494DF}">
-                <a14:hiddenLine xmlns:a14="http://schemas.microsoft.com/office/drawing/2010/main" xmlns:p14="http://schemas.microsoft.com/office/powerpoint/2010/main" xmlns:a16="http://schemas.microsoft.com/office/drawing/2014/main" xmlns="" w="9525">
+                <a14:hiddenLine xmlns="" xmlns:a16="http://schemas.microsoft.com/office/drawing/2014/main" xmlns:p14="http://schemas.microsoft.com/office/powerpoint/2010/main" xmlns:a14="http://schemas.microsoft.com/office/drawing/2010/main" w="9525">
                   <a:solidFill>
                     <a:srgbClr val="000000"/>
                   </a:solidFill>
@@ -21079,7 +21080,7 @@
             </a:ln>
             <a:extLst>
               <a:ext uri="{91240B29-F687-4f45-9708-019B960494DF}">
-                <a14:hiddenLine xmlns:a14="http://schemas.microsoft.com/office/drawing/2010/main" xmlns:p14="http://schemas.microsoft.com/office/powerpoint/2010/main" xmlns:a16="http://schemas.microsoft.com/office/drawing/2014/main" xmlns="" w="9525">
+                <a14:hiddenLine xmlns="" xmlns:a16="http://schemas.microsoft.com/office/drawing/2014/main" xmlns:p14="http://schemas.microsoft.com/office/powerpoint/2010/main" xmlns:a14="http://schemas.microsoft.com/office/drawing/2010/main" w="9525">
                   <a:solidFill>
                     <a:srgbClr val="000000"/>
                   </a:solidFill>
@@ -21163,7 +21164,7 @@
             </a:ln>
             <a:extLst>
               <a:ext uri="{91240B29-F687-4f45-9708-019B960494DF}">
-                <a14:hiddenLine xmlns:a14="http://schemas.microsoft.com/office/drawing/2010/main" xmlns:p14="http://schemas.microsoft.com/office/powerpoint/2010/main" xmlns:a16="http://schemas.microsoft.com/office/drawing/2014/main" xmlns="" w="9525">
+                <a14:hiddenLine xmlns="" xmlns:a16="http://schemas.microsoft.com/office/drawing/2014/main" xmlns:p14="http://schemas.microsoft.com/office/powerpoint/2010/main" xmlns:a14="http://schemas.microsoft.com/office/drawing/2010/main" w="9525">
                   <a:solidFill>
                     <a:srgbClr val="000000"/>
                   </a:solidFill>
@@ -21275,7 +21276,7 @@
             </a:ln>
             <a:extLst>
               <a:ext uri="{91240B29-F687-4f45-9708-019B960494DF}">
-                <a14:hiddenLine xmlns:a14="http://schemas.microsoft.com/office/drawing/2010/main" xmlns:p14="http://schemas.microsoft.com/office/powerpoint/2010/main" xmlns:a16="http://schemas.microsoft.com/office/drawing/2014/main" xmlns="" w="9525">
+                <a14:hiddenLine xmlns="" xmlns:a16="http://schemas.microsoft.com/office/drawing/2014/main" xmlns:p14="http://schemas.microsoft.com/office/powerpoint/2010/main" xmlns:a14="http://schemas.microsoft.com/office/drawing/2010/main" w="9525">
                   <a:solidFill>
                     <a:srgbClr val="000000"/>
                   </a:solidFill>
@@ -21387,7 +21388,7 @@
             </a:ln>
             <a:extLst>
               <a:ext uri="{91240B29-F687-4f45-9708-019B960494DF}">
-                <a14:hiddenLine xmlns:a14="http://schemas.microsoft.com/office/drawing/2010/main" xmlns:p14="http://schemas.microsoft.com/office/powerpoint/2010/main" xmlns:a16="http://schemas.microsoft.com/office/drawing/2014/main" xmlns="" w="9525">
+                <a14:hiddenLine xmlns="" xmlns:a16="http://schemas.microsoft.com/office/drawing/2014/main" xmlns:p14="http://schemas.microsoft.com/office/powerpoint/2010/main" xmlns:a14="http://schemas.microsoft.com/office/drawing/2010/main" w="9525">
                   <a:solidFill>
                     <a:srgbClr val="000000"/>
                   </a:solidFill>
@@ -21474,7 +21475,7 @@
             </a:ln>
             <a:extLst>
               <a:ext uri="{91240B29-F687-4f45-9708-019B960494DF}">
-                <a14:hiddenLine xmlns:a14="http://schemas.microsoft.com/office/drawing/2010/main" xmlns:p14="http://schemas.microsoft.com/office/powerpoint/2010/main" xmlns:a16="http://schemas.microsoft.com/office/drawing/2014/main" xmlns="" w="9525">
+                <a14:hiddenLine xmlns="" xmlns:a16="http://schemas.microsoft.com/office/drawing/2014/main" xmlns:p14="http://schemas.microsoft.com/office/powerpoint/2010/main" xmlns:a14="http://schemas.microsoft.com/office/drawing/2010/main" w="9525">
                   <a:solidFill>
                     <a:srgbClr val="000000"/>
                   </a:solidFill>
@@ -21616,7 +21617,7 @@
             </a:ln>
             <a:extLst>
               <a:ext uri="{91240B29-F687-4f45-9708-019B960494DF}">
-                <a14:hiddenLine xmlns:a14="http://schemas.microsoft.com/office/drawing/2010/main" xmlns:p14="http://schemas.microsoft.com/office/powerpoint/2010/main" xmlns:a16="http://schemas.microsoft.com/office/drawing/2014/main" xmlns="" w="9525">
+                <a14:hiddenLine xmlns="" xmlns:a16="http://schemas.microsoft.com/office/drawing/2014/main" xmlns:p14="http://schemas.microsoft.com/office/powerpoint/2010/main" xmlns:a14="http://schemas.microsoft.com/office/drawing/2010/main" w="9525">
                   <a:solidFill>
                     <a:srgbClr val="000000"/>
                   </a:solidFill>
@@ -21847,7 +21848,7 @@
             </a:ln>
             <a:extLst>
               <a:ext uri="{91240B29-F687-4f45-9708-019B960494DF}">
-                <a14:hiddenLine xmlns="" xmlns:a16="http://schemas.microsoft.com/office/drawing/2014/main" xmlns:p14="http://schemas.microsoft.com/office/powerpoint/2010/main" xmlns:dgm="http://schemas.openxmlformats.org/drawingml/2006/diagram" xmlns:a14="http://schemas.microsoft.com/office/drawing/2010/main" w="9525">
+                <a14:hiddenLine xmlns:a14="http://schemas.microsoft.com/office/drawing/2010/main" xmlns:dgm="http://schemas.openxmlformats.org/drawingml/2006/diagram" xmlns:p14="http://schemas.microsoft.com/office/powerpoint/2010/main" xmlns:a16="http://schemas.microsoft.com/office/drawing/2014/main" xmlns="" w="9525">
                   <a:solidFill>
                     <a:srgbClr val="000000"/>
                   </a:solidFill>
@@ -21959,7 +21960,7 @@
             </a:ln>
             <a:extLst>
               <a:ext uri="{91240B29-F687-4f45-9708-019B960494DF}">
-                <a14:hiddenLine xmlns="" xmlns:a16="http://schemas.microsoft.com/office/drawing/2014/main" xmlns:p14="http://schemas.microsoft.com/office/powerpoint/2010/main" xmlns:dgm="http://schemas.openxmlformats.org/drawingml/2006/diagram" xmlns:a14="http://schemas.microsoft.com/office/drawing/2010/main" w="9525">
+                <a14:hiddenLine xmlns:a14="http://schemas.microsoft.com/office/drawing/2010/main" xmlns:dgm="http://schemas.openxmlformats.org/drawingml/2006/diagram" xmlns:p14="http://schemas.microsoft.com/office/powerpoint/2010/main" xmlns:a16="http://schemas.microsoft.com/office/drawing/2014/main" xmlns="" w="9525">
                   <a:solidFill>
                     <a:srgbClr val="000000"/>
                   </a:solidFill>
@@ -22071,7 +22072,7 @@
             </a:ln>
             <a:extLst>
               <a:ext uri="{91240B29-F687-4f45-9708-019B960494DF}">
-                <a14:hiddenLine xmlns="" xmlns:a16="http://schemas.microsoft.com/office/drawing/2014/main" xmlns:p14="http://schemas.microsoft.com/office/powerpoint/2010/main" xmlns:dgm="http://schemas.openxmlformats.org/drawingml/2006/diagram" xmlns:a14="http://schemas.microsoft.com/office/drawing/2010/main" w="9525">
+                <a14:hiddenLine xmlns:a14="http://schemas.microsoft.com/office/drawing/2010/main" xmlns:dgm="http://schemas.openxmlformats.org/drawingml/2006/diagram" xmlns:p14="http://schemas.microsoft.com/office/powerpoint/2010/main" xmlns:a16="http://schemas.microsoft.com/office/drawing/2014/main" xmlns="" w="9525">
                   <a:solidFill>
                     <a:srgbClr val="000000"/>
                   </a:solidFill>
@@ -22155,7 +22156,7 @@
             </a:ln>
             <a:extLst>
               <a:ext uri="{91240B29-F687-4f45-9708-019B960494DF}">
-                <a14:hiddenLine xmlns="" xmlns:a16="http://schemas.microsoft.com/office/drawing/2014/main" xmlns:p14="http://schemas.microsoft.com/office/powerpoint/2010/main" xmlns:dgm="http://schemas.openxmlformats.org/drawingml/2006/diagram" xmlns:a14="http://schemas.microsoft.com/office/drawing/2010/main" w="9525">
+                <a14:hiddenLine xmlns:a14="http://schemas.microsoft.com/office/drawing/2010/main" xmlns:dgm="http://schemas.openxmlformats.org/drawingml/2006/diagram" xmlns:p14="http://schemas.microsoft.com/office/powerpoint/2010/main" xmlns:a16="http://schemas.microsoft.com/office/drawing/2014/main" xmlns="" w="9525">
                   <a:solidFill>
                     <a:srgbClr val="000000"/>
                   </a:solidFill>
@@ -22267,7 +22268,7 @@
             </a:ln>
             <a:extLst>
               <a:ext uri="{91240B29-F687-4f45-9708-019B960494DF}">
-                <a14:hiddenLine xmlns="" xmlns:a16="http://schemas.microsoft.com/office/drawing/2014/main" xmlns:p14="http://schemas.microsoft.com/office/powerpoint/2010/main" xmlns:dgm="http://schemas.openxmlformats.org/drawingml/2006/diagram" xmlns:a14="http://schemas.microsoft.com/office/drawing/2010/main" w="9525">
+                <a14:hiddenLine xmlns:a14="http://schemas.microsoft.com/office/drawing/2010/main" xmlns:dgm="http://schemas.openxmlformats.org/drawingml/2006/diagram" xmlns:p14="http://schemas.microsoft.com/office/powerpoint/2010/main" xmlns:a16="http://schemas.microsoft.com/office/drawing/2014/main" xmlns="" w="9525">
                   <a:solidFill>
                     <a:srgbClr val="000000"/>
                   </a:solidFill>
@@ -22351,7 +22352,7 @@
             </a:ln>
             <a:extLst>
               <a:ext uri="{91240B29-F687-4f45-9708-019B960494DF}">
-                <a14:hiddenLine xmlns="" xmlns:a16="http://schemas.microsoft.com/office/drawing/2014/main" xmlns:p14="http://schemas.microsoft.com/office/powerpoint/2010/main" xmlns:dgm="http://schemas.openxmlformats.org/drawingml/2006/diagram" xmlns:a14="http://schemas.microsoft.com/office/drawing/2010/main" w="9525">
+                <a14:hiddenLine xmlns:a14="http://schemas.microsoft.com/office/drawing/2010/main" xmlns:dgm="http://schemas.openxmlformats.org/drawingml/2006/diagram" xmlns:p14="http://schemas.microsoft.com/office/powerpoint/2010/main" xmlns:a16="http://schemas.microsoft.com/office/drawing/2014/main" xmlns="" w="9525">
                   <a:solidFill>
                     <a:srgbClr val="000000"/>
                   </a:solidFill>
@@ -22435,7 +22436,7 @@
             </a:ln>
             <a:extLst>
               <a:ext uri="{91240B29-F687-4f45-9708-019B960494DF}">
-                <a14:hiddenLine xmlns="" xmlns:a16="http://schemas.microsoft.com/office/drawing/2014/main" xmlns:p14="http://schemas.microsoft.com/office/powerpoint/2010/main" xmlns:dgm="http://schemas.openxmlformats.org/drawingml/2006/diagram" xmlns:a14="http://schemas.microsoft.com/office/drawing/2010/main" w="9525">
+                <a14:hiddenLine xmlns:a14="http://schemas.microsoft.com/office/drawing/2010/main" xmlns:dgm="http://schemas.openxmlformats.org/drawingml/2006/diagram" xmlns:p14="http://schemas.microsoft.com/office/powerpoint/2010/main" xmlns:a16="http://schemas.microsoft.com/office/drawing/2014/main" xmlns="" w="9525">
                   <a:solidFill>
                     <a:srgbClr val="000000"/>
                   </a:solidFill>
@@ -22547,7 +22548,7 @@
             </a:ln>
             <a:extLst>
               <a:ext uri="{91240B29-F687-4f45-9708-019B960494DF}">
-                <a14:hiddenLine xmlns="" xmlns:a16="http://schemas.microsoft.com/office/drawing/2014/main" xmlns:p14="http://schemas.microsoft.com/office/powerpoint/2010/main" xmlns:dgm="http://schemas.openxmlformats.org/drawingml/2006/diagram" xmlns:a14="http://schemas.microsoft.com/office/drawing/2010/main" w="9525">
+                <a14:hiddenLine xmlns:a14="http://schemas.microsoft.com/office/drawing/2010/main" xmlns:dgm="http://schemas.openxmlformats.org/drawingml/2006/diagram" xmlns:p14="http://schemas.microsoft.com/office/powerpoint/2010/main" xmlns:a16="http://schemas.microsoft.com/office/drawing/2014/main" xmlns="" w="9525">
                   <a:solidFill>
                     <a:srgbClr val="000000"/>
                   </a:solidFill>
@@ -22659,7 +22660,7 @@
             </a:ln>
             <a:extLst>
               <a:ext uri="{91240B29-F687-4f45-9708-019B960494DF}">
-                <a14:hiddenLine xmlns="" xmlns:a16="http://schemas.microsoft.com/office/drawing/2014/main" xmlns:p14="http://schemas.microsoft.com/office/powerpoint/2010/main" xmlns:dgm="http://schemas.openxmlformats.org/drawingml/2006/diagram" xmlns:a14="http://schemas.microsoft.com/office/drawing/2010/main" w="9525">
+                <a14:hiddenLine xmlns:a14="http://schemas.microsoft.com/office/drawing/2010/main" xmlns:dgm="http://schemas.openxmlformats.org/drawingml/2006/diagram" xmlns:p14="http://schemas.microsoft.com/office/powerpoint/2010/main" xmlns:a16="http://schemas.microsoft.com/office/drawing/2014/main" xmlns="" w="9525">
                   <a:solidFill>
                     <a:srgbClr val="000000"/>
                   </a:solidFill>
@@ -22743,7 +22744,7 @@
             </a:ln>
             <a:extLst>
               <a:ext uri="{91240B29-F687-4f45-9708-019B960494DF}">
-                <a14:hiddenLine xmlns="" xmlns:a16="http://schemas.microsoft.com/office/drawing/2014/main" xmlns:p14="http://schemas.microsoft.com/office/powerpoint/2010/main" xmlns:dgm="http://schemas.openxmlformats.org/drawingml/2006/diagram" xmlns:a14="http://schemas.microsoft.com/office/drawing/2010/main" w="9525">
+                <a14:hiddenLine xmlns:a14="http://schemas.microsoft.com/office/drawing/2010/main" xmlns:dgm="http://schemas.openxmlformats.org/drawingml/2006/diagram" xmlns:p14="http://schemas.microsoft.com/office/powerpoint/2010/main" xmlns:a16="http://schemas.microsoft.com/office/drawing/2014/main" xmlns="" w="9525">
                   <a:solidFill>
                     <a:srgbClr val="000000"/>
                   </a:solidFill>
@@ -22875,7 +22876,7 @@
             </a:ln>
             <a:extLst>
               <a:ext uri="{91240B29-F687-4f45-9708-019B960494DF}">
-                <a14:hiddenLine xmlns="" xmlns:a16="http://schemas.microsoft.com/office/drawing/2014/main" xmlns:p14="http://schemas.microsoft.com/office/powerpoint/2010/main" xmlns:dgm="http://schemas.openxmlformats.org/drawingml/2006/diagram" xmlns:a14="http://schemas.microsoft.com/office/drawing/2010/main" w="9525">
+                <a14:hiddenLine xmlns:a14="http://schemas.microsoft.com/office/drawing/2010/main" xmlns:dgm="http://schemas.openxmlformats.org/drawingml/2006/diagram" xmlns:p14="http://schemas.microsoft.com/office/powerpoint/2010/main" xmlns:a16="http://schemas.microsoft.com/office/drawing/2014/main" xmlns="" w="9525">
                   <a:solidFill>
                     <a:srgbClr val="000000"/>
                   </a:solidFill>
@@ -23003,7 +23004,7 @@
             </a:ln>
             <a:extLst>
               <a:ext uri="{91240B29-F687-4f45-9708-019B960494DF}">
-                <a14:hiddenLine xmlns="" xmlns:a16="http://schemas.microsoft.com/office/drawing/2014/main" xmlns:p14="http://schemas.microsoft.com/office/powerpoint/2010/main" xmlns:dgm="http://schemas.openxmlformats.org/drawingml/2006/diagram" xmlns:a14="http://schemas.microsoft.com/office/drawing/2010/main" w="9525">
+                <a14:hiddenLine xmlns:a14="http://schemas.microsoft.com/office/drawing/2010/main" xmlns:dgm="http://schemas.openxmlformats.org/drawingml/2006/diagram" xmlns:p14="http://schemas.microsoft.com/office/powerpoint/2010/main" xmlns:a16="http://schemas.microsoft.com/office/drawing/2014/main" xmlns="" w="9525">
                   <a:solidFill>
                     <a:srgbClr val="000000"/>
                   </a:solidFill>
@@ -23087,7 +23088,7 @@
             </a:ln>
             <a:extLst>
               <a:ext uri="{91240B29-F687-4f45-9708-019B960494DF}">
-                <a14:hiddenLine xmlns="" xmlns:a16="http://schemas.microsoft.com/office/drawing/2014/main" xmlns:p14="http://schemas.microsoft.com/office/powerpoint/2010/main" xmlns:dgm="http://schemas.openxmlformats.org/drawingml/2006/diagram" xmlns:a14="http://schemas.microsoft.com/office/drawing/2010/main" w="9525">
+                <a14:hiddenLine xmlns:a14="http://schemas.microsoft.com/office/drawing/2010/main" xmlns:dgm="http://schemas.openxmlformats.org/drawingml/2006/diagram" xmlns:p14="http://schemas.microsoft.com/office/powerpoint/2010/main" xmlns:a16="http://schemas.microsoft.com/office/drawing/2014/main" xmlns="" w="9525">
                   <a:solidFill>
                     <a:srgbClr val="000000"/>
                   </a:solidFill>
@@ -23171,7 +23172,7 @@
             </a:ln>
             <a:extLst>
               <a:ext uri="{91240B29-F687-4f45-9708-019B960494DF}">
-                <a14:hiddenLine xmlns="" xmlns:a16="http://schemas.microsoft.com/office/drawing/2014/main" xmlns:p14="http://schemas.microsoft.com/office/powerpoint/2010/main" xmlns:dgm="http://schemas.openxmlformats.org/drawingml/2006/diagram" xmlns:a14="http://schemas.microsoft.com/office/drawing/2010/main" w="9525">
+                <a14:hiddenLine xmlns:a14="http://schemas.microsoft.com/office/drawing/2010/main" xmlns:dgm="http://schemas.openxmlformats.org/drawingml/2006/diagram" xmlns:p14="http://schemas.microsoft.com/office/powerpoint/2010/main" xmlns:a16="http://schemas.microsoft.com/office/drawing/2014/main" xmlns="" w="9525">
                   <a:solidFill>
                     <a:srgbClr val="000000"/>
                   </a:solidFill>
@@ -23283,7 +23284,7 @@
             </a:ln>
             <a:extLst>
               <a:ext uri="{91240B29-F687-4f45-9708-019B960494DF}">
-                <a14:hiddenLine xmlns="" xmlns:a16="http://schemas.microsoft.com/office/drawing/2014/main" xmlns:p14="http://schemas.microsoft.com/office/powerpoint/2010/main" xmlns:dgm="http://schemas.openxmlformats.org/drawingml/2006/diagram" xmlns:a14="http://schemas.microsoft.com/office/drawing/2010/main" w="9525">
+                <a14:hiddenLine xmlns:a14="http://schemas.microsoft.com/office/drawing/2010/main" xmlns:dgm="http://schemas.openxmlformats.org/drawingml/2006/diagram" xmlns:p14="http://schemas.microsoft.com/office/powerpoint/2010/main" xmlns:a16="http://schemas.microsoft.com/office/drawing/2014/main" xmlns="" w="9525">
                   <a:solidFill>
                     <a:srgbClr val="000000"/>
                   </a:solidFill>
@@ -23339,7 +23340,7 @@
             </a:ln>
             <a:extLst>
               <a:ext uri="{91240B29-F687-4f45-9708-019B960494DF}">
-                <a14:hiddenLine xmlns="" xmlns:a16="http://schemas.microsoft.com/office/drawing/2014/main" xmlns:p14="http://schemas.microsoft.com/office/powerpoint/2010/main" xmlns:dgm="http://schemas.openxmlformats.org/drawingml/2006/diagram" xmlns:a14="http://schemas.microsoft.com/office/drawing/2010/main" w="9525">
+                <a14:hiddenLine xmlns:a14="http://schemas.microsoft.com/office/drawing/2010/main" xmlns:dgm="http://schemas.openxmlformats.org/drawingml/2006/diagram" xmlns:p14="http://schemas.microsoft.com/office/powerpoint/2010/main" xmlns:a16="http://schemas.microsoft.com/office/drawing/2014/main" xmlns="" w="9525">
                   <a:solidFill>
                     <a:srgbClr val="000000"/>
                   </a:solidFill>
@@ -23426,7 +23427,7 @@
             </a:ln>
             <a:extLst>
               <a:ext uri="{91240B29-F687-4f45-9708-019B960494DF}">
-                <a14:hiddenLine xmlns="" xmlns:a16="http://schemas.microsoft.com/office/drawing/2014/main" xmlns:p14="http://schemas.microsoft.com/office/powerpoint/2010/main" xmlns:dgm="http://schemas.openxmlformats.org/drawingml/2006/diagram" xmlns:a14="http://schemas.microsoft.com/office/drawing/2010/main" w="9525">
+                <a14:hiddenLine xmlns:a14="http://schemas.microsoft.com/office/drawing/2010/main" xmlns:dgm="http://schemas.openxmlformats.org/drawingml/2006/diagram" xmlns:p14="http://schemas.microsoft.com/office/powerpoint/2010/main" xmlns:a16="http://schemas.microsoft.com/office/drawing/2014/main" xmlns="" w="9525">
                   <a:solidFill>
                     <a:srgbClr val="000000"/>
                   </a:solidFill>
@@ -23538,7 +23539,7 @@
             </a:ln>
             <a:extLst>
               <a:ext uri="{91240B29-F687-4f45-9708-019B960494DF}">
-                <a14:hiddenLine xmlns="" xmlns:a16="http://schemas.microsoft.com/office/drawing/2014/main" xmlns:p14="http://schemas.microsoft.com/office/powerpoint/2010/main" xmlns:dgm="http://schemas.openxmlformats.org/drawingml/2006/diagram" xmlns:a14="http://schemas.microsoft.com/office/drawing/2010/main" w="9525">
+                <a14:hiddenLine xmlns:a14="http://schemas.microsoft.com/office/drawing/2010/main" xmlns:dgm="http://schemas.openxmlformats.org/drawingml/2006/diagram" xmlns:p14="http://schemas.microsoft.com/office/powerpoint/2010/main" xmlns:a16="http://schemas.microsoft.com/office/drawing/2014/main" xmlns="" w="9525">
                   <a:solidFill>
                     <a:srgbClr val="000000"/>
                   </a:solidFill>
@@ -23622,7 +23623,7 @@
             </a:ln>
             <a:extLst>
               <a:ext uri="{91240B29-F687-4f45-9708-019B960494DF}">
-                <a14:hiddenLine xmlns="" xmlns:a16="http://schemas.microsoft.com/office/drawing/2014/main" xmlns:p14="http://schemas.microsoft.com/office/powerpoint/2010/main" xmlns:dgm="http://schemas.openxmlformats.org/drawingml/2006/diagram" xmlns:a14="http://schemas.microsoft.com/office/drawing/2010/main" w="9525">
+                <a14:hiddenLine xmlns:a14="http://schemas.microsoft.com/office/drawing/2010/main" xmlns:dgm="http://schemas.openxmlformats.org/drawingml/2006/diagram" xmlns:p14="http://schemas.microsoft.com/office/powerpoint/2010/main" xmlns:a16="http://schemas.microsoft.com/office/drawing/2014/main" xmlns="" w="9525">
                   <a:solidFill>
                     <a:srgbClr val="000000"/>
                   </a:solidFill>
@@ -23734,7 +23735,7 @@
             </a:ln>
             <a:extLst>
               <a:ext uri="{91240B29-F687-4f45-9708-019B960494DF}">
-                <a14:hiddenLine xmlns="" xmlns:a16="http://schemas.microsoft.com/office/drawing/2014/main" xmlns:p14="http://schemas.microsoft.com/office/powerpoint/2010/main" xmlns:dgm="http://schemas.openxmlformats.org/drawingml/2006/diagram" xmlns:a14="http://schemas.microsoft.com/office/drawing/2010/main" w="9525">
+                <a14:hiddenLine xmlns:a14="http://schemas.microsoft.com/office/drawing/2010/main" xmlns:dgm="http://schemas.openxmlformats.org/drawingml/2006/diagram" xmlns:p14="http://schemas.microsoft.com/office/powerpoint/2010/main" xmlns:a16="http://schemas.microsoft.com/office/drawing/2014/main" xmlns="" w="9525">
                   <a:solidFill>
                     <a:srgbClr val="000000"/>
                   </a:solidFill>
@@ -23821,7 +23822,7 @@
             </a:ln>
             <a:extLst>
               <a:ext uri="{91240B29-F687-4f45-9708-019B960494DF}">
-                <a14:hiddenLine xmlns="" xmlns:a16="http://schemas.microsoft.com/office/drawing/2014/main" xmlns:p14="http://schemas.microsoft.com/office/powerpoint/2010/main" xmlns:dgm="http://schemas.openxmlformats.org/drawingml/2006/diagram" xmlns:a14="http://schemas.microsoft.com/office/drawing/2010/main" w="9525">
+                <a14:hiddenLine xmlns:a14="http://schemas.microsoft.com/office/drawing/2010/main" xmlns:dgm="http://schemas.openxmlformats.org/drawingml/2006/diagram" xmlns:p14="http://schemas.microsoft.com/office/powerpoint/2010/main" xmlns:a16="http://schemas.microsoft.com/office/drawing/2014/main" xmlns="" w="9525">
                   <a:solidFill>
                     <a:srgbClr val="000000"/>
                   </a:solidFill>
@@ -23905,7 +23906,7 @@
             </a:ln>
             <a:extLst>
               <a:ext uri="{91240B29-F687-4f45-9708-019B960494DF}">
-                <a14:hiddenLine xmlns="" xmlns:a16="http://schemas.microsoft.com/office/drawing/2014/main" xmlns:p14="http://schemas.microsoft.com/office/powerpoint/2010/main" xmlns:dgm="http://schemas.openxmlformats.org/drawingml/2006/diagram" xmlns:a14="http://schemas.microsoft.com/office/drawing/2010/main" w="9525">
+                <a14:hiddenLine xmlns:a14="http://schemas.microsoft.com/office/drawing/2010/main" xmlns:dgm="http://schemas.openxmlformats.org/drawingml/2006/diagram" xmlns:p14="http://schemas.microsoft.com/office/powerpoint/2010/main" xmlns:a16="http://schemas.microsoft.com/office/drawing/2014/main" xmlns="" w="9525">
                   <a:solidFill>
                     <a:srgbClr val="000000"/>
                   </a:solidFill>
@@ -24017,7 +24018,7 @@
             </a:ln>
             <a:extLst>
               <a:ext uri="{91240B29-F687-4f45-9708-019B960494DF}">
-                <a14:hiddenLine xmlns="" xmlns:a16="http://schemas.microsoft.com/office/drawing/2014/main" xmlns:p14="http://schemas.microsoft.com/office/powerpoint/2010/main" xmlns:dgm="http://schemas.openxmlformats.org/drawingml/2006/diagram" xmlns:a14="http://schemas.microsoft.com/office/drawing/2010/main" w="9525">
+                <a14:hiddenLine xmlns:a14="http://schemas.microsoft.com/office/drawing/2010/main" xmlns:dgm="http://schemas.openxmlformats.org/drawingml/2006/diagram" xmlns:p14="http://schemas.microsoft.com/office/powerpoint/2010/main" xmlns:a16="http://schemas.microsoft.com/office/drawing/2014/main" xmlns="" w="9525">
                   <a:solidFill>
                     <a:srgbClr val="000000"/>
                   </a:solidFill>
@@ -24129,7 +24130,7 @@
             </a:ln>
             <a:extLst>
               <a:ext uri="{91240B29-F687-4f45-9708-019B960494DF}">
-                <a14:hiddenLine xmlns="" xmlns:a16="http://schemas.microsoft.com/office/drawing/2014/main" xmlns:p14="http://schemas.microsoft.com/office/powerpoint/2010/main" xmlns:dgm="http://schemas.openxmlformats.org/drawingml/2006/diagram" xmlns:a14="http://schemas.microsoft.com/office/drawing/2010/main" w="9525">
+                <a14:hiddenLine xmlns:a14="http://schemas.microsoft.com/office/drawing/2010/main" xmlns:dgm="http://schemas.openxmlformats.org/drawingml/2006/diagram" xmlns:p14="http://schemas.microsoft.com/office/powerpoint/2010/main" xmlns:a16="http://schemas.microsoft.com/office/drawing/2014/main" xmlns="" w="9525">
                   <a:solidFill>
                     <a:srgbClr val="000000"/>
                   </a:solidFill>
@@ -24216,7 +24217,7 @@
             </a:ln>
             <a:extLst>
               <a:ext uri="{91240B29-F687-4f45-9708-019B960494DF}">
-                <a14:hiddenLine xmlns="" xmlns:a16="http://schemas.microsoft.com/office/drawing/2014/main" xmlns:p14="http://schemas.microsoft.com/office/powerpoint/2010/main" xmlns:dgm="http://schemas.openxmlformats.org/drawingml/2006/diagram" xmlns:a14="http://schemas.microsoft.com/office/drawing/2010/main" w="9525">
+                <a14:hiddenLine xmlns:a14="http://schemas.microsoft.com/office/drawing/2010/main" xmlns:dgm="http://schemas.openxmlformats.org/drawingml/2006/diagram" xmlns:p14="http://schemas.microsoft.com/office/powerpoint/2010/main" xmlns:a16="http://schemas.microsoft.com/office/drawing/2014/main" xmlns="" w="9525">
                   <a:solidFill>
                     <a:srgbClr val="000000"/>
                   </a:solidFill>
@@ -24358,7 +24359,7 @@
             </a:ln>
             <a:extLst>
               <a:ext uri="{91240B29-F687-4f45-9708-019B960494DF}">
-                <a14:hiddenLine xmlns="" xmlns:a16="http://schemas.microsoft.com/office/drawing/2014/main" xmlns:p14="http://schemas.microsoft.com/office/powerpoint/2010/main" xmlns:dgm="http://schemas.openxmlformats.org/drawingml/2006/diagram" xmlns:a14="http://schemas.microsoft.com/office/drawing/2010/main" w="9525">
+                <a14:hiddenLine xmlns:a14="http://schemas.microsoft.com/office/drawing/2010/main" xmlns:dgm="http://schemas.openxmlformats.org/drawingml/2006/diagram" xmlns:p14="http://schemas.microsoft.com/office/powerpoint/2010/main" xmlns:a16="http://schemas.microsoft.com/office/drawing/2014/main" xmlns="" w="9525">
                   <a:solidFill>
                     <a:srgbClr val="000000"/>
                   </a:solidFill>
@@ -24424,7 +24425,7 @@
           </a:prstGeom>
           <a:extLst>
             <a:ext uri="{909E8E84-426E-40dd-AFC4-6F175D3DCCD1}">
-              <a14:hiddenFill xmlns="" xmlns:a16="http://schemas.microsoft.com/office/drawing/2014/main" xmlns:p14="http://schemas.microsoft.com/office/powerpoint/2010/main" xmlns:dgm="http://schemas.openxmlformats.org/drawingml/2006/diagram" xmlns:a14="http://schemas.microsoft.com/office/drawing/2010/main">
+              <a14:hiddenFill xmlns:a14="http://schemas.microsoft.com/office/drawing/2010/main" xmlns:dgm="http://schemas.openxmlformats.org/drawingml/2006/diagram" xmlns:p14="http://schemas.microsoft.com/office/powerpoint/2010/main" xmlns:a16="http://schemas.microsoft.com/office/drawing/2014/main" xmlns="">
                 <a:solidFill>
                   <a:srgbClr val="FFFFFF"/>
                 </a:solidFill>
@@ -24583,7 +24584,7 @@
             </a:ln>
             <a:extLst>
               <a:ext uri="{91240B29-F687-4f45-9708-019B960494DF}">
-                <a14:hiddenLine xmlns="" xmlns:a16="http://schemas.microsoft.com/office/drawing/2014/main" xmlns:p14="http://schemas.microsoft.com/office/powerpoint/2010/main" xmlns:dgm="http://schemas.openxmlformats.org/drawingml/2006/diagram" xmlns:a14="http://schemas.microsoft.com/office/drawing/2010/main" w="9525">
+                <a14:hiddenLine xmlns:a14="http://schemas.microsoft.com/office/drawing/2010/main" xmlns:dgm="http://schemas.openxmlformats.org/drawingml/2006/diagram" xmlns:p14="http://schemas.microsoft.com/office/powerpoint/2010/main" xmlns:a16="http://schemas.microsoft.com/office/drawing/2014/main" xmlns="" w="9525">
                   <a:solidFill>
                     <a:srgbClr val="000000"/>
                   </a:solidFill>
@@ -24695,7 +24696,7 @@
             </a:ln>
             <a:extLst>
               <a:ext uri="{91240B29-F687-4f45-9708-019B960494DF}">
-                <a14:hiddenLine xmlns="" xmlns:a16="http://schemas.microsoft.com/office/drawing/2014/main" xmlns:p14="http://schemas.microsoft.com/office/powerpoint/2010/main" xmlns:dgm="http://schemas.openxmlformats.org/drawingml/2006/diagram" xmlns:a14="http://schemas.microsoft.com/office/drawing/2010/main" w="9525">
+                <a14:hiddenLine xmlns:a14="http://schemas.microsoft.com/office/drawing/2010/main" xmlns:dgm="http://schemas.openxmlformats.org/drawingml/2006/diagram" xmlns:p14="http://schemas.microsoft.com/office/powerpoint/2010/main" xmlns:a16="http://schemas.microsoft.com/office/drawing/2014/main" xmlns="" w="9525">
                   <a:solidFill>
                     <a:srgbClr val="000000"/>
                   </a:solidFill>
@@ -24807,7 +24808,7 @@
             </a:ln>
             <a:extLst>
               <a:ext uri="{91240B29-F687-4f45-9708-019B960494DF}">
-                <a14:hiddenLine xmlns="" xmlns:a16="http://schemas.microsoft.com/office/drawing/2014/main" xmlns:p14="http://schemas.microsoft.com/office/powerpoint/2010/main" xmlns:dgm="http://schemas.openxmlformats.org/drawingml/2006/diagram" xmlns:a14="http://schemas.microsoft.com/office/drawing/2010/main" w="9525">
+                <a14:hiddenLine xmlns:a14="http://schemas.microsoft.com/office/drawing/2010/main" xmlns:dgm="http://schemas.openxmlformats.org/drawingml/2006/diagram" xmlns:p14="http://schemas.microsoft.com/office/powerpoint/2010/main" xmlns:a16="http://schemas.microsoft.com/office/drawing/2014/main" xmlns="" w="9525">
                   <a:solidFill>
                     <a:srgbClr val="000000"/>
                   </a:solidFill>
@@ -24891,7 +24892,7 @@
             </a:ln>
             <a:extLst>
               <a:ext uri="{91240B29-F687-4f45-9708-019B960494DF}">
-                <a14:hiddenLine xmlns="" xmlns:a16="http://schemas.microsoft.com/office/drawing/2014/main" xmlns:p14="http://schemas.microsoft.com/office/powerpoint/2010/main" xmlns:dgm="http://schemas.openxmlformats.org/drawingml/2006/diagram" xmlns:a14="http://schemas.microsoft.com/office/drawing/2010/main" w="9525">
+                <a14:hiddenLine xmlns:a14="http://schemas.microsoft.com/office/drawing/2010/main" xmlns:dgm="http://schemas.openxmlformats.org/drawingml/2006/diagram" xmlns:p14="http://schemas.microsoft.com/office/powerpoint/2010/main" xmlns:a16="http://schemas.microsoft.com/office/drawing/2014/main" xmlns="" w="9525">
                   <a:solidFill>
                     <a:srgbClr val="000000"/>
                   </a:solidFill>
@@ -25003,7 +25004,7 @@
             </a:ln>
             <a:extLst>
               <a:ext uri="{91240B29-F687-4f45-9708-019B960494DF}">
-                <a14:hiddenLine xmlns="" xmlns:a16="http://schemas.microsoft.com/office/drawing/2014/main" xmlns:p14="http://schemas.microsoft.com/office/powerpoint/2010/main" xmlns:dgm="http://schemas.openxmlformats.org/drawingml/2006/diagram" xmlns:a14="http://schemas.microsoft.com/office/drawing/2010/main" w="9525">
+                <a14:hiddenLine xmlns:a14="http://schemas.microsoft.com/office/drawing/2010/main" xmlns:dgm="http://schemas.openxmlformats.org/drawingml/2006/diagram" xmlns:p14="http://schemas.microsoft.com/office/powerpoint/2010/main" xmlns:a16="http://schemas.microsoft.com/office/drawing/2014/main" xmlns="" w="9525">
                   <a:solidFill>
                     <a:srgbClr val="000000"/>
                   </a:solidFill>
@@ -25087,7 +25088,7 @@
             </a:ln>
             <a:extLst>
               <a:ext uri="{91240B29-F687-4f45-9708-019B960494DF}">
-                <a14:hiddenLine xmlns="" xmlns:a16="http://schemas.microsoft.com/office/drawing/2014/main" xmlns:p14="http://schemas.microsoft.com/office/powerpoint/2010/main" xmlns:dgm="http://schemas.openxmlformats.org/drawingml/2006/diagram" xmlns:a14="http://schemas.microsoft.com/office/drawing/2010/main" w="9525">
+                <a14:hiddenLine xmlns:a14="http://schemas.microsoft.com/office/drawing/2010/main" xmlns:dgm="http://schemas.openxmlformats.org/drawingml/2006/diagram" xmlns:p14="http://schemas.microsoft.com/office/powerpoint/2010/main" xmlns:a16="http://schemas.microsoft.com/office/drawing/2014/main" xmlns="" w="9525">
                   <a:solidFill>
                     <a:srgbClr val="000000"/>
                   </a:solidFill>
@@ -25171,7 +25172,7 @@
             </a:ln>
             <a:extLst>
               <a:ext uri="{91240B29-F687-4f45-9708-019B960494DF}">
-                <a14:hiddenLine xmlns="" xmlns:a16="http://schemas.microsoft.com/office/drawing/2014/main" xmlns:p14="http://schemas.microsoft.com/office/powerpoint/2010/main" xmlns:dgm="http://schemas.openxmlformats.org/drawingml/2006/diagram" xmlns:a14="http://schemas.microsoft.com/office/drawing/2010/main" w="9525">
+                <a14:hiddenLine xmlns:a14="http://schemas.microsoft.com/office/drawing/2010/main" xmlns:dgm="http://schemas.openxmlformats.org/drawingml/2006/diagram" xmlns:p14="http://schemas.microsoft.com/office/powerpoint/2010/main" xmlns:a16="http://schemas.microsoft.com/office/drawing/2014/main" xmlns="" w="9525">
                   <a:solidFill>
                     <a:srgbClr val="000000"/>
                   </a:solidFill>
@@ -25283,7 +25284,7 @@
             </a:ln>
             <a:extLst>
               <a:ext uri="{91240B29-F687-4f45-9708-019B960494DF}">
-                <a14:hiddenLine xmlns="" xmlns:a16="http://schemas.microsoft.com/office/drawing/2014/main" xmlns:p14="http://schemas.microsoft.com/office/powerpoint/2010/main" xmlns:dgm="http://schemas.openxmlformats.org/drawingml/2006/diagram" xmlns:a14="http://schemas.microsoft.com/office/drawing/2010/main" w="9525">
+                <a14:hiddenLine xmlns:a14="http://schemas.microsoft.com/office/drawing/2010/main" xmlns:dgm="http://schemas.openxmlformats.org/drawingml/2006/diagram" xmlns:p14="http://schemas.microsoft.com/office/powerpoint/2010/main" xmlns:a16="http://schemas.microsoft.com/office/drawing/2014/main" xmlns="" w="9525">
                   <a:solidFill>
                     <a:srgbClr val="000000"/>
                   </a:solidFill>
@@ -25395,7 +25396,7 @@
             </a:ln>
             <a:extLst>
               <a:ext uri="{91240B29-F687-4f45-9708-019B960494DF}">
-                <a14:hiddenLine xmlns="" xmlns:a16="http://schemas.microsoft.com/office/drawing/2014/main" xmlns:p14="http://schemas.microsoft.com/office/powerpoint/2010/main" xmlns:dgm="http://schemas.openxmlformats.org/drawingml/2006/diagram" xmlns:a14="http://schemas.microsoft.com/office/drawing/2010/main" w="9525">
+                <a14:hiddenLine xmlns:a14="http://schemas.microsoft.com/office/drawing/2010/main" xmlns:dgm="http://schemas.openxmlformats.org/drawingml/2006/diagram" xmlns:p14="http://schemas.microsoft.com/office/powerpoint/2010/main" xmlns:a16="http://schemas.microsoft.com/office/drawing/2014/main" xmlns="" w="9525">
                   <a:solidFill>
                     <a:srgbClr val="000000"/>
                   </a:solidFill>
@@ -25479,7 +25480,7 @@
             </a:ln>
             <a:extLst>
               <a:ext uri="{91240B29-F687-4f45-9708-019B960494DF}">
-                <a14:hiddenLine xmlns="" xmlns:a16="http://schemas.microsoft.com/office/drawing/2014/main" xmlns:p14="http://schemas.microsoft.com/office/powerpoint/2010/main" xmlns:dgm="http://schemas.openxmlformats.org/drawingml/2006/diagram" xmlns:a14="http://schemas.microsoft.com/office/drawing/2010/main" w="9525">
+                <a14:hiddenLine xmlns:a14="http://schemas.microsoft.com/office/drawing/2010/main" xmlns:dgm="http://schemas.openxmlformats.org/drawingml/2006/diagram" xmlns:p14="http://schemas.microsoft.com/office/powerpoint/2010/main" xmlns:a16="http://schemas.microsoft.com/office/drawing/2014/main" xmlns="" w="9525">
                   <a:solidFill>
                     <a:srgbClr val="000000"/>
                   </a:solidFill>
@@ -25611,7 +25612,7 @@
             </a:ln>
             <a:extLst>
               <a:ext uri="{91240B29-F687-4f45-9708-019B960494DF}">
-                <a14:hiddenLine xmlns="" xmlns:a16="http://schemas.microsoft.com/office/drawing/2014/main" xmlns:p14="http://schemas.microsoft.com/office/powerpoint/2010/main" xmlns:dgm="http://schemas.openxmlformats.org/drawingml/2006/diagram" xmlns:a14="http://schemas.microsoft.com/office/drawing/2010/main" w="9525">
+                <a14:hiddenLine xmlns:a14="http://schemas.microsoft.com/office/drawing/2010/main" xmlns:dgm="http://schemas.openxmlformats.org/drawingml/2006/diagram" xmlns:p14="http://schemas.microsoft.com/office/powerpoint/2010/main" xmlns:a16="http://schemas.microsoft.com/office/drawing/2014/main" xmlns="" w="9525">
                   <a:solidFill>
                     <a:srgbClr val="000000"/>
                   </a:solidFill>
@@ -25739,7 +25740,7 @@
             </a:ln>
             <a:extLst>
               <a:ext uri="{91240B29-F687-4f45-9708-019B960494DF}">
-                <a14:hiddenLine xmlns="" xmlns:a16="http://schemas.microsoft.com/office/drawing/2014/main" xmlns:p14="http://schemas.microsoft.com/office/powerpoint/2010/main" xmlns:dgm="http://schemas.openxmlformats.org/drawingml/2006/diagram" xmlns:a14="http://schemas.microsoft.com/office/drawing/2010/main" w="9525">
+                <a14:hiddenLine xmlns:a14="http://schemas.microsoft.com/office/drawing/2010/main" xmlns:dgm="http://schemas.openxmlformats.org/drawingml/2006/diagram" xmlns:p14="http://schemas.microsoft.com/office/powerpoint/2010/main" xmlns:a16="http://schemas.microsoft.com/office/drawing/2014/main" xmlns="" w="9525">
                   <a:solidFill>
                     <a:srgbClr val="000000"/>
                   </a:solidFill>
@@ -25823,7 +25824,7 @@
             </a:ln>
             <a:extLst>
               <a:ext uri="{91240B29-F687-4f45-9708-019B960494DF}">
-                <a14:hiddenLine xmlns="" xmlns:a16="http://schemas.microsoft.com/office/drawing/2014/main" xmlns:p14="http://schemas.microsoft.com/office/powerpoint/2010/main" xmlns:dgm="http://schemas.openxmlformats.org/drawingml/2006/diagram" xmlns:a14="http://schemas.microsoft.com/office/drawing/2010/main" w="9525">
+                <a14:hiddenLine xmlns:a14="http://schemas.microsoft.com/office/drawing/2010/main" xmlns:dgm="http://schemas.openxmlformats.org/drawingml/2006/diagram" xmlns:p14="http://schemas.microsoft.com/office/powerpoint/2010/main" xmlns:a16="http://schemas.microsoft.com/office/drawing/2014/main" xmlns="" w="9525">
                   <a:solidFill>
                     <a:srgbClr val="000000"/>
                   </a:solidFill>
@@ -25907,7 +25908,7 @@
             </a:ln>
             <a:extLst>
               <a:ext uri="{91240B29-F687-4f45-9708-019B960494DF}">
-                <a14:hiddenLine xmlns="" xmlns:a16="http://schemas.microsoft.com/office/drawing/2014/main" xmlns:p14="http://schemas.microsoft.com/office/powerpoint/2010/main" xmlns:dgm="http://schemas.openxmlformats.org/drawingml/2006/diagram" xmlns:a14="http://schemas.microsoft.com/office/drawing/2010/main" w="9525">
+                <a14:hiddenLine xmlns:a14="http://schemas.microsoft.com/office/drawing/2010/main" xmlns:dgm="http://schemas.openxmlformats.org/drawingml/2006/diagram" xmlns:p14="http://schemas.microsoft.com/office/powerpoint/2010/main" xmlns:a16="http://schemas.microsoft.com/office/drawing/2014/main" xmlns="" w="9525">
                   <a:solidFill>
                     <a:srgbClr val="000000"/>
                   </a:solidFill>
@@ -26019,7 +26020,7 @@
             </a:ln>
             <a:extLst>
               <a:ext uri="{91240B29-F687-4f45-9708-019B960494DF}">
-                <a14:hiddenLine xmlns="" xmlns:a16="http://schemas.microsoft.com/office/drawing/2014/main" xmlns:p14="http://schemas.microsoft.com/office/powerpoint/2010/main" xmlns:dgm="http://schemas.openxmlformats.org/drawingml/2006/diagram" xmlns:a14="http://schemas.microsoft.com/office/drawing/2010/main" w="9525">
+                <a14:hiddenLine xmlns:a14="http://schemas.microsoft.com/office/drawing/2010/main" xmlns:dgm="http://schemas.openxmlformats.org/drawingml/2006/diagram" xmlns:p14="http://schemas.microsoft.com/office/powerpoint/2010/main" xmlns:a16="http://schemas.microsoft.com/office/drawing/2014/main" xmlns="" w="9525">
                   <a:solidFill>
                     <a:srgbClr val="000000"/>
                   </a:solidFill>
@@ -26075,7 +26076,7 @@
             </a:ln>
             <a:extLst>
               <a:ext uri="{91240B29-F687-4f45-9708-019B960494DF}">
-                <a14:hiddenLine xmlns="" xmlns:a16="http://schemas.microsoft.com/office/drawing/2014/main" xmlns:p14="http://schemas.microsoft.com/office/powerpoint/2010/main" xmlns:dgm="http://schemas.openxmlformats.org/drawingml/2006/diagram" xmlns:a14="http://schemas.microsoft.com/office/drawing/2010/main" w="9525">
+                <a14:hiddenLine xmlns:a14="http://schemas.microsoft.com/office/drawing/2010/main" xmlns:dgm="http://schemas.openxmlformats.org/drawingml/2006/diagram" xmlns:p14="http://schemas.microsoft.com/office/powerpoint/2010/main" xmlns:a16="http://schemas.microsoft.com/office/drawing/2014/main" xmlns="" w="9525">
                   <a:solidFill>
                     <a:srgbClr val="000000"/>
                   </a:solidFill>
@@ -26162,7 +26163,7 @@
             </a:ln>
             <a:extLst>
               <a:ext uri="{91240B29-F687-4f45-9708-019B960494DF}">
-                <a14:hiddenLine xmlns="" xmlns:a16="http://schemas.microsoft.com/office/drawing/2014/main" xmlns:p14="http://schemas.microsoft.com/office/powerpoint/2010/main" xmlns:dgm="http://schemas.openxmlformats.org/drawingml/2006/diagram" xmlns:a14="http://schemas.microsoft.com/office/drawing/2010/main" w="9525">
+                <a14:hiddenLine xmlns:a14="http://schemas.microsoft.com/office/drawing/2010/main" xmlns:dgm="http://schemas.openxmlformats.org/drawingml/2006/diagram" xmlns:p14="http://schemas.microsoft.com/office/powerpoint/2010/main" xmlns:a16="http://schemas.microsoft.com/office/drawing/2014/main" xmlns="" w="9525">
                   <a:solidFill>
                     <a:srgbClr val="000000"/>
                   </a:solidFill>
@@ -26274,7 +26275,7 @@
             </a:ln>
             <a:extLst>
               <a:ext uri="{91240B29-F687-4f45-9708-019B960494DF}">
-                <a14:hiddenLine xmlns="" xmlns:a16="http://schemas.microsoft.com/office/drawing/2014/main" xmlns:p14="http://schemas.microsoft.com/office/powerpoint/2010/main" xmlns:dgm="http://schemas.openxmlformats.org/drawingml/2006/diagram" xmlns:a14="http://schemas.microsoft.com/office/drawing/2010/main" w="9525">
+                <a14:hiddenLine xmlns:a14="http://schemas.microsoft.com/office/drawing/2010/main" xmlns:dgm="http://schemas.openxmlformats.org/drawingml/2006/diagram" xmlns:p14="http://schemas.microsoft.com/office/powerpoint/2010/main" xmlns:a16="http://schemas.microsoft.com/office/drawing/2014/main" xmlns="" w="9525">
                   <a:solidFill>
                     <a:srgbClr val="000000"/>
                   </a:solidFill>
@@ -26358,7 +26359,7 @@
             </a:ln>
             <a:extLst>
               <a:ext uri="{91240B29-F687-4f45-9708-019B960494DF}">
-                <a14:hiddenLine xmlns="" xmlns:a16="http://schemas.microsoft.com/office/drawing/2014/main" xmlns:p14="http://schemas.microsoft.com/office/powerpoint/2010/main" xmlns:dgm="http://schemas.openxmlformats.org/drawingml/2006/diagram" xmlns:a14="http://schemas.microsoft.com/office/drawing/2010/main" w="9525">
+                <a14:hiddenLine xmlns:a14="http://schemas.microsoft.com/office/drawing/2010/main" xmlns:dgm="http://schemas.openxmlformats.org/drawingml/2006/diagram" xmlns:p14="http://schemas.microsoft.com/office/powerpoint/2010/main" xmlns:a16="http://schemas.microsoft.com/office/drawing/2014/main" xmlns="" w="9525">
                   <a:solidFill>
                     <a:srgbClr val="000000"/>
                   </a:solidFill>
@@ -26470,7 +26471,7 @@
             </a:ln>
             <a:extLst>
               <a:ext uri="{91240B29-F687-4f45-9708-019B960494DF}">
-                <a14:hiddenLine xmlns="" xmlns:a16="http://schemas.microsoft.com/office/drawing/2014/main" xmlns:p14="http://schemas.microsoft.com/office/powerpoint/2010/main" xmlns:dgm="http://schemas.openxmlformats.org/drawingml/2006/diagram" xmlns:a14="http://schemas.microsoft.com/office/drawing/2010/main" w="9525">
+                <a14:hiddenLine xmlns:a14="http://schemas.microsoft.com/office/drawing/2010/main" xmlns:dgm="http://schemas.openxmlformats.org/drawingml/2006/diagram" xmlns:p14="http://schemas.microsoft.com/office/powerpoint/2010/main" xmlns:a16="http://schemas.microsoft.com/office/drawing/2014/main" xmlns="" w="9525">
                   <a:solidFill>
                     <a:srgbClr val="000000"/>
                   </a:solidFill>
@@ -26557,7 +26558,7 @@
             </a:ln>
             <a:extLst>
               <a:ext uri="{91240B29-F687-4f45-9708-019B960494DF}">
-                <a14:hiddenLine xmlns="" xmlns:a16="http://schemas.microsoft.com/office/drawing/2014/main" xmlns:p14="http://schemas.microsoft.com/office/powerpoint/2010/main" xmlns:dgm="http://schemas.openxmlformats.org/drawingml/2006/diagram" xmlns:a14="http://schemas.microsoft.com/office/drawing/2010/main" w="9525">
+                <a14:hiddenLine xmlns:a14="http://schemas.microsoft.com/office/drawing/2010/main" xmlns:dgm="http://schemas.openxmlformats.org/drawingml/2006/diagram" xmlns:p14="http://schemas.microsoft.com/office/powerpoint/2010/main" xmlns:a16="http://schemas.microsoft.com/office/drawing/2014/main" xmlns="" w="9525">
                   <a:solidFill>
                     <a:srgbClr val="000000"/>
                   </a:solidFill>
@@ -26641,7 +26642,7 @@
             </a:ln>
             <a:extLst>
               <a:ext uri="{91240B29-F687-4f45-9708-019B960494DF}">
-                <a14:hiddenLine xmlns="" xmlns:a16="http://schemas.microsoft.com/office/drawing/2014/main" xmlns:p14="http://schemas.microsoft.com/office/powerpoint/2010/main" xmlns:dgm="http://schemas.openxmlformats.org/drawingml/2006/diagram" xmlns:a14="http://schemas.microsoft.com/office/drawing/2010/main" w="9525">
+                <a14:hiddenLine xmlns:a14="http://schemas.microsoft.com/office/drawing/2010/main" xmlns:dgm="http://schemas.openxmlformats.org/drawingml/2006/diagram" xmlns:p14="http://schemas.microsoft.com/office/powerpoint/2010/main" xmlns:a16="http://schemas.microsoft.com/office/drawing/2014/main" xmlns="" w="9525">
                   <a:solidFill>
                     <a:srgbClr val="000000"/>
                   </a:solidFill>
@@ -26753,7 +26754,7 @@
             </a:ln>
             <a:extLst>
               <a:ext uri="{91240B29-F687-4f45-9708-019B960494DF}">
-                <a14:hiddenLine xmlns="" xmlns:a16="http://schemas.microsoft.com/office/drawing/2014/main" xmlns:p14="http://schemas.microsoft.com/office/powerpoint/2010/main" xmlns:dgm="http://schemas.openxmlformats.org/drawingml/2006/diagram" xmlns:a14="http://schemas.microsoft.com/office/drawing/2010/main" w="9525">
+                <a14:hiddenLine xmlns:a14="http://schemas.microsoft.com/office/drawing/2010/main" xmlns:dgm="http://schemas.openxmlformats.org/drawingml/2006/diagram" xmlns:p14="http://schemas.microsoft.com/office/powerpoint/2010/main" xmlns:a16="http://schemas.microsoft.com/office/drawing/2014/main" xmlns="" w="9525">
                   <a:solidFill>
                     <a:srgbClr val="000000"/>
                   </a:solidFill>
@@ -26865,7 +26866,7 @@
             </a:ln>
             <a:extLst>
               <a:ext uri="{91240B29-F687-4f45-9708-019B960494DF}">
-                <a14:hiddenLine xmlns="" xmlns:a16="http://schemas.microsoft.com/office/drawing/2014/main" xmlns:p14="http://schemas.microsoft.com/office/powerpoint/2010/main" xmlns:dgm="http://schemas.openxmlformats.org/drawingml/2006/diagram" xmlns:a14="http://schemas.microsoft.com/office/drawing/2010/main" w="9525">
+                <a14:hiddenLine xmlns:a14="http://schemas.microsoft.com/office/drawing/2010/main" xmlns:dgm="http://schemas.openxmlformats.org/drawingml/2006/diagram" xmlns:p14="http://schemas.microsoft.com/office/powerpoint/2010/main" xmlns:a16="http://schemas.microsoft.com/office/drawing/2014/main" xmlns="" w="9525">
                   <a:solidFill>
                     <a:srgbClr val="000000"/>
                   </a:solidFill>
@@ -26952,7 +26953,7 @@
             </a:ln>
             <a:extLst>
               <a:ext uri="{91240B29-F687-4f45-9708-019B960494DF}">
-                <a14:hiddenLine xmlns="" xmlns:a16="http://schemas.microsoft.com/office/drawing/2014/main" xmlns:p14="http://schemas.microsoft.com/office/powerpoint/2010/main" xmlns:dgm="http://schemas.openxmlformats.org/drawingml/2006/diagram" xmlns:a14="http://schemas.microsoft.com/office/drawing/2010/main" w="9525">
+                <a14:hiddenLine xmlns:a14="http://schemas.microsoft.com/office/drawing/2010/main" xmlns:dgm="http://schemas.openxmlformats.org/drawingml/2006/diagram" xmlns:p14="http://schemas.microsoft.com/office/powerpoint/2010/main" xmlns:a16="http://schemas.microsoft.com/office/drawing/2014/main" xmlns="" w="9525">
                   <a:solidFill>
                     <a:srgbClr val="000000"/>
                   </a:solidFill>
@@ -27094,7 +27095,7 @@
             </a:ln>
             <a:extLst>
               <a:ext uri="{91240B29-F687-4f45-9708-019B960494DF}">
-                <a14:hiddenLine xmlns="" xmlns:a16="http://schemas.microsoft.com/office/drawing/2014/main" xmlns:p14="http://schemas.microsoft.com/office/powerpoint/2010/main" xmlns:dgm="http://schemas.openxmlformats.org/drawingml/2006/diagram" xmlns:a14="http://schemas.microsoft.com/office/drawing/2010/main" w="9525">
+                <a14:hiddenLine xmlns:a14="http://schemas.microsoft.com/office/drawing/2010/main" xmlns:dgm="http://schemas.openxmlformats.org/drawingml/2006/diagram" xmlns:p14="http://schemas.microsoft.com/office/powerpoint/2010/main" xmlns:a16="http://schemas.microsoft.com/office/drawing/2014/main" xmlns="" w="9525">
                   <a:solidFill>
                     <a:srgbClr val="000000"/>
                   </a:solidFill>
@@ -27162,7 +27163,7 @@
           <a:noFill/>
           <a:extLst>
             <a:ext uri="{909E8E84-426E-40dd-AFC4-6F175D3DCCD1}">
-              <a14:hiddenFill xmlns="" xmlns:a16="http://schemas.microsoft.com/office/drawing/2014/main" xmlns:p14="http://schemas.microsoft.com/office/powerpoint/2010/main" xmlns:dgm="http://schemas.openxmlformats.org/drawingml/2006/diagram" xmlns:a14="http://schemas.microsoft.com/office/drawing/2010/main">
+              <a14:hiddenFill xmlns:a14="http://schemas.microsoft.com/office/drawing/2010/main" xmlns:dgm="http://schemas.openxmlformats.org/drawingml/2006/diagram" xmlns:p14="http://schemas.microsoft.com/office/powerpoint/2010/main" xmlns:a16="http://schemas.microsoft.com/office/drawing/2014/main" xmlns="">
                 <a:solidFill>
                   <a:srgbClr val="FFFFFF"/>
                 </a:solidFill>
@@ -35070,6 +35071,694 @@
 </p:sld>
 </file>
 
+<file path=ppt/slides/slide18.xml><?xml version="1.0" encoding="utf-8"?>
+<p:sld xmlns:a="http://schemas.openxmlformats.org/drawingml/2006/main" xmlns:r="http://schemas.openxmlformats.org/officeDocument/2006/relationships" xmlns:p="http://schemas.openxmlformats.org/presentationml/2006/main">
+  <p:cSld>
+    <p:spTree>
+      <p:nvGrpSpPr>
+        <p:cNvPr id="1" name=""/>
+        <p:cNvGrpSpPr/>
+        <p:nvPr/>
+      </p:nvGrpSpPr>
+      <p:grpSpPr>
+        <a:xfrm>
+          <a:off x="0" y="0"/>
+          <a:ext cx="0" cy="0"/>
+          <a:chOff x="0" y="0"/>
+          <a:chExt cx="0" cy="0"/>
+        </a:xfrm>
+      </p:grpSpPr>
+      <p:sp>
+        <p:nvSpPr>
+          <p:cNvPr id="2" name="Titel 1">
+            <a:extLst>
+              <a:ext uri="{FF2B5EF4-FFF2-40B4-BE49-F238E27FC236}">
+                <a16:creationId xmlns:a16="http://schemas.microsoft.com/office/drawing/2014/main" id="{AD339E91-1CF0-83E6-78D8-00B6FBD2A79A}"/>
+              </a:ext>
+            </a:extLst>
+          </p:cNvPr>
+          <p:cNvSpPr>
+            <a:spLocks noGrp="1"/>
+          </p:cNvSpPr>
+          <p:nvPr>
+            <p:ph type="title"/>
+          </p:nvPr>
+        </p:nvSpPr>
+        <p:spPr/>
+        <p:txBody>
+          <a:bodyPr/>
+          <a:lstStyle/>
+          <a:p>
+            <a:r>
+              <a:rPr lang="de-DE" dirty="0">
+                <a:effectLst>
+                  <a:outerShdw blurRad="38100" dist="38100" dir="2700000" algn="tl">
+                    <a:srgbClr val="000000">
+                      <a:alpha val="43137"/>
+                    </a:srgbClr>
+                  </a:outerShdw>
+                </a:effectLst>
+              </a:rPr>
+              <a:t>Download GIT Repository</a:t>
+            </a:r>
+          </a:p>
+        </p:txBody>
+      </p:sp>
+      <p:sp>
+        <p:nvSpPr>
+          <p:cNvPr id="3" name="Inhaltsplatzhalter 2">
+            <a:extLst>
+              <a:ext uri="{FF2B5EF4-FFF2-40B4-BE49-F238E27FC236}">
+                <a16:creationId xmlns:a16="http://schemas.microsoft.com/office/drawing/2014/main" id="{ABC92036-1867-7DE0-8F00-3596AF05A6F6}"/>
+              </a:ext>
+            </a:extLst>
+          </p:cNvPr>
+          <p:cNvSpPr>
+            <a:spLocks noGrp="1"/>
+          </p:cNvSpPr>
+          <p:nvPr>
+            <p:ph idx="1"/>
+          </p:nvPr>
+        </p:nvSpPr>
+        <p:spPr>
+          <a:xfrm>
+            <a:off x="1141412" y="1847211"/>
+            <a:ext cx="9905999" cy="3943990"/>
+          </a:xfrm>
+        </p:spPr>
+        <p:txBody>
+          <a:bodyPr>
+            <a:normAutofit fontScale="85000" lnSpcReduction="10000"/>
+          </a:bodyPr>
+          <a:lstStyle/>
+          <a:p>
+            <a:r>
+              <a:rPr lang="de-DE" dirty="0">
+                <a:effectLst>
+                  <a:outerShdw blurRad="38100" dist="38100" dir="2700000" algn="tl">
+                    <a:srgbClr val="000000">
+                      <a:alpha val="43137"/>
+                    </a:srgbClr>
+                  </a:outerShdw>
+                </a:effectLst>
+              </a:rPr>
+              <a:t>GIT unter Folgendem Link herunterladen (Windows) </a:t>
+            </a:r>
+            <a:br>
+              <a:rPr lang="de-DE" dirty="0">
+                <a:effectLst>
+                  <a:outerShdw blurRad="38100" dist="38100" dir="2700000" algn="tl">
+                    <a:srgbClr val="000000">
+                      <a:alpha val="43137"/>
+                    </a:srgbClr>
+                  </a:outerShdw>
+                </a:effectLst>
+              </a:rPr>
+            </a:br>
+            <a:r>
+              <a:rPr lang="de-DE" dirty="0">
+                <a:effectLst>
+                  <a:outerShdw blurRad="38100" dist="38100" dir="2700000" algn="tl">
+                    <a:srgbClr val="000000">
+                      <a:alpha val="43137"/>
+                    </a:srgbClr>
+                  </a:outerShdw>
+                </a:effectLst>
+                <a:hlinkClick r:id="rId2">
+                  <a:extLst>
+                    <a:ext uri="{A12FA001-AC4F-418D-AE19-62706E023703}">
+                      <ahyp:hlinkClr xmlns:ahyp="http://schemas.microsoft.com/office/drawing/2018/hyperlinkcolor" val="tx"/>
+                    </a:ext>
+                  </a:extLst>
+                </a:hlinkClick>
+              </a:rPr>
+              <a:t>https://git-scm.com/install/windows</a:t>
+            </a:r>
+            <a:endParaRPr lang="de-DE" dirty="0">
+              <a:effectLst>
+                <a:outerShdw blurRad="38100" dist="38100" dir="2700000" algn="tl">
+                  <a:srgbClr val="000000">
+                    <a:alpha val="43137"/>
+                  </a:srgbClr>
+                </a:outerShdw>
+              </a:effectLst>
+            </a:endParaRPr>
+          </a:p>
+          <a:p>
+            <a:r>
+              <a:rPr lang="de-DE" dirty="0">
+                <a:effectLst>
+                  <a:outerShdw blurRad="38100" dist="38100" dir="2700000" algn="tl">
+                    <a:srgbClr val="000000">
+                      <a:alpha val="43137"/>
+                    </a:srgbClr>
+                  </a:outerShdw>
+                </a:effectLst>
+              </a:rPr>
+              <a:t>Eingabeaufforderung im Startmenü suchen und öffnen</a:t>
+            </a:r>
+          </a:p>
+          <a:p>
+            <a:r>
+              <a:rPr lang="de-DE" dirty="0">
+                <a:effectLst>
+                  <a:outerShdw blurRad="38100" dist="38100" dir="2700000" algn="tl">
+                    <a:srgbClr val="000000">
+                      <a:alpha val="43137"/>
+                    </a:srgbClr>
+                  </a:outerShdw>
+                </a:effectLst>
+              </a:rPr>
+              <a:t>Mit dem Befehl „</a:t>
+            </a:r>
+            <a:r>
+              <a:rPr lang="de-DE" dirty="0" err="1">
+                <a:effectLst>
+                  <a:outerShdw blurRad="38100" dist="38100" dir="2700000" algn="tl">
+                    <a:srgbClr val="000000">
+                      <a:alpha val="43137"/>
+                    </a:srgbClr>
+                  </a:outerShdw>
+                </a:effectLst>
+              </a:rPr>
+              <a:t>git</a:t>
+            </a:r>
+            <a:r>
+              <a:rPr lang="de-DE" dirty="0">
+                <a:effectLst>
+                  <a:outerShdw blurRad="38100" dist="38100" dir="2700000" algn="tl">
+                    <a:srgbClr val="000000">
+                      <a:alpha val="43137"/>
+                    </a:srgbClr>
+                  </a:outerShdw>
+                </a:effectLst>
+              </a:rPr>
+              <a:t> --version“ können Sie prüfen ob die Installation funktioniert hat (sollte eine Ausgabe wie „</a:t>
+            </a:r>
+            <a:r>
+              <a:rPr lang="de-DE" dirty="0" err="1">
+                <a:effectLst>
+                  <a:outerShdw blurRad="38100" dist="38100" dir="2700000" algn="tl">
+                    <a:srgbClr val="000000">
+                      <a:alpha val="43137"/>
+                    </a:srgbClr>
+                  </a:outerShdw>
+                </a:effectLst>
+              </a:rPr>
+              <a:t>git</a:t>
+            </a:r>
+            <a:r>
+              <a:rPr lang="de-DE" dirty="0">
+                <a:effectLst>
+                  <a:outerShdw blurRad="38100" dist="38100" dir="2700000" algn="tl">
+                    <a:srgbClr val="000000">
+                      <a:alpha val="43137"/>
+                    </a:srgbClr>
+                  </a:outerShdw>
+                </a:effectLst>
+              </a:rPr>
+              <a:t> </a:t>
+            </a:r>
+            <a:r>
+              <a:rPr lang="de-DE" dirty="0" err="1">
+                <a:effectLst>
+                  <a:outerShdw blurRad="38100" dist="38100" dir="2700000" algn="tl">
+                    <a:srgbClr val="000000">
+                      <a:alpha val="43137"/>
+                    </a:srgbClr>
+                  </a:outerShdw>
+                </a:effectLst>
+              </a:rPr>
+              <a:t>version</a:t>
+            </a:r>
+            <a:r>
+              <a:rPr lang="de-DE" dirty="0">
+                <a:effectLst>
+                  <a:outerShdw blurRad="38100" dist="38100" dir="2700000" algn="tl">
+                    <a:srgbClr val="000000">
+                      <a:alpha val="43137"/>
+                    </a:srgbClr>
+                  </a:outerShdw>
+                </a:effectLst>
+              </a:rPr>
+              <a:t> 2.x.x“ anzeigen), anschließend Eingabeaufforderung wieder schließen</a:t>
+            </a:r>
+          </a:p>
+          <a:p>
+            <a:r>
+              <a:rPr lang="fr-FR" dirty="0" err="1">
+                <a:effectLst>
+                  <a:outerShdw blurRad="38100" dist="38100" dir="2700000" algn="tl">
+                    <a:srgbClr val="000000">
+                      <a:alpha val="43137"/>
+                    </a:srgbClr>
+                  </a:outerShdw>
+                </a:effectLst>
+              </a:rPr>
+              <a:t>Öffnen</a:t>
+            </a:r>
+            <a:r>
+              <a:rPr lang="fr-FR" dirty="0">
+                <a:effectLst>
+                  <a:outerShdw blurRad="38100" dist="38100" dir="2700000" algn="tl">
+                    <a:srgbClr val="000000">
+                      <a:alpha val="43137"/>
+                    </a:srgbClr>
+                  </a:outerShdw>
+                </a:effectLst>
+              </a:rPr>
+              <a:t> </a:t>
+            </a:r>
+            <a:r>
+              <a:rPr lang="fr-FR" dirty="0" err="1">
+                <a:effectLst>
+                  <a:outerShdw blurRad="38100" dist="38100" dir="2700000" algn="tl">
+                    <a:srgbClr val="000000">
+                      <a:alpha val="43137"/>
+                    </a:srgbClr>
+                  </a:outerShdw>
+                </a:effectLst>
+              </a:rPr>
+              <a:t>Sie</a:t>
+            </a:r>
+            <a:r>
+              <a:rPr lang="fr-FR" dirty="0">
+                <a:effectLst>
+                  <a:outerShdw blurRad="38100" dist="38100" dir="2700000" algn="tl">
+                    <a:srgbClr val="000000">
+                      <a:alpha val="43137"/>
+                    </a:srgbClr>
+                  </a:outerShdw>
+                </a:effectLst>
+              </a:rPr>
+              <a:t> den </a:t>
+            </a:r>
+            <a:r>
+              <a:rPr lang="fr-FR" dirty="0" err="1">
+                <a:effectLst>
+                  <a:outerShdw blurRad="38100" dist="38100" dir="2700000" algn="tl">
+                    <a:srgbClr val="000000">
+                      <a:alpha val="43137"/>
+                    </a:srgbClr>
+                  </a:outerShdw>
+                </a:effectLst>
+              </a:rPr>
+              <a:t>Ordner</a:t>
+            </a:r>
+            <a:r>
+              <a:rPr lang="fr-FR" dirty="0">
+                <a:effectLst>
+                  <a:outerShdw blurRad="38100" dist="38100" dir="2700000" algn="tl">
+                    <a:srgbClr val="000000">
+                      <a:alpha val="43137"/>
+                    </a:srgbClr>
+                  </a:outerShdw>
+                </a:effectLst>
+              </a:rPr>
+              <a:t>, in </a:t>
+            </a:r>
+            <a:r>
+              <a:rPr lang="fr-FR" dirty="0" err="1">
+                <a:effectLst>
+                  <a:outerShdw blurRad="38100" dist="38100" dir="2700000" algn="tl">
+                    <a:srgbClr val="000000">
+                      <a:alpha val="43137"/>
+                    </a:srgbClr>
+                  </a:outerShdw>
+                </a:effectLst>
+              </a:rPr>
+              <a:t>dem</a:t>
+            </a:r>
+            <a:r>
+              <a:rPr lang="fr-FR" dirty="0">
+                <a:effectLst>
+                  <a:outerShdw blurRad="38100" dist="38100" dir="2700000" algn="tl">
+                    <a:srgbClr val="000000">
+                      <a:alpha val="43137"/>
+                    </a:srgbClr>
+                  </a:outerShdw>
+                </a:effectLst>
+              </a:rPr>
+              <a:t> </a:t>
+            </a:r>
+            <a:r>
+              <a:rPr lang="fr-FR" dirty="0" err="1">
+                <a:effectLst>
+                  <a:outerShdw blurRad="38100" dist="38100" dir="2700000" algn="tl">
+                    <a:srgbClr val="000000">
+                      <a:alpha val="43137"/>
+                    </a:srgbClr>
+                  </a:outerShdw>
+                </a:effectLst>
+              </a:rPr>
+              <a:t>Sie</a:t>
+            </a:r>
+            <a:r>
+              <a:rPr lang="fr-FR" dirty="0">
+                <a:effectLst>
+                  <a:outerShdw blurRad="38100" dist="38100" dir="2700000" algn="tl">
+                    <a:srgbClr val="000000">
+                      <a:alpha val="43137"/>
+                    </a:srgbClr>
+                  </a:outerShdw>
+                </a:effectLst>
+              </a:rPr>
+              <a:t> die </a:t>
+            </a:r>
+            <a:r>
+              <a:rPr lang="fr-FR" dirty="0" err="1">
+                <a:effectLst>
+                  <a:outerShdw blurRad="38100" dist="38100" dir="2700000" algn="tl">
+                    <a:srgbClr val="000000">
+                      <a:alpha val="43137"/>
+                    </a:srgbClr>
+                  </a:outerShdw>
+                </a:effectLst>
+              </a:rPr>
+              <a:t>Dateien</a:t>
+            </a:r>
+            <a:r>
+              <a:rPr lang="fr-FR" dirty="0">
+                <a:effectLst>
+                  <a:outerShdw blurRad="38100" dist="38100" dir="2700000" algn="tl">
+                    <a:srgbClr val="000000">
+                      <a:alpha val="43137"/>
+                    </a:srgbClr>
+                  </a:outerShdw>
+                </a:effectLst>
+              </a:rPr>
+              <a:t> </a:t>
+            </a:r>
+            <a:r>
+              <a:rPr lang="fr-FR" dirty="0" err="1">
+                <a:effectLst>
+                  <a:outerShdw blurRad="38100" dist="38100" dir="2700000" algn="tl">
+                    <a:srgbClr val="000000">
+                      <a:alpha val="43137"/>
+                    </a:srgbClr>
+                  </a:outerShdw>
+                </a:effectLst>
+              </a:rPr>
+              <a:t>speichern</a:t>
+            </a:r>
+            <a:r>
+              <a:rPr lang="fr-FR" dirty="0">
+                <a:effectLst>
+                  <a:outerShdw blurRad="38100" dist="38100" dir="2700000" algn="tl">
+                    <a:srgbClr val="000000">
+                      <a:alpha val="43137"/>
+                    </a:srgbClr>
+                  </a:outerShdw>
+                </a:effectLst>
+              </a:rPr>
+              <a:t> </a:t>
+            </a:r>
+            <a:r>
+              <a:rPr lang="fr-FR" dirty="0" err="1">
+                <a:effectLst>
+                  <a:outerShdw blurRad="38100" dist="38100" dir="2700000" algn="tl">
+                    <a:srgbClr val="000000">
+                      <a:alpha val="43137"/>
+                    </a:srgbClr>
+                  </a:outerShdw>
+                </a:effectLst>
+              </a:rPr>
+              <a:t>möchten</a:t>
+            </a:r>
+            <a:r>
+              <a:rPr lang="fr-FR" dirty="0">
+                <a:effectLst>
+                  <a:outerShdw blurRad="38100" dist="38100" dir="2700000" algn="tl">
+                    <a:srgbClr val="000000">
+                      <a:alpha val="43137"/>
+                    </a:srgbClr>
+                  </a:outerShdw>
+                </a:effectLst>
+              </a:rPr>
+              <a:t> </a:t>
+            </a:r>
+            <a:r>
+              <a:rPr lang="fr-FR" dirty="0" err="1">
+                <a:effectLst>
+                  <a:outerShdw blurRad="38100" dist="38100" dir="2700000" algn="tl">
+                    <a:srgbClr val="000000">
+                      <a:alpha val="43137"/>
+                    </a:srgbClr>
+                  </a:outerShdw>
+                </a:effectLst>
+              </a:rPr>
+              <a:t>und</a:t>
+            </a:r>
+            <a:r>
+              <a:rPr lang="fr-FR" dirty="0">
+                <a:effectLst>
+                  <a:outerShdw blurRad="38100" dist="38100" dir="2700000" algn="tl">
+                    <a:srgbClr val="000000">
+                      <a:alpha val="43137"/>
+                    </a:srgbClr>
+                  </a:outerShdw>
+                </a:effectLst>
+              </a:rPr>
+              <a:t> </a:t>
+            </a:r>
+            <a:r>
+              <a:rPr lang="fr-FR" dirty="0" err="1">
+                <a:effectLst>
+                  <a:outerShdw blurRad="38100" dist="38100" dir="2700000" algn="tl">
+                    <a:srgbClr val="000000">
+                      <a:alpha val="43137"/>
+                    </a:srgbClr>
+                  </a:outerShdw>
+                </a:effectLst>
+              </a:rPr>
+              <a:t>wählen</a:t>
+            </a:r>
+            <a:r>
+              <a:rPr lang="fr-FR" dirty="0">
+                <a:effectLst>
+                  <a:outerShdw blurRad="38100" dist="38100" dir="2700000" algn="tl">
+                    <a:srgbClr val="000000">
+                      <a:alpha val="43137"/>
+                    </a:srgbClr>
+                  </a:outerShdw>
+                </a:effectLst>
+              </a:rPr>
+              <a:t> </a:t>
+            </a:r>
+            <a:r>
+              <a:rPr lang="fr-FR" dirty="0" err="1">
+                <a:effectLst>
+                  <a:outerShdw blurRad="38100" dist="38100" dir="2700000" algn="tl">
+                    <a:srgbClr val="000000">
+                      <a:alpha val="43137"/>
+                    </a:srgbClr>
+                  </a:outerShdw>
+                </a:effectLst>
+              </a:rPr>
+              <a:t>Sie</a:t>
+            </a:r>
+            <a:r>
+              <a:rPr lang="fr-FR" dirty="0">
+                <a:effectLst>
+                  <a:outerShdw blurRad="38100" dist="38100" dir="2700000" algn="tl">
+                    <a:srgbClr val="000000">
+                      <a:alpha val="43137"/>
+                    </a:srgbClr>
+                  </a:outerShdw>
+                </a:effectLst>
+              </a:rPr>
+              <a:t> dort mit </a:t>
+            </a:r>
+            <a:r>
+              <a:rPr lang="fr-FR" dirty="0" err="1">
+                <a:effectLst>
+                  <a:outerShdw blurRad="38100" dist="38100" dir="2700000" algn="tl">
+                    <a:srgbClr val="000000">
+                      <a:alpha val="43137"/>
+                    </a:srgbClr>
+                  </a:outerShdw>
+                </a:effectLst>
+              </a:rPr>
+              <a:t>Rechtsklick</a:t>
+            </a:r>
+            <a:r>
+              <a:rPr lang="de-DE" dirty="0">
+                <a:effectLst>
+                  <a:outerShdw blurRad="38100" dist="38100" dir="2700000" algn="tl">
+                    <a:srgbClr val="000000">
+                      <a:alpha val="43137"/>
+                    </a:srgbClr>
+                  </a:outerShdw>
+                </a:effectLst>
+              </a:rPr>
+              <a:t> „in Terminal öffnen“ </a:t>
+            </a:r>
+          </a:p>
+          <a:p>
+            <a:r>
+              <a:rPr lang="de-DE" dirty="0">
+                <a:effectLst>
+                  <a:outerShdw blurRad="38100" dist="38100" dir="2700000" algn="tl">
+                    <a:srgbClr val="000000">
+                      <a:alpha val="43137"/>
+                    </a:srgbClr>
+                  </a:outerShdw>
+                </a:effectLst>
+              </a:rPr>
+              <a:t>Mit dem Befehl „</a:t>
+            </a:r>
+            <a:r>
+              <a:rPr lang="de-DE" dirty="0" err="1">
+                <a:effectLst>
+                  <a:outerShdw blurRad="38100" dist="38100" dir="2700000" algn="tl">
+                    <a:srgbClr val="000000">
+                      <a:alpha val="43137"/>
+                    </a:srgbClr>
+                  </a:outerShdw>
+                </a:effectLst>
+              </a:rPr>
+              <a:t>git</a:t>
+            </a:r>
+            <a:r>
+              <a:rPr lang="de-DE" dirty="0">
+                <a:effectLst>
+                  <a:outerShdw blurRad="38100" dist="38100" dir="2700000" algn="tl">
+                    <a:srgbClr val="000000">
+                      <a:alpha val="43137"/>
+                    </a:srgbClr>
+                  </a:outerShdw>
+                </a:effectLst>
+              </a:rPr>
+              <a:t> </a:t>
+            </a:r>
+            <a:r>
+              <a:rPr lang="de-DE" dirty="0" err="1">
+                <a:effectLst>
+                  <a:outerShdw blurRad="38100" dist="38100" dir="2700000" algn="tl">
+                    <a:srgbClr val="000000">
+                      <a:alpha val="43137"/>
+                    </a:srgbClr>
+                  </a:outerShdw>
+                </a:effectLst>
+              </a:rPr>
+              <a:t>clone</a:t>
+            </a:r>
+            <a:r>
+              <a:rPr lang="de-DE" dirty="0">
+                <a:effectLst>
+                  <a:outerShdw blurRad="38100" dist="38100" dir="2700000" algn="tl">
+                    <a:srgbClr val="000000">
+                      <a:alpha val="43137"/>
+                    </a:srgbClr>
+                  </a:outerShdw>
+                </a:effectLst>
+              </a:rPr>
+              <a:t> </a:t>
+            </a:r>
+            <a:r>
+              <a:rPr lang="de-DE" dirty="0">
+                <a:effectLst>
+                  <a:outerShdw blurRad="38100" dist="38100" dir="2700000" algn="tl">
+                    <a:srgbClr val="000000">
+                      <a:alpha val="43137"/>
+                    </a:srgbClr>
+                  </a:outerShdw>
+                </a:effectLst>
+                <a:hlinkClick r:id="rId3">
+                  <a:extLst>
+                    <a:ext uri="{A12FA001-AC4F-418D-AE19-62706E023703}">
+                      <ahyp:hlinkClr xmlns:ahyp="http://schemas.microsoft.com/office/drawing/2018/hyperlinkcolor" val="tx"/>
+                    </a:ext>
+                  </a:extLst>
+                </a:hlinkClick>
+              </a:rPr>
+              <a:t>https://github.com/freiheits-</a:t>
+            </a:r>
+            <a:r>
+              <a:rPr lang="de-DE" dirty="0" err="1">
+                <a:effectLst>
+                  <a:outerShdw blurRad="38100" dist="38100" dir="2700000" algn="tl">
+                    <a:srgbClr val="000000">
+                      <a:alpha val="43137"/>
+                    </a:srgbClr>
+                  </a:outerShdw>
+                </a:effectLst>
+                <a:hlinkClick r:id="rId3">
+                  <a:extLst>
+                    <a:ext uri="{A12FA001-AC4F-418D-AE19-62706E023703}">
+                      <ahyp:hlinkClr xmlns:ahyp="http://schemas.microsoft.com/office/drawing/2018/hyperlinkcolor" val="tx"/>
+                    </a:ext>
+                  </a:extLst>
+                </a:hlinkClick>
+              </a:rPr>
+              <a:t>stack</a:t>
+            </a:r>
+            <a:r>
+              <a:rPr lang="de-DE" dirty="0">
+                <a:effectLst>
+                  <a:outerShdw blurRad="38100" dist="38100" dir="2700000" algn="tl">
+                    <a:srgbClr val="000000">
+                      <a:alpha val="43137"/>
+                    </a:srgbClr>
+                  </a:outerShdw>
+                </a:effectLst>
+                <a:hlinkClick r:id="rId3">
+                  <a:extLst>
+                    <a:ext uri="{A12FA001-AC4F-418D-AE19-62706E023703}">
+                      <ahyp:hlinkClr xmlns:ahyp="http://schemas.microsoft.com/office/drawing/2018/hyperlinkcolor" val="tx"/>
+                    </a:ext>
+                  </a:extLst>
+                </a:hlinkClick>
+              </a:rPr>
+              <a:t>/</a:t>
+            </a:r>
+            <a:r>
+              <a:rPr lang="de-DE" dirty="0" err="1">
+                <a:effectLst>
+                  <a:outerShdw blurRad="38100" dist="38100" dir="2700000" algn="tl">
+                    <a:srgbClr val="000000">
+                      <a:alpha val="43137"/>
+                    </a:srgbClr>
+                  </a:outerShdw>
+                </a:effectLst>
+                <a:hlinkClick r:id="rId3">
+                  <a:extLst>
+                    <a:ext uri="{A12FA001-AC4F-418D-AE19-62706E023703}">
+                      <ahyp:hlinkClr xmlns:ahyp="http://schemas.microsoft.com/office/drawing/2018/hyperlinkcolor" val="tx"/>
+                    </a:ext>
+                  </a:extLst>
+                </a:hlinkClick>
+              </a:rPr>
+              <a:t>slot_project.git</a:t>
+            </a:r>
+            <a:r>
+              <a:rPr lang="de-DE" dirty="0">
+                <a:effectLst>
+                  <a:outerShdw blurRad="38100" dist="38100" dir="2700000" algn="tl">
+                    <a:srgbClr val="000000">
+                      <a:alpha val="43137"/>
+                    </a:srgbClr>
+                  </a:outerShdw>
+                </a:effectLst>
+              </a:rPr>
+              <a:t>“ startet der Download in Ihren ausgewählten Ordner</a:t>
+            </a:r>
+          </a:p>
+        </p:txBody>
+      </p:sp>
+    </p:spTree>
+    <p:extLst>
+      <p:ext uri="{BB962C8B-B14F-4D97-AF65-F5344CB8AC3E}">
+        <p14:creationId xmlns:p14="http://schemas.microsoft.com/office/powerpoint/2010/main" val="528143475"/>
+      </p:ext>
+    </p:extLst>
+  </p:cSld>
+  <p:clrMapOvr>
+    <a:masterClrMapping/>
+  </p:clrMapOvr>
+</p:sld>
+</file>
+
 <file path=ppt/slides/slide2.xml><?xml version="1.0" encoding="utf-8"?>
 <p:sld xmlns:a="http://schemas.openxmlformats.org/drawingml/2006/main" xmlns:r="http://schemas.openxmlformats.org/officeDocument/2006/relationships" xmlns:p="http://schemas.openxmlformats.org/presentationml/2006/main">
   <p:cSld>
@@ -36645,7 +37334,7 @@
           <a:noFill/>
           <a:extLst>
             <a:ext uri="{909E8E84-426E-40dd-AFC4-6F175D3DCCD1}">
-              <a14:hiddenFill xmlns="" xmlns:a16="http://schemas.microsoft.com/office/drawing/2014/main" xmlns:p14="http://schemas.microsoft.com/office/powerpoint/2010/main" xmlns:a14="http://schemas.microsoft.com/office/drawing/2010/main">
+              <a14:hiddenFill xmlns:a14="http://schemas.microsoft.com/office/drawing/2010/main" xmlns:p14="http://schemas.microsoft.com/office/powerpoint/2010/main" xmlns:a16="http://schemas.microsoft.com/office/drawing/2014/main" xmlns="">
                 <a:solidFill>
                   <a:srgbClr val="FFFFFF"/>
                 </a:solidFill>
@@ -36766,7 +37455,7 @@
               </a:ln>
               <a:extLst>
                 <a:ext uri="{91240B29-F687-4f45-9708-019B960494DF}">
-                  <a14:hiddenLine xmlns="" xmlns:a16="http://schemas.microsoft.com/office/drawing/2014/main" xmlns:p14="http://schemas.microsoft.com/office/powerpoint/2010/main" xmlns:a14="http://schemas.microsoft.com/office/drawing/2010/main" w="9525">
+                  <a14:hiddenLine xmlns:a14="http://schemas.microsoft.com/office/drawing/2010/main" xmlns:p14="http://schemas.microsoft.com/office/powerpoint/2010/main" xmlns:a16="http://schemas.microsoft.com/office/drawing/2014/main" xmlns="" w="9525">
                     <a:solidFill>
                       <a:srgbClr val="000000"/>
                     </a:solidFill>
@@ -36878,7 +37567,7 @@
               </a:ln>
               <a:extLst>
                 <a:ext uri="{91240B29-F687-4f45-9708-019B960494DF}">
-                  <a14:hiddenLine xmlns="" xmlns:a16="http://schemas.microsoft.com/office/drawing/2014/main" xmlns:p14="http://schemas.microsoft.com/office/powerpoint/2010/main" xmlns:a14="http://schemas.microsoft.com/office/drawing/2010/main" w="9525">
+                  <a14:hiddenLine xmlns:a14="http://schemas.microsoft.com/office/drawing/2010/main" xmlns:p14="http://schemas.microsoft.com/office/powerpoint/2010/main" xmlns:a16="http://schemas.microsoft.com/office/drawing/2014/main" xmlns="" w="9525">
                     <a:solidFill>
                       <a:srgbClr val="000000"/>
                     </a:solidFill>
@@ -36990,7 +37679,7 @@
               </a:ln>
               <a:extLst>
                 <a:ext uri="{91240B29-F687-4f45-9708-019B960494DF}">
-                  <a14:hiddenLine xmlns="" xmlns:a16="http://schemas.microsoft.com/office/drawing/2014/main" xmlns:p14="http://schemas.microsoft.com/office/powerpoint/2010/main" xmlns:a14="http://schemas.microsoft.com/office/drawing/2010/main" w="9525">
+                  <a14:hiddenLine xmlns:a14="http://schemas.microsoft.com/office/drawing/2010/main" xmlns:p14="http://schemas.microsoft.com/office/powerpoint/2010/main" xmlns:a16="http://schemas.microsoft.com/office/drawing/2014/main" xmlns="" w="9525">
                     <a:solidFill>
                       <a:srgbClr val="000000"/>
                     </a:solidFill>
@@ -37074,7 +37763,7 @@
               </a:ln>
               <a:extLst>
                 <a:ext uri="{91240B29-F687-4f45-9708-019B960494DF}">
-                  <a14:hiddenLine xmlns="" xmlns:a16="http://schemas.microsoft.com/office/drawing/2014/main" xmlns:p14="http://schemas.microsoft.com/office/powerpoint/2010/main" xmlns:a14="http://schemas.microsoft.com/office/drawing/2010/main" w="9525">
+                  <a14:hiddenLine xmlns:a14="http://schemas.microsoft.com/office/drawing/2010/main" xmlns:p14="http://schemas.microsoft.com/office/powerpoint/2010/main" xmlns:a16="http://schemas.microsoft.com/office/drawing/2014/main" xmlns="" w="9525">
                     <a:solidFill>
                       <a:srgbClr val="000000"/>
                     </a:solidFill>
@@ -37186,7 +37875,7 @@
               </a:ln>
               <a:extLst>
                 <a:ext uri="{91240B29-F687-4f45-9708-019B960494DF}">
-                  <a14:hiddenLine xmlns="" xmlns:a16="http://schemas.microsoft.com/office/drawing/2014/main" xmlns:p14="http://schemas.microsoft.com/office/powerpoint/2010/main" xmlns:a14="http://schemas.microsoft.com/office/drawing/2010/main" w="9525">
+                  <a14:hiddenLine xmlns:a14="http://schemas.microsoft.com/office/drawing/2010/main" xmlns:p14="http://schemas.microsoft.com/office/powerpoint/2010/main" xmlns:a16="http://schemas.microsoft.com/office/drawing/2014/main" xmlns="" w="9525">
                     <a:solidFill>
                       <a:srgbClr val="000000"/>
                     </a:solidFill>
@@ -37270,7 +37959,7 @@
               </a:ln>
               <a:extLst>
                 <a:ext uri="{91240B29-F687-4f45-9708-019B960494DF}">
-                  <a14:hiddenLine xmlns="" xmlns:a16="http://schemas.microsoft.com/office/drawing/2014/main" xmlns:p14="http://schemas.microsoft.com/office/powerpoint/2010/main" xmlns:a14="http://schemas.microsoft.com/office/drawing/2010/main" w="9525">
+                  <a14:hiddenLine xmlns:a14="http://schemas.microsoft.com/office/drawing/2010/main" xmlns:p14="http://schemas.microsoft.com/office/powerpoint/2010/main" xmlns:a16="http://schemas.microsoft.com/office/drawing/2014/main" xmlns="" w="9525">
                     <a:solidFill>
                       <a:srgbClr val="000000"/>
                     </a:solidFill>
@@ -37354,7 +38043,7 @@
               </a:ln>
               <a:extLst>
                 <a:ext uri="{91240B29-F687-4f45-9708-019B960494DF}">
-                  <a14:hiddenLine xmlns="" xmlns:a16="http://schemas.microsoft.com/office/drawing/2014/main" xmlns:p14="http://schemas.microsoft.com/office/powerpoint/2010/main" xmlns:a14="http://schemas.microsoft.com/office/drawing/2010/main" w="9525">
+                  <a14:hiddenLine xmlns:a14="http://schemas.microsoft.com/office/drawing/2010/main" xmlns:p14="http://schemas.microsoft.com/office/powerpoint/2010/main" xmlns:a16="http://schemas.microsoft.com/office/drawing/2014/main" xmlns="" w="9525">
                     <a:solidFill>
                       <a:srgbClr val="000000"/>
                     </a:solidFill>
@@ -37466,7 +38155,7 @@
               </a:ln>
               <a:extLst>
                 <a:ext uri="{91240B29-F687-4f45-9708-019B960494DF}">
-                  <a14:hiddenLine xmlns="" xmlns:a16="http://schemas.microsoft.com/office/drawing/2014/main" xmlns:p14="http://schemas.microsoft.com/office/powerpoint/2010/main" xmlns:a14="http://schemas.microsoft.com/office/drawing/2010/main" w="9525">
+                  <a14:hiddenLine xmlns:a14="http://schemas.microsoft.com/office/drawing/2010/main" xmlns:p14="http://schemas.microsoft.com/office/powerpoint/2010/main" xmlns:a16="http://schemas.microsoft.com/office/drawing/2014/main" xmlns="" w="9525">
                     <a:solidFill>
                       <a:srgbClr val="000000"/>
                     </a:solidFill>
@@ -37578,7 +38267,7 @@
               </a:ln>
               <a:extLst>
                 <a:ext uri="{91240B29-F687-4f45-9708-019B960494DF}">
-                  <a14:hiddenLine xmlns="" xmlns:a16="http://schemas.microsoft.com/office/drawing/2014/main" xmlns:p14="http://schemas.microsoft.com/office/powerpoint/2010/main" xmlns:a14="http://schemas.microsoft.com/office/drawing/2010/main" w="9525">
+                  <a14:hiddenLine xmlns:a14="http://schemas.microsoft.com/office/drawing/2010/main" xmlns:p14="http://schemas.microsoft.com/office/powerpoint/2010/main" xmlns:a16="http://schemas.microsoft.com/office/drawing/2014/main" xmlns="" w="9525">
                     <a:solidFill>
                       <a:srgbClr val="000000"/>
                     </a:solidFill>
@@ -37662,7 +38351,7 @@
               </a:ln>
               <a:extLst>
                 <a:ext uri="{91240B29-F687-4f45-9708-019B960494DF}">
-                  <a14:hiddenLine xmlns="" xmlns:a16="http://schemas.microsoft.com/office/drawing/2014/main" xmlns:p14="http://schemas.microsoft.com/office/powerpoint/2010/main" xmlns:a14="http://schemas.microsoft.com/office/drawing/2010/main" w="9525">
+                  <a14:hiddenLine xmlns:a14="http://schemas.microsoft.com/office/drawing/2010/main" xmlns:p14="http://schemas.microsoft.com/office/powerpoint/2010/main" xmlns:a16="http://schemas.microsoft.com/office/drawing/2014/main" xmlns="" w="9525">
                     <a:solidFill>
                       <a:srgbClr val="000000"/>
                     </a:solidFill>
@@ -37794,7 +38483,7 @@
               </a:ln>
               <a:extLst>
                 <a:ext uri="{91240B29-F687-4f45-9708-019B960494DF}">
-                  <a14:hiddenLine xmlns="" xmlns:a16="http://schemas.microsoft.com/office/drawing/2014/main" xmlns:p14="http://schemas.microsoft.com/office/powerpoint/2010/main" xmlns:a14="http://schemas.microsoft.com/office/drawing/2010/main" w="9525">
+                  <a14:hiddenLine xmlns:a14="http://schemas.microsoft.com/office/drawing/2010/main" xmlns:p14="http://schemas.microsoft.com/office/powerpoint/2010/main" xmlns:a16="http://schemas.microsoft.com/office/drawing/2014/main" xmlns="" w="9525">
                     <a:solidFill>
                       <a:srgbClr val="000000"/>
                     </a:solidFill>
@@ -37922,7 +38611,7 @@
               </a:ln>
               <a:extLst>
                 <a:ext uri="{91240B29-F687-4f45-9708-019B960494DF}">
-                  <a14:hiddenLine xmlns="" xmlns:a16="http://schemas.microsoft.com/office/drawing/2014/main" xmlns:p14="http://schemas.microsoft.com/office/powerpoint/2010/main" xmlns:a14="http://schemas.microsoft.com/office/drawing/2010/main" w="9525">
+                  <a14:hiddenLine xmlns:a14="http://schemas.microsoft.com/office/drawing/2010/main" xmlns:p14="http://schemas.microsoft.com/office/powerpoint/2010/main" xmlns:a16="http://schemas.microsoft.com/office/drawing/2014/main" xmlns="" w="9525">
                     <a:solidFill>
                       <a:srgbClr val="000000"/>
                     </a:solidFill>
@@ -38006,7 +38695,7 @@
               </a:ln>
               <a:extLst>
                 <a:ext uri="{91240B29-F687-4f45-9708-019B960494DF}">
-                  <a14:hiddenLine xmlns="" xmlns:a16="http://schemas.microsoft.com/office/drawing/2014/main" xmlns:p14="http://schemas.microsoft.com/office/powerpoint/2010/main" xmlns:a14="http://schemas.microsoft.com/office/drawing/2010/main" w="9525">
+                  <a14:hiddenLine xmlns:a14="http://schemas.microsoft.com/office/drawing/2010/main" xmlns:p14="http://schemas.microsoft.com/office/powerpoint/2010/main" xmlns:a16="http://schemas.microsoft.com/office/drawing/2014/main" xmlns="" w="9525">
                     <a:solidFill>
                       <a:srgbClr val="000000"/>
                     </a:solidFill>
@@ -38090,7 +38779,7 @@
               </a:ln>
               <a:extLst>
                 <a:ext uri="{91240B29-F687-4f45-9708-019B960494DF}">
-                  <a14:hiddenLine xmlns="" xmlns:a16="http://schemas.microsoft.com/office/drawing/2014/main" xmlns:p14="http://schemas.microsoft.com/office/powerpoint/2010/main" xmlns:a14="http://schemas.microsoft.com/office/drawing/2010/main" w="9525">
+                  <a14:hiddenLine xmlns:a14="http://schemas.microsoft.com/office/drawing/2010/main" xmlns:p14="http://schemas.microsoft.com/office/powerpoint/2010/main" xmlns:a16="http://schemas.microsoft.com/office/drawing/2014/main" xmlns="" w="9525">
                     <a:solidFill>
                       <a:srgbClr val="000000"/>
                     </a:solidFill>
@@ -38202,7 +38891,7 @@
               </a:ln>
               <a:extLst>
                 <a:ext uri="{91240B29-F687-4f45-9708-019B960494DF}">
-                  <a14:hiddenLine xmlns="" xmlns:a16="http://schemas.microsoft.com/office/drawing/2014/main" xmlns:p14="http://schemas.microsoft.com/office/powerpoint/2010/main" xmlns:a14="http://schemas.microsoft.com/office/drawing/2010/main" w="9525">
+                  <a14:hiddenLine xmlns:a14="http://schemas.microsoft.com/office/drawing/2010/main" xmlns:p14="http://schemas.microsoft.com/office/powerpoint/2010/main" xmlns:a16="http://schemas.microsoft.com/office/drawing/2014/main" xmlns="" w="9525">
                     <a:solidFill>
                       <a:srgbClr val="000000"/>
                     </a:solidFill>
@@ -38258,7 +38947,7 @@
               </a:ln>
               <a:extLst>
                 <a:ext uri="{91240B29-F687-4f45-9708-019B960494DF}">
-                  <a14:hiddenLine xmlns="" xmlns:a16="http://schemas.microsoft.com/office/drawing/2014/main" xmlns:p14="http://schemas.microsoft.com/office/powerpoint/2010/main" xmlns:a14="http://schemas.microsoft.com/office/drawing/2010/main" w="9525">
+                  <a14:hiddenLine xmlns:a14="http://schemas.microsoft.com/office/drawing/2010/main" xmlns:p14="http://schemas.microsoft.com/office/powerpoint/2010/main" xmlns:a16="http://schemas.microsoft.com/office/drawing/2014/main" xmlns="" w="9525">
                     <a:solidFill>
                       <a:srgbClr val="000000"/>
                     </a:solidFill>
@@ -38345,7 +39034,7 @@
               </a:ln>
               <a:extLst>
                 <a:ext uri="{91240B29-F687-4f45-9708-019B960494DF}">
-                  <a14:hiddenLine xmlns="" xmlns:a16="http://schemas.microsoft.com/office/drawing/2014/main" xmlns:p14="http://schemas.microsoft.com/office/powerpoint/2010/main" xmlns:a14="http://schemas.microsoft.com/office/drawing/2010/main" w="9525">
+                  <a14:hiddenLine xmlns:a14="http://schemas.microsoft.com/office/drawing/2010/main" xmlns:p14="http://schemas.microsoft.com/office/powerpoint/2010/main" xmlns:a16="http://schemas.microsoft.com/office/drawing/2014/main" xmlns="" w="9525">
                     <a:solidFill>
                       <a:srgbClr val="000000"/>
                     </a:solidFill>
@@ -38457,7 +39146,7 @@
               </a:ln>
               <a:extLst>
                 <a:ext uri="{91240B29-F687-4f45-9708-019B960494DF}">
-                  <a14:hiddenLine xmlns="" xmlns:a16="http://schemas.microsoft.com/office/drawing/2014/main" xmlns:p14="http://schemas.microsoft.com/office/powerpoint/2010/main" xmlns:a14="http://schemas.microsoft.com/office/drawing/2010/main" w="9525">
+                  <a14:hiddenLine xmlns:a14="http://schemas.microsoft.com/office/drawing/2010/main" xmlns:p14="http://schemas.microsoft.com/office/powerpoint/2010/main" xmlns:a16="http://schemas.microsoft.com/office/drawing/2014/main" xmlns="" w="9525">
                     <a:solidFill>
                       <a:srgbClr val="000000"/>
                     </a:solidFill>
@@ -38541,7 +39230,7 @@
               </a:ln>
               <a:extLst>
                 <a:ext uri="{91240B29-F687-4f45-9708-019B960494DF}">
-                  <a14:hiddenLine xmlns="" xmlns:a16="http://schemas.microsoft.com/office/drawing/2014/main" xmlns:p14="http://schemas.microsoft.com/office/powerpoint/2010/main" xmlns:a14="http://schemas.microsoft.com/office/drawing/2010/main" w="9525">
+                  <a14:hiddenLine xmlns:a14="http://schemas.microsoft.com/office/drawing/2010/main" xmlns:p14="http://schemas.microsoft.com/office/powerpoint/2010/main" xmlns:a16="http://schemas.microsoft.com/office/drawing/2014/main" xmlns="" w="9525">
                     <a:solidFill>
                       <a:srgbClr val="000000"/>
                     </a:solidFill>
@@ -38653,7 +39342,7 @@
               </a:ln>
               <a:extLst>
                 <a:ext uri="{91240B29-F687-4f45-9708-019B960494DF}">
-                  <a14:hiddenLine xmlns="" xmlns:a16="http://schemas.microsoft.com/office/drawing/2014/main" xmlns:p14="http://schemas.microsoft.com/office/powerpoint/2010/main" xmlns:a14="http://schemas.microsoft.com/office/drawing/2010/main" w="9525">
+                  <a14:hiddenLine xmlns:a14="http://schemas.microsoft.com/office/drawing/2010/main" xmlns:p14="http://schemas.microsoft.com/office/powerpoint/2010/main" xmlns:a16="http://schemas.microsoft.com/office/drawing/2014/main" xmlns="" w="9525">
                     <a:solidFill>
                       <a:srgbClr val="000000"/>
                     </a:solidFill>
@@ -38740,7 +39429,7 @@
               </a:ln>
               <a:extLst>
                 <a:ext uri="{91240B29-F687-4f45-9708-019B960494DF}">
-                  <a14:hiddenLine xmlns="" xmlns:a16="http://schemas.microsoft.com/office/drawing/2014/main" xmlns:p14="http://schemas.microsoft.com/office/powerpoint/2010/main" xmlns:a14="http://schemas.microsoft.com/office/drawing/2010/main" w="9525">
+                  <a14:hiddenLine xmlns:a14="http://schemas.microsoft.com/office/drawing/2010/main" xmlns:p14="http://schemas.microsoft.com/office/powerpoint/2010/main" xmlns:a16="http://schemas.microsoft.com/office/drawing/2014/main" xmlns="" w="9525">
                     <a:solidFill>
                       <a:srgbClr val="000000"/>
                     </a:solidFill>
@@ -38824,7 +39513,7 @@
               </a:ln>
               <a:extLst>
                 <a:ext uri="{91240B29-F687-4f45-9708-019B960494DF}">
-                  <a14:hiddenLine xmlns="" xmlns:a16="http://schemas.microsoft.com/office/drawing/2014/main" xmlns:p14="http://schemas.microsoft.com/office/powerpoint/2010/main" xmlns:a14="http://schemas.microsoft.com/office/drawing/2010/main" w="9525">
+                  <a14:hiddenLine xmlns:a14="http://schemas.microsoft.com/office/drawing/2010/main" xmlns:p14="http://schemas.microsoft.com/office/powerpoint/2010/main" xmlns:a16="http://schemas.microsoft.com/office/drawing/2014/main" xmlns="" w="9525">
                     <a:solidFill>
                       <a:srgbClr val="000000"/>
                     </a:solidFill>
@@ -38936,7 +39625,7 @@
               </a:ln>
               <a:extLst>
                 <a:ext uri="{91240B29-F687-4f45-9708-019B960494DF}">
-                  <a14:hiddenLine xmlns="" xmlns:a16="http://schemas.microsoft.com/office/drawing/2014/main" xmlns:p14="http://schemas.microsoft.com/office/powerpoint/2010/main" xmlns:a14="http://schemas.microsoft.com/office/drawing/2010/main" w="9525">
+                  <a14:hiddenLine xmlns:a14="http://schemas.microsoft.com/office/drawing/2010/main" xmlns:p14="http://schemas.microsoft.com/office/powerpoint/2010/main" xmlns:a16="http://schemas.microsoft.com/office/drawing/2014/main" xmlns="" w="9525">
                     <a:solidFill>
                       <a:srgbClr val="000000"/>
                     </a:solidFill>
@@ -39048,7 +39737,7 @@
               </a:ln>
               <a:extLst>
                 <a:ext uri="{91240B29-F687-4f45-9708-019B960494DF}">
-                  <a14:hiddenLine xmlns="" xmlns:a16="http://schemas.microsoft.com/office/drawing/2014/main" xmlns:p14="http://schemas.microsoft.com/office/powerpoint/2010/main" xmlns:a14="http://schemas.microsoft.com/office/drawing/2010/main" w="9525">
+                  <a14:hiddenLine xmlns:a14="http://schemas.microsoft.com/office/drawing/2010/main" xmlns:p14="http://schemas.microsoft.com/office/powerpoint/2010/main" xmlns:a16="http://schemas.microsoft.com/office/drawing/2014/main" xmlns="" w="9525">
                     <a:solidFill>
                       <a:srgbClr val="000000"/>
                     </a:solidFill>
@@ -39135,7 +39824,7 @@
               </a:ln>
               <a:extLst>
                 <a:ext uri="{91240B29-F687-4f45-9708-019B960494DF}">
-                  <a14:hiddenLine xmlns="" xmlns:a16="http://schemas.microsoft.com/office/drawing/2014/main" xmlns:p14="http://schemas.microsoft.com/office/powerpoint/2010/main" xmlns:a14="http://schemas.microsoft.com/office/drawing/2010/main" w="9525">
+                  <a14:hiddenLine xmlns:a14="http://schemas.microsoft.com/office/drawing/2010/main" xmlns:p14="http://schemas.microsoft.com/office/powerpoint/2010/main" xmlns:a16="http://schemas.microsoft.com/office/drawing/2014/main" xmlns="" w="9525">
                     <a:solidFill>
                       <a:srgbClr val="000000"/>
                     </a:solidFill>
@@ -39277,7 +39966,7 @@
               </a:ln>
               <a:extLst>
                 <a:ext uri="{91240B29-F687-4f45-9708-019B960494DF}">
-                  <a14:hiddenLine xmlns="" xmlns:a16="http://schemas.microsoft.com/office/drawing/2014/main" xmlns:p14="http://schemas.microsoft.com/office/powerpoint/2010/main" xmlns:a14="http://schemas.microsoft.com/office/drawing/2010/main" w="9525">
+                  <a14:hiddenLine xmlns:a14="http://schemas.microsoft.com/office/drawing/2010/main" xmlns:p14="http://schemas.microsoft.com/office/powerpoint/2010/main" xmlns:a16="http://schemas.microsoft.com/office/drawing/2014/main" xmlns="" w="9525">
                     <a:solidFill>
                       <a:srgbClr val="000000"/>
                     </a:solidFill>
@@ -39412,7 +40101,7 @@
               </a:ln>
               <a:extLst>
                 <a:ext uri="{91240B29-F687-4f45-9708-019B960494DF}">
-                  <a14:hiddenLine xmlns="" xmlns:a16="http://schemas.microsoft.com/office/drawing/2014/main" xmlns:p14="http://schemas.microsoft.com/office/powerpoint/2010/main" xmlns:a14="http://schemas.microsoft.com/office/drawing/2010/main" w="9525">
+                  <a14:hiddenLine xmlns:a14="http://schemas.microsoft.com/office/drawing/2010/main" xmlns:p14="http://schemas.microsoft.com/office/powerpoint/2010/main" xmlns:a16="http://schemas.microsoft.com/office/drawing/2014/main" xmlns="" w="9525">
                     <a:solidFill>
                       <a:srgbClr val="000000"/>
                     </a:solidFill>
@@ -39549,7 +40238,7 @@
               </a:ln>
               <a:extLst>
                 <a:ext uri="{91240B29-F687-4f45-9708-019B960494DF}">
-                  <a14:hiddenLine xmlns="" xmlns:a16="http://schemas.microsoft.com/office/drawing/2014/main" xmlns:p14="http://schemas.microsoft.com/office/powerpoint/2010/main" xmlns:a14="http://schemas.microsoft.com/office/drawing/2010/main" w="9525">
+                  <a14:hiddenLine xmlns:a14="http://schemas.microsoft.com/office/drawing/2010/main" xmlns:p14="http://schemas.microsoft.com/office/powerpoint/2010/main" xmlns:a16="http://schemas.microsoft.com/office/drawing/2014/main" xmlns="" w="9525">
                     <a:solidFill>
                       <a:srgbClr val="000000"/>
                     </a:solidFill>
@@ -39661,7 +40350,7 @@
               </a:ln>
               <a:extLst>
                 <a:ext uri="{91240B29-F687-4f45-9708-019B960494DF}">
-                  <a14:hiddenLine xmlns="" xmlns:a16="http://schemas.microsoft.com/office/drawing/2014/main" xmlns:p14="http://schemas.microsoft.com/office/powerpoint/2010/main" xmlns:a14="http://schemas.microsoft.com/office/drawing/2010/main" w="9525">
+                  <a14:hiddenLine xmlns:a14="http://schemas.microsoft.com/office/drawing/2010/main" xmlns:p14="http://schemas.microsoft.com/office/powerpoint/2010/main" xmlns:a16="http://schemas.microsoft.com/office/drawing/2014/main" xmlns="" w="9525">
                     <a:solidFill>
                       <a:srgbClr val="000000"/>
                     </a:solidFill>
@@ -39748,7 +40437,7 @@
               </a:ln>
               <a:extLst>
                 <a:ext uri="{91240B29-F687-4f45-9708-019B960494DF}">
-                  <a14:hiddenLine xmlns="" xmlns:a16="http://schemas.microsoft.com/office/drawing/2014/main" xmlns:p14="http://schemas.microsoft.com/office/powerpoint/2010/main" xmlns:a14="http://schemas.microsoft.com/office/drawing/2010/main" w="9525">
+                  <a14:hiddenLine xmlns:a14="http://schemas.microsoft.com/office/drawing/2010/main" xmlns:p14="http://schemas.microsoft.com/office/powerpoint/2010/main" xmlns:a16="http://schemas.microsoft.com/office/drawing/2014/main" xmlns="" w="9525">
                     <a:solidFill>
                       <a:srgbClr val="000000"/>
                     </a:solidFill>
@@ -39860,7 +40549,7 @@
               </a:ln>
               <a:extLst>
                 <a:ext uri="{91240B29-F687-4f45-9708-019B960494DF}">
-                  <a14:hiddenLine xmlns="" xmlns:a16="http://schemas.microsoft.com/office/drawing/2014/main" xmlns:p14="http://schemas.microsoft.com/office/powerpoint/2010/main" xmlns:a14="http://schemas.microsoft.com/office/drawing/2010/main" w="9525">
+                  <a14:hiddenLine xmlns:a14="http://schemas.microsoft.com/office/drawing/2010/main" xmlns:p14="http://schemas.microsoft.com/office/powerpoint/2010/main" xmlns:a16="http://schemas.microsoft.com/office/drawing/2014/main" xmlns="" w="9525">
                     <a:solidFill>
                       <a:srgbClr val="000000"/>
                     </a:solidFill>
@@ -39950,7 +40639,7 @@
               </a:ln>
               <a:extLst>
                 <a:ext uri="{91240B29-F687-4f45-9708-019B960494DF}">
-                  <a14:hiddenLine xmlns="" xmlns:a16="http://schemas.microsoft.com/office/drawing/2014/main" xmlns:p14="http://schemas.microsoft.com/office/powerpoint/2010/main" xmlns:a14="http://schemas.microsoft.com/office/drawing/2010/main" w="9525">
+                  <a14:hiddenLine xmlns:a14="http://schemas.microsoft.com/office/drawing/2010/main" xmlns:p14="http://schemas.microsoft.com/office/powerpoint/2010/main" xmlns:a16="http://schemas.microsoft.com/office/drawing/2014/main" xmlns="" w="9525">
                     <a:solidFill>
                       <a:srgbClr val="000000"/>
                     </a:solidFill>
@@ -40062,7 +40751,7 @@
               </a:ln>
               <a:extLst>
                 <a:ext uri="{91240B29-F687-4f45-9708-019B960494DF}">
-                  <a14:hiddenLine xmlns="" xmlns:a16="http://schemas.microsoft.com/office/drawing/2014/main" xmlns:p14="http://schemas.microsoft.com/office/powerpoint/2010/main" xmlns:a14="http://schemas.microsoft.com/office/drawing/2010/main" w="9525">
+                  <a14:hiddenLine xmlns:a14="http://schemas.microsoft.com/office/drawing/2010/main" xmlns:p14="http://schemas.microsoft.com/office/powerpoint/2010/main" xmlns:a16="http://schemas.microsoft.com/office/drawing/2014/main" xmlns="" w="9525">
                     <a:solidFill>
                       <a:srgbClr val="000000"/>
                     </a:solidFill>
@@ -40152,7 +40841,7 @@
               </a:ln>
               <a:extLst>
                 <a:ext uri="{91240B29-F687-4f45-9708-019B960494DF}">
-                  <a14:hiddenLine xmlns="" xmlns:a16="http://schemas.microsoft.com/office/drawing/2014/main" xmlns:p14="http://schemas.microsoft.com/office/powerpoint/2010/main" xmlns:a14="http://schemas.microsoft.com/office/drawing/2010/main" w="9525">
+                  <a14:hiddenLine xmlns:a14="http://schemas.microsoft.com/office/drawing/2010/main" xmlns:p14="http://schemas.microsoft.com/office/powerpoint/2010/main" xmlns:a16="http://schemas.microsoft.com/office/drawing/2014/main" xmlns="" w="9525">
                     <a:solidFill>
                       <a:srgbClr val="000000"/>
                     </a:solidFill>
@@ -40264,7 +40953,7 @@
               </a:ln>
               <a:extLst>
                 <a:ext uri="{91240B29-F687-4f45-9708-019B960494DF}">
-                  <a14:hiddenLine xmlns="" xmlns:a16="http://schemas.microsoft.com/office/drawing/2014/main" xmlns:p14="http://schemas.microsoft.com/office/powerpoint/2010/main" xmlns:a14="http://schemas.microsoft.com/office/drawing/2010/main" w="9525">
+                  <a14:hiddenLine xmlns:a14="http://schemas.microsoft.com/office/drawing/2010/main" xmlns:p14="http://schemas.microsoft.com/office/powerpoint/2010/main" xmlns:a16="http://schemas.microsoft.com/office/drawing/2014/main" xmlns="" w="9525">
                     <a:solidFill>
                       <a:srgbClr val="000000"/>
                     </a:solidFill>
@@ -40320,7 +41009,7 @@
               </a:ln>
               <a:extLst>
                 <a:ext uri="{91240B29-F687-4f45-9708-019B960494DF}">
-                  <a14:hiddenLine xmlns="" xmlns:a16="http://schemas.microsoft.com/office/drawing/2014/main" xmlns:p14="http://schemas.microsoft.com/office/powerpoint/2010/main" xmlns:a14="http://schemas.microsoft.com/office/drawing/2010/main" w="9525">
+                  <a14:hiddenLine xmlns:a14="http://schemas.microsoft.com/office/drawing/2010/main" xmlns:p14="http://schemas.microsoft.com/office/powerpoint/2010/main" xmlns:a16="http://schemas.microsoft.com/office/drawing/2014/main" xmlns="" w="9525">
                     <a:solidFill>
                       <a:srgbClr val="000000"/>
                     </a:solidFill>
@@ -40513,7 +41202,7 @@
               </a:ln>
               <a:extLst>
                 <a:ext uri="{91240B29-F687-4f45-9708-019B960494DF}">
-                  <a14:hiddenLine xmlns="" xmlns:a16="http://schemas.microsoft.com/office/drawing/2014/main" xmlns:p14="http://schemas.microsoft.com/office/powerpoint/2010/main" xmlns:a14="http://schemas.microsoft.com/office/drawing/2010/main" w="9525">
+                  <a14:hiddenLine xmlns:a14="http://schemas.microsoft.com/office/drawing/2010/main" xmlns:p14="http://schemas.microsoft.com/office/powerpoint/2010/main" xmlns:a16="http://schemas.microsoft.com/office/drawing/2014/main" xmlns="" w="9525">
                     <a:solidFill>
                       <a:srgbClr val="000000"/>
                     </a:solidFill>
@@ -40625,7 +41314,7 @@
               </a:ln>
               <a:extLst>
                 <a:ext uri="{91240B29-F687-4f45-9708-019B960494DF}">
-                  <a14:hiddenLine xmlns="" xmlns:a16="http://schemas.microsoft.com/office/drawing/2014/main" xmlns:p14="http://schemas.microsoft.com/office/powerpoint/2010/main" xmlns:a14="http://schemas.microsoft.com/office/drawing/2010/main" w="9525">
+                  <a14:hiddenLine xmlns:a14="http://schemas.microsoft.com/office/drawing/2010/main" xmlns:p14="http://schemas.microsoft.com/office/powerpoint/2010/main" xmlns:a16="http://schemas.microsoft.com/office/drawing/2014/main" xmlns="" w="9525">
                     <a:solidFill>
                       <a:srgbClr val="000000"/>
                     </a:solidFill>
@@ -40737,7 +41426,7 @@
               </a:ln>
               <a:extLst>
                 <a:ext uri="{91240B29-F687-4f45-9708-019B960494DF}">
-                  <a14:hiddenLine xmlns="" xmlns:a16="http://schemas.microsoft.com/office/drawing/2014/main" xmlns:p14="http://schemas.microsoft.com/office/powerpoint/2010/main" xmlns:a14="http://schemas.microsoft.com/office/drawing/2010/main" w="9525">
+                  <a14:hiddenLine xmlns:a14="http://schemas.microsoft.com/office/drawing/2010/main" xmlns:p14="http://schemas.microsoft.com/office/powerpoint/2010/main" xmlns:a16="http://schemas.microsoft.com/office/drawing/2014/main" xmlns="" w="9525">
                     <a:solidFill>
                       <a:srgbClr val="000000"/>
                     </a:solidFill>
@@ -40821,7 +41510,7 @@
               </a:ln>
               <a:extLst>
                 <a:ext uri="{91240B29-F687-4f45-9708-019B960494DF}">
-                  <a14:hiddenLine xmlns="" xmlns:a16="http://schemas.microsoft.com/office/drawing/2014/main" xmlns:p14="http://schemas.microsoft.com/office/powerpoint/2010/main" xmlns:a14="http://schemas.microsoft.com/office/drawing/2010/main" w="9525">
+                  <a14:hiddenLine xmlns:a14="http://schemas.microsoft.com/office/drawing/2010/main" xmlns:p14="http://schemas.microsoft.com/office/powerpoint/2010/main" xmlns:a16="http://schemas.microsoft.com/office/drawing/2014/main" xmlns="" w="9525">
                     <a:solidFill>
                       <a:srgbClr val="000000"/>
                     </a:solidFill>
@@ -40933,7 +41622,7 @@
               </a:ln>
               <a:extLst>
                 <a:ext uri="{91240B29-F687-4f45-9708-019B960494DF}">
-                  <a14:hiddenLine xmlns="" xmlns:a16="http://schemas.microsoft.com/office/drawing/2014/main" xmlns:p14="http://schemas.microsoft.com/office/powerpoint/2010/main" xmlns:a14="http://schemas.microsoft.com/office/drawing/2010/main" w="9525">
+                  <a14:hiddenLine xmlns:a14="http://schemas.microsoft.com/office/drawing/2010/main" xmlns:p14="http://schemas.microsoft.com/office/powerpoint/2010/main" xmlns:a16="http://schemas.microsoft.com/office/drawing/2014/main" xmlns="" w="9525">
                     <a:solidFill>
                       <a:srgbClr val="000000"/>
                     </a:solidFill>
@@ -41017,7 +41706,7 @@
               </a:ln>
               <a:extLst>
                 <a:ext uri="{91240B29-F687-4f45-9708-019B960494DF}">
-                  <a14:hiddenLine xmlns="" xmlns:a16="http://schemas.microsoft.com/office/drawing/2014/main" xmlns:p14="http://schemas.microsoft.com/office/powerpoint/2010/main" xmlns:a14="http://schemas.microsoft.com/office/drawing/2010/main" w="9525">
+                  <a14:hiddenLine xmlns:a14="http://schemas.microsoft.com/office/drawing/2010/main" xmlns:p14="http://schemas.microsoft.com/office/powerpoint/2010/main" xmlns:a16="http://schemas.microsoft.com/office/drawing/2014/main" xmlns="" w="9525">
                     <a:solidFill>
                       <a:srgbClr val="000000"/>
                     </a:solidFill>
@@ -41101,7 +41790,7 @@
               </a:ln>
               <a:extLst>
                 <a:ext uri="{91240B29-F687-4f45-9708-019B960494DF}">
-                  <a14:hiddenLine xmlns="" xmlns:a16="http://schemas.microsoft.com/office/drawing/2014/main" xmlns:p14="http://schemas.microsoft.com/office/powerpoint/2010/main" xmlns:a14="http://schemas.microsoft.com/office/drawing/2010/main" w="9525">
+                  <a14:hiddenLine xmlns:a14="http://schemas.microsoft.com/office/drawing/2010/main" xmlns:p14="http://schemas.microsoft.com/office/powerpoint/2010/main" xmlns:a16="http://schemas.microsoft.com/office/drawing/2014/main" xmlns="" w="9525">
                     <a:solidFill>
                       <a:srgbClr val="000000"/>
                     </a:solidFill>
@@ -41213,7 +41902,7 @@
               </a:ln>
               <a:extLst>
                 <a:ext uri="{91240B29-F687-4f45-9708-019B960494DF}">
-                  <a14:hiddenLine xmlns="" xmlns:a16="http://schemas.microsoft.com/office/drawing/2014/main" xmlns:p14="http://schemas.microsoft.com/office/powerpoint/2010/main" xmlns:a14="http://schemas.microsoft.com/office/drawing/2010/main" w="9525">
+                  <a14:hiddenLine xmlns:a14="http://schemas.microsoft.com/office/drawing/2010/main" xmlns:p14="http://schemas.microsoft.com/office/powerpoint/2010/main" xmlns:a16="http://schemas.microsoft.com/office/drawing/2014/main" xmlns="" w="9525">
                     <a:solidFill>
                       <a:srgbClr val="000000"/>
                     </a:solidFill>
@@ -41325,7 +42014,7 @@
               </a:ln>
               <a:extLst>
                 <a:ext uri="{91240B29-F687-4f45-9708-019B960494DF}">
-                  <a14:hiddenLine xmlns="" xmlns:a16="http://schemas.microsoft.com/office/drawing/2014/main" xmlns:p14="http://schemas.microsoft.com/office/powerpoint/2010/main" xmlns:a14="http://schemas.microsoft.com/office/drawing/2010/main" w="9525">
+                  <a14:hiddenLine xmlns:a14="http://schemas.microsoft.com/office/drawing/2010/main" xmlns:p14="http://schemas.microsoft.com/office/powerpoint/2010/main" xmlns:a16="http://schemas.microsoft.com/office/drawing/2014/main" xmlns="" w="9525">
                     <a:solidFill>
                       <a:srgbClr val="000000"/>
                     </a:solidFill>
@@ -41409,7 +42098,7 @@
               </a:ln>
               <a:extLst>
                 <a:ext uri="{91240B29-F687-4f45-9708-019B960494DF}">
-                  <a14:hiddenLine xmlns="" xmlns:a16="http://schemas.microsoft.com/office/drawing/2014/main" xmlns:p14="http://schemas.microsoft.com/office/powerpoint/2010/main" xmlns:a14="http://schemas.microsoft.com/office/drawing/2010/main" w="9525">
+                  <a14:hiddenLine xmlns:a14="http://schemas.microsoft.com/office/drawing/2010/main" xmlns:p14="http://schemas.microsoft.com/office/powerpoint/2010/main" xmlns:a16="http://schemas.microsoft.com/office/drawing/2014/main" xmlns="" w="9525">
                     <a:solidFill>
                       <a:srgbClr val="000000"/>
                     </a:solidFill>
@@ -41541,7 +42230,7 @@
               </a:ln>
               <a:extLst>
                 <a:ext uri="{91240B29-F687-4f45-9708-019B960494DF}">
-                  <a14:hiddenLine xmlns="" xmlns:a16="http://schemas.microsoft.com/office/drawing/2014/main" xmlns:p14="http://schemas.microsoft.com/office/powerpoint/2010/main" xmlns:a14="http://schemas.microsoft.com/office/drawing/2010/main" w="9525">
+                  <a14:hiddenLine xmlns:a14="http://schemas.microsoft.com/office/drawing/2010/main" xmlns:p14="http://schemas.microsoft.com/office/powerpoint/2010/main" xmlns:a16="http://schemas.microsoft.com/office/drawing/2014/main" xmlns="" w="9525">
                     <a:solidFill>
                       <a:srgbClr val="000000"/>
                     </a:solidFill>
@@ -41669,7 +42358,7 @@
               </a:ln>
               <a:extLst>
                 <a:ext uri="{91240B29-F687-4f45-9708-019B960494DF}">
-                  <a14:hiddenLine xmlns="" xmlns:a16="http://schemas.microsoft.com/office/drawing/2014/main" xmlns:p14="http://schemas.microsoft.com/office/powerpoint/2010/main" xmlns:a14="http://schemas.microsoft.com/office/drawing/2010/main" w="9525">
+                  <a14:hiddenLine xmlns:a14="http://schemas.microsoft.com/office/drawing/2010/main" xmlns:p14="http://schemas.microsoft.com/office/powerpoint/2010/main" xmlns:a16="http://schemas.microsoft.com/office/drawing/2014/main" xmlns="" w="9525">
                     <a:solidFill>
                       <a:srgbClr val="000000"/>
                     </a:solidFill>
@@ -41753,7 +42442,7 @@
               </a:ln>
               <a:extLst>
                 <a:ext uri="{91240B29-F687-4f45-9708-019B960494DF}">
-                  <a14:hiddenLine xmlns="" xmlns:a16="http://schemas.microsoft.com/office/drawing/2014/main" xmlns:p14="http://schemas.microsoft.com/office/powerpoint/2010/main" xmlns:a14="http://schemas.microsoft.com/office/drawing/2010/main" w="9525">
+                  <a14:hiddenLine xmlns:a14="http://schemas.microsoft.com/office/drawing/2010/main" xmlns:p14="http://schemas.microsoft.com/office/powerpoint/2010/main" xmlns:a16="http://schemas.microsoft.com/office/drawing/2014/main" xmlns="" w="9525">
                     <a:solidFill>
                       <a:srgbClr val="000000"/>
                     </a:solidFill>
@@ -41837,7 +42526,7 @@
               </a:ln>
               <a:extLst>
                 <a:ext uri="{91240B29-F687-4f45-9708-019B960494DF}">
-                  <a14:hiddenLine xmlns="" xmlns:a16="http://schemas.microsoft.com/office/drawing/2014/main" xmlns:p14="http://schemas.microsoft.com/office/powerpoint/2010/main" xmlns:a14="http://schemas.microsoft.com/office/drawing/2010/main" w="9525">
+                  <a14:hiddenLine xmlns:a14="http://schemas.microsoft.com/office/drawing/2010/main" xmlns:p14="http://schemas.microsoft.com/office/powerpoint/2010/main" xmlns:a16="http://schemas.microsoft.com/office/drawing/2014/main" xmlns="" w="9525">
                     <a:solidFill>
                       <a:srgbClr val="000000"/>
                     </a:solidFill>
@@ -41949,7 +42638,7 @@
               </a:ln>
               <a:extLst>
                 <a:ext uri="{91240B29-F687-4f45-9708-019B960494DF}">
-                  <a14:hiddenLine xmlns="" xmlns:a16="http://schemas.microsoft.com/office/drawing/2014/main" xmlns:p14="http://schemas.microsoft.com/office/powerpoint/2010/main" xmlns:a14="http://schemas.microsoft.com/office/drawing/2010/main" w="9525">
+                  <a14:hiddenLine xmlns:a14="http://schemas.microsoft.com/office/drawing/2010/main" xmlns:p14="http://schemas.microsoft.com/office/powerpoint/2010/main" xmlns:a16="http://schemas.microsoft.com/office/drawing/2014/main" xmlns="" w="9525">
                     <a:solidFill>
                       <a:srgbClr val="000000"/>
                     </a:solidFill>
@@ -42005,7 +42694,7 @@
               </a:ln>
               <a:extLst>
                 <a:ext uri="{91240B29-F687-4f45-9708-019B960494DF}">
-                  <a14:hiddenLine xmlns="" xmlns:a16="http://schemas.microsoft.com/office/drawing/2014/main" xmlns:p14="http://schemas.microsoft.com/office/powerpoint/2010/main" xmlns:a14="http://schemas.microsoft.com/office/drawing/2010/main" w="9525">
+                  <a14:hiddenLine xmlns:a14="http://schemas.microsoft.com/office/drawing/2010/main" xmlns:p14="http://schemas.microsoft.com/office/powerpoint/2010/main" xmlns:a16="http://schemas.microsoft.com/office/drawing/2014/main" xmlns="" w="9525">
                     <a:solidFill>
                       <a:srgbClr val="000000"/>
                     </a:solidFill>
@@ -42092,7 +42781,7 @@
               </a:ln>
               <a:extLst>
                 <a:ext uri="{91240B29-F687-4f45-9708-019B960494DF}">
-                  <a14:hiddenLine xmlns="" xmlns:a16="http://schemas.microsoft.com/office/drawing/2014/main" xmlns:p14="http://schemas.microsoft.com/office/powerpoint/2010/main" xmlns:a14="http://schemas.microsoft.com/office/drawing/2010/main" w="9525">
+                  <a14:hiddenLine xmlns:a14="http://schemas.microsoft.com/office/drawing/2010/main" xmlns:p14="http://schemas.microsoft.com/office/powerpoint/2010/main" xmlns:a16="http://schemas.microsoft.com/office/drawing/2014/main" xmlns="" w="9525">
                     <a:solidFill>
                       <a:srgbClr val="000000"/>
                     </a:solidFill>
@@ -42204,7 +42893,7 @@
               </a:ln>
               <a:extLst>
                 <a:ext uri="{91240B29-F687-4f45-9708-019B960494DF}">
-                  <a14:hiddenLine xmlns="" xmlns:a16="http://schemas.microsoft.com/office/drawing/2014/main" xmlns:p14="http://schemas.microsoft.com/office/powerpoint/2010/main" xmlns:a14="http://schemas.microsoft.com/office/drawing/2010/main" w="9525">
+                  <a14:hiddenLine xmlns:a14="http://schemas.microsoft.com/office/drawing/2010/main" xmlns:p14="http://schemas.microsoft.com/office/powerpoint/2010/main" xmlns:a16="http://schemas.microsoft.com/office/drawing/2014/main" xmlns="" w="9525">
                     <a:solidFill>
                       <a:srgbClr val="000000"/>
                     </a:solidFill>
@@ -42288,7 +42977,7 @@
               </a:ln>
               <a:extLst>
                 <a:ext uri="{91240B29-F687-4f45-9708-019B960494DF}">
-                  <a14:hiddenLine xmlns="" xmlns:a16="http://schemas.microsoft.com/office/drawing/2014/main" xmlns:p14="http://schemas.microsoft.com/office/powerpoint/2010/main" xmlns:a14="http://schemas.microsoft.com/office/drawing/2010/main" w="9525">
+                  <a14:hiddenLine xmlns:a14="http://schemas.microsoft.com/office/drawing/2010/main" xmlns:p14="http://schemas.microsoft.com/office/powerpoint/2010/main" xmlns:a16="http://schemas.microsoft.com/office/drawing/2014/main" xmlns="" w="9525">
                     <a:solidFill>
                       <a:srgbClr val="000000"/>
                     </a:solidFill>
@@ -42400,7 +43089,7 @@
               </a:ln>
               <a:extLst>
                 <a:ext uri="{91240B29-F687-4f45-9708-019B960494DF}">
-                  <a14:hiddenLine xmlns="" xmlns:a16="http://schemas.microsoft.com/office/drawing/2014/main" xmlns:p14="http://schemas.microsoft.com/office/powerpoint/2010/main" xmlns:a14="http://schemas.microsoft.com/office/drawing/2010/main" w="9525">
+                  <a14:hiddenLine xmlns:a14="http://schemas.microsoft.com/office/drawing/2010/main" xmlns:p14="http://schemas.microsoft.com/office/powerpoint/2010/main" xmlns:a16="http://schemas.microsoft.com/office/drawing/2014/main" xmlns="" w="9525">
                     <a:solidFill>
                       <a:srgbClr val="000000"/>
                     </a:solidFill>
@@ -42487,7 +43176,7 @@
               </a:ln>
               <a:extLst>
                 <a:ext uri="{91240B29-F687-4f45-9708-019B960494DF}">
-                  <a14:hiddenLine xmlns="" xmlns:a16="http://schemas.microsoft.com/office/drawing/2014/main" xmlns:p14="http://schemas.microsoft.com/office/powerpoint/2010/main" xmlns:a14="http://schemas.microsoft.com/office/drawing/2010/main" w="9525">
+                  <a14:hiddenLine xmlns:a14="http://schemas.microsoft.com/office/drawing/2010/main" xmlns:p14="http://schemas.microsoft.com/office/powerpoint/2010/main" xmlns:a16="http://schemas.microsoft.com/office/drawing/2014/main" xmlns="" w="9525">
                     <a:solidFill>
                       <a:srgbClr val="000000"/>
                     </a:solidFill>
@@ -42571,7 +43260,7 @@
               </a:ln>
               <a:extLst>
                 <a:ext uri="{91240B29-F687-4f45-9708-019B960494DF}">
-                  <a14:hiddenLine xmlns="" xmlns:a16="http://schemas.microsoft.com/office/drawing/2014/main" xmlns:p14="http://schemas.microsoft.com/office/powerpoint/2010/main" xmlns:a14="http://schemas.microsoft.com/office/drawing/2010/main" w="9525">
+                  <a14:hiddenLine xmlns:a14="http://schemas.microsoft.com/office/drawing/2010/main" xmlns:p14="http://schemas.microsoft.com/office/powerpoint/2010/main" xmlns:a16="http://schemas.microsoft.com/office/drawing/2014/main" xmlns="" w="9525">
                     <a:solidFill>
                       <a:srgbClr val="000000"/>
                     </a:solidFill>
@@ -42683,7 +43372,7 @@
               </a:ln>
               <a:extLst>
                 <a:ext uri="{91240B29-F687-4f45-9708-019B960494DF}">
-                  <a14:hiddenLine xmlns="" xmlns:a16="http://schemas.microsoft.com/office/drawing/2014/main" xmlns:p14="http://schemas.microsoft.com/office/powerpoint/2010/main" xmlns:a14="http://schemas.microsoft.com/office/drawing/2010/main" w="9525">
+                  <a14:hiddenLine xmlns:a14="http://schemas.microsoft.com/office/drawing/2010/main" xmlns:p14="http://schemas.microsoft.com/office/powerpoint/2010/main" xmlns:a16="http://schemas.microsoft.com/office/drawing/2014/main" xmlns="" w="9525">
                     <a:solidFill>
                       <a:srgbClr val="000000"/>
                     </a:solidFill>
@@ -42795,7 +43484,7 @@
               </a:ln>
               <a:extLst>
                 <a:ext uri="{91240B29-F687-4f45-9708-019B960494DF}">
-                  <a14:hiddenLine xmlns="" xmlns:a16="http://schemas.microsoft.com/office/drawing/2014/main" xmlns:p14="http://schemas.microsoft.com/office/powerpoint/2010/main" xmlns:a14="http://schemas.microsoft.com/office/drawing/2010/main" w="9525">
+                  <a14:hiddenLine xmlns:a14="http://schemas.microsoft.com/office/drawing/2010/main" xmlns:p14="http://schemas.microsoft.com/office/powerpoint/2010/main" xmlns:a16="http://schemas.microsoft.com/office/drawing/2014/main" xmlns="" w="9525">
                     <a:solidFill>
                       <a:srgbClr val="000000"/>
                     </a:solidFill>
@@ -42882,7 +43571,7 @@
               </a:ln>
               <a:extLst>
                 <a:ext uri="{91240B29-F687-4f45-9708-019B960494DF}">
-                  <a14:hiddenLine xmlns="" xmlns:a16="http://schemas.microsoft.com/office/drawing/2014/main" xmlns:p14="http://schemas.microsoft.com/office/powerpoint/2010/main" xmlns:a14="http://schemas.microsoft.com/office/drawing/2010/main" w="9525">
+                  <a14:hiddenLine xmlns:a14="http://schemas.microsoft.com/office/drawing/2010/main" xmlns:p14="http://schemas.microsoft.com/office/powerpoint/2010/main" xmlns:a16="http://schemas.microsoft.com/office/drawing/2014/main" xmlns="" w="9525">
                     <a:solidFill>
                       <a:srgbClr val="000000"/>
                     </a:solidFill>
@@ -43024,7 +43713,7 @@
               </a:ln>
               <a:extLst>
                 <a:ext uri="{91240B29-F687-4f45-9708-019B960494DF}">
-                  <a14:hiddenLine xmlns="" xmlns:a16="http://schemas.microsoft.com/office/drawing/2014/main" xmlns:p14="http://schemas.microsoft.com/office/powerpoint/2010/main" xmlns:a14="http://schemas.microsoft.com/office/drawing/2010/main" w="9525">
+                  <a14:hiddenLine xmlns:a14="http://schemas.microsoft.com/office/drawing/2010/main" xmlns:p14="http://schemas.microsoft.com/office/powerpoint/2010/main" xmlns:a16="http://schemas.microsoft.com/office/drawing/2014/main" xmlns="" w="9525">
                     <a:solidFill>
                       <a:srgbClr val="000000"/>
                     </a:solidFill>
@@ -43156,7 +43845,7 @@
               </a:ln>
               <a:extLst>
                 <a:ext uri="{91240B29-F687-4f45-9708-019B960494DF}">
-                  <a14:hiddenLine xmlns="" xmlns:a16="http://schemas.microsoft.com/office/drawing/2014/main" xmlns:p14="http://schemas.microsoft.com/office/powerpoint/2010/main" xmlns:a14="http://schemas.microsoft.com/office/drawing/2010/main" w="9525">
+                  <a14:hiddenLine xmlns:a14="http://schemas.microsoft.com/office/drawing/2010/main" xmlns:p14="http://schemas.microsoft.com/office/powerpoint/2010/main" xmlns:a16="http://schemas.microsoft.com/office/drawing/2014/main" xmlns="" w="9525">
                     <a:solidFill>
                       <a:srgbClr val="000000"/>
                     </a:solidFill>
@@ -43293,7 +43982,7 @@
               </a:ln>
               <a:extLst>
                 <a:ext uri="{91240B29-F687-4f45-9708-019B960494DF}">
-                  <a14:hiddenLine xmlns="" xmlns:a16="http://schemas.microsoft.com/office/drawing/2014/main" xmlns:p14="http://schemas.microsoft.com/office/powerpoint/2010/main" xmlns:a14="http://schemas.microsoft.com/office/drawing/2010/main" w="9525">
+                  <a14:hiddenLine xmlns:a14="http://schemas.microsoft.com/office/drawing/2010/main" xmlns:p14="http://schemas.microsoft.com/office/powerpoint/2010/main" xmlns:a16="http://schemas.microsoft.com/office/drawing/2014/main" xmlns="" w="9525">
                     <a:solidFill>
                       <a:srgbClr val="000000"/>
                     </a:solidFill>
@@ -43405,7 +44094,7 @@
               </a:ln>
               <a:extLst>
                 <a:ext uri="{91240B29-F687-4f45-9708-019B960494DF}">
-                  <a14:hiddenLine xmlns="" xmlns:a16="http://schemas.microsoft.com/office/drawing/2014/main" xmlns:p14="http://schemas.microsoft.com/office/powerpoint/2010/main" xmlns:a14="http://schemas.microsoft.com/office/drawing/2010/main" w="9525">
+                  <a14:hiddenLine xmlns:a14="http://schemas.microsoft.com/office/drawing/2010/main" xmlns:p14="http://schemas.microsoft.com/office/powerpoint/2010/main" xmlns:a16="http://schemas.microsoft.com/office/drawing/2014/main" xmlns="" w="9525">
                     <a:solidFill>
                       <a:srgbClr val="000000"/>
                     </a:solidFill>
@@ -43492,7 +44181,7 @@
               </a:ln>
               <a:extLst>
                 <a:ext uri="{91240B29-F687-4f45-9708-019B960494DF}">
-                  <a14:hiddenLine xmlns="" xmlns:a16="http://schemas.microsoft.com/office/drawing/2014/main" xmlns:p14="http://schemas.microsoft.com/office/powerpoint/2010/main" xmlns:a14="http://schemas.microsoft.com/office/drawing/2010/main" w="9525">
+                  <a14:hiddenLine xmlns:a14="http://schemas.microsoft.com/office/drawing/2010/main" xmlns:p14="http://schemas.microsoft.com/office/powerpoint/2010/main" xmlns:a16="http://schemas.microsoft.com/office/drawing/2014/main" xmlns="" w="9525">
                     <a:solidFill>
                       <a:srgbClr val="000000"/>
                     </a:solidFill>
@@ -43604,7 +44293,7 @@
               </a:ln>
               <a:extLst>
                 <a:ext uri="{91240B29-F687-4f45-9708-019B960494DF}">
-                  <a14:hiddenLine xmlns="" xmlns:a16="http://schemas.microsoft.com/office/drawing/2014/main" xmlns:p14="http://schemas.microsoft.com/office/powerpoint/2010/main" xmlns:a14="http://schemas.microsoft.com/office/drawing/2010/main" w="9525">
+                  <a14:hiddenLine xmlns:a14="http://schemas.microsoft.com/office/drawing/2010/main" xmlns:p14="http://schemas.microsoft.com/office/powerpoint/2010/main" xmlns:a16="http://schemas.microsoft.com/office/drawing/2014/main" xmlns="" w="9525">
                     <a:solidFill>
                       <a:srgbClr val="000000"/>
                     </a:solidFill>
@@ -43694,7 +44383,7 @@
               </a:ln>
               <a:extLst>
                 <a:ext uri="{91240B29-F687-4f45-9708-019B960494DF}">
-                  <a14:hiddenLine xmlns="" xmlns:a16="http://schemas.microsoft.com/office/drawing/2014/main" xmlns:p14="http://schemas.microsoft.com/office/powerpoint/2010/main" xmlns:a14="http://schemas.microsoft.com/office/drawing/2010/main" w="9525">
+                  <a14:hiddenLine xmlns:a14="http://schemas.microsoft.com/office/drawing/2010/main" xmlns:p14="http://schemas.microsoft.com/office/powerpoint/2010/main" xmlns:a16="http://schemas.microsoft.com/office/drawing/2014/main" xmlns="" w="9525">
                     <a:solidFill>
                       <a:srgbClr val="000000"/>
                     </a:solidFill>
@@ -43806,7 +44495,7 @@
               </a:ln>
               <a:extLst>
                 <a:ext uri="{91240B29-F687-4f45-9708-019B960494DF}">
-                  <a14:hiddenLine xmlns="" xmlns:a16="http://schemas.microsoft.com/office/drawing/2014/main" xmlns:p14="http://schemas.microsoft.com/office/powerpoint/2010/main" xmlns:a14="http://schemas.microsoft.com/office/drawing/2010/main" w="9525">
+                  <a14:hiddenLine xmlns:a14="http://schemas.microsoft.com/office/drawing/2010/main" xmlns:p14="http://schemas.microsoft.com/office/powerpoint/2010/main" xmlns:a16="http://schemas.microsoft.com/office/drawing/2014/main" xmlns="" w="9525">
                     <a:solidFill>
                       <a:srgbClr val="000000"/>
                     </a:solidFill>
@@ -43896,7 +44585,7 @@
               </a:ln>
               <a:extLst>
                 <a:ext uri="{91240B29-F687-4f45-9708-019B960494DF}">
-                  <a14:hiddenLine xmlns="" xmlns:a16="http://schemas.microsoft.com/office/drawing/2014/main" xmlns:p14="http://schemas.microsoft.com/office/powerpoint/2010/main" xmlns:a14="http://schemas.microsoft.com/office/drawing/2010/main" w="9525">
+                  <a14:hiddenLine xmlns:a14="http://schemas.microsoft.com/office/drawing/2010/main" xmlns:p14="http://schemas.microsoft.com/office/powerpoint/2010/main" xmlns:a16="http://schemas.microsoft.com/office/drawing/2014/main" xmlns="" w="9525">
                     <a:solidFill>
                       <a:srgbClr val="000000"/>
                     </a:solidFill>
@@ -44008,7 +44697,7 @@
               </a:ln>
               <a:extLst>
                 <a:ext uri="{91240B29-F687-4f45-9708-019B960494DF}">
-                  <a14:hiddenLine xmlns="" xmlns:a16="http://schemas.microsoft.com/office/drawing/2014/main" xmlns:p14="http://schemas.microsoft.com/office/powerpoint/2010/main" xmlns:a14="http://schemas.microsoft.com/office/drawing/2010/main" w="9525">
+                  <a14:hiddenLine xmlns:a14="http://schemas.microsoft.com/office/drawing/2010/main" xmlns:p14="http://schemas.microsoft.com/office/powerpoint/2010/main" xmlns:a16="http://schemas.microsoft.com/office/drawing/2014/main" xmlns="" w="9525">
                     <a:solidFill>
                       <a:srgbClr val="000000"/>
                     </a:solidFill>
@@ -44064,7 +44753,7 @@
               </a:ln>
               <a:extLst>
                 <a:ext uri="{91240B29-F687-4f45-9708-019B960494DF}">
-                  <a14:hiddenLine xmlns="" xmlns:a16="http://schemas.microsoft.com/office/drawing/2014/main" xmlns:p14="http://schemas.microsoft.com/office/powerpoint/2010/main" xmlns:a14="http://schemas.microsoft.com/office/drawing/2010/main" w="9525">
+                  <a14:hiddenLine xmlns:a14="http://schemas.microsoft.com/office/drawing/2010/main" xmlns:p14="http://schemas.microsoft.com/office/powerpoint/2010/main" xmlns:a16="http://schemas.microsoft.com/office/drawing/2014/main" xmlns="" w="9525">
                     <a:solidFill>
                       <a:srgbClr val="000000"/>
                     </a:solidFill>
@@ -44133,7 +44822,7 @@
           <a:noFill/>
           <a:extLst>
             <a:ext uri="{909E8E84-426E-40dd-AFC4-6F175D3DCCD1}">
-              <a14:hiddenFill xmlns="" xmlns:a16="http://schemas.microsoft.com/office/drawing/2014/main" xmlns:p14="http://schemas.microsoft.com/office/powerpoint/2010/main" xmlns:a14="http://schemas.microsoft.com/office/drawing/2010/main">
+              <a14:hiddenFill xmlns:a14="http://schemas.microsoft.com/office/drawing/2010/main" xmlns:p14="http://schemas.microsoft.com/office/powerpoint/2010/main" xmlns:a16="http://schemas.microsoft.com/office/drawing/2014/main" xmlns="">
                 <a:solidFill>
                   <a:srgbClr val="FFFFFF"/>
                 </a:solidFill>
